--- a/pptx/Lecture5.pptx
+++ b/pptx/Lecture5.pptx
@@ -5,7 +5,7 @@
     <p:sldMasterId id="2147483648" r:id="rId1"/>
   </p:sldMasterIdLst>
   <p:notesMasterIdLst>
-    <p:notesMasterId r:id="rId28"/>
+    <p:notesMasterId r:id="rId38"/>
   </p:notesMasterIdLst>
   <p:sldIdLst>
     <p:sldId id="256" r:id="rId2"/>
@@ -21,19 +21,29 @@
     <p:sldId id="347" r:id="rId12"/>
     <p:sldId id="348" r:id="rId13"/>
     <p:sldId id="349" r:id="rId14"/>
-    <p:sldId id="334" r:id="rId15"/>
-    <p:sldId id="350" r:id="rId16"/>
-    <p:sldId id="305" r:id="rId17"/>
-    <p:sldId id="351" r:id="rId18"/>
-    <p:sldId id="335" r:id="rId19"/>
-    <p:sldId id="339" r:id="rId20"/>
-    <p:sldId id="340" r:id="rId21"/>
-    <p:sldId id="353" r:id="rId22"/>
-    <p:sldId id="341" r:id="rId23"/>
-    <p:sldId id="342" r:id="rId24"/>
-    <p:sldId id="309" r:id="rId25"/>
-    <p:sldId id="301" r:id="rId26"/>
-    <p:sldId id="352" r:id="rId27"/>
+    <p:sldId id="305" r:id="rId15"/>
+    <p:sldId id="334" r:id="rId16"/>
+    <p:sldId id="350" r:id="rId17"/>
+    <p:sldId id="363" r:id="rId18"/>
+    <p:sldId id="351" r:id="rId19"/>
+    <p:sldId id="335" r:id="rId20"/>
+    <p:sldId id="339" r:id="rId21"/>
+    <p:sldId id="340" r:id="rId22"/>
+    <p:sldId id="353" r:id="rId23"/>
+    <p:sldId id="341" r:id="rId24"/>
+    <p:sldId id="354" r:id="rId25"/>
+    <p:sldId id="358" r:id="rId26"/>
+    <p:sldId id="342" r:id="rId27"/>
+    <p:sldId id="359" r:id="rId28"/>
+    <p:sldId id="360" r:id="rId29"/>
+    <p:sldId id="361" r:id="rId30"/>
+    <p:sldId id="362" r:id="rId31"/>
+    <p:sldId id="309" r:id="rId32"/>
+    <p:sldId id="355" r:id="rId33"/>
+    <p:sldId id="356" r:id="rId34"/>
+    <p:sldId id="357" r:id="rId35"/>
+    <p:sldId id="301" r:id="rId36"/>
+    <p:sldId id="352" r:id="rId37"/>
   </p:sldIdLst>
   <p:sldSz cx="12192000" cy="6858000"/>
   <p:notesSz cx="6858000" cy="9144000"/>
@@ -132,12 +142,265 @@
       </a:defRPr>
     </a:lvl9pPr>
   </p:defaultTextStyle>
-  <p:extLst>
-    <p:ext uri="{EFAFB233-063F-42B5-8137-9DF3F51BA10A}">
-      <p15:sldGuideLst xmlns:p15="http://schemas.microsoft.com/office/powerpoint/2012/main"/>
-    </p:ext>
-  </p:extLst>
 </p:presentation>
+</file>
+
+<file path=ppt/revisionInfo.xml><?xml version="1.0" encoding="utf-8"?>
+<p1510:revInfo xmlns:a="http://schemas.openxmlformats.org/drawingml/2006/main" xmlns:r="http://schemas.openxmlformats.org/officeDocument/2006/relationships" xmlns:p1510="http://schemas.microsoft.com/office/powerpoint/2015/10/main">
+  <p1510:revLst>
+    <p1510:client id="{D68BA75F-BB6E-9F18-1648-74F52ADBFB50}" v="317" dt="2026-09-14T21:32:23.525"/>
+  </p1510:revLst>
+</p1510:revInfo>
+</file>
+
+<file path=ppt/changesInfos/changesInfo1.xml><?xml version="1.0" encoding="utf-8"?>
+<pc:chgInfo xmlns:a="http://schemas.openxmlformats.org/drawingml/2006/main" xmlns:r="http://schemas.openxmlformats.org/officeDocument/2006/relationships" xmlns:ac="http://schemas.microsoft.com/office/drawing/2013/main/command" xmlns:pc="http://schemas.microsoft.com/office/powerpoint/2013/main/command">
+  <pc:docChgLst>
+    <pc:chgData name="Onishi, Saryu" userId="S::saryu@ou.edu::24ec4854-0e9b-4cd9-95b4-b9d15917116b" providerId="AD" clId="Web-{D68BA75F-BB6E-9F18-1648-74F52ADBFB50}"/>
+    <pc:docChg chg="addSld modSld">
+      <pc:chgData name="Onishi, Saryu" userId="S::saryu@ou.edu::24ec4854-0e9b-4cd9-95b4-b9d15917116b" providerId="AD" clId="Web-{D68BA75F-BB6E-9F18-1648-74F52ADBFB50}" dt="2026-09-14T21:32:21.071" v="322"/>
+      <pc:docMkLst>
+        <pc:docMk/>
+      </pc:docMkLst>
+      <pc:sldChg chg="modSp">
+        <pc:chgData name="Onishi, Saryu" userId="S::saryu@ou.edu::24ec4854-0e9b-4cd9-95b4-b9d15917116b" providerId="AD" clId="Web-{D68BA75F-BB6E-9F18-1648-74F52ADBFB50}" dt="2026-09-14T21:23:01.601" v="188" actId="20577"/>
+        <pc:sldMkLst>
+          <pc:docMk/>
+          <pc:sldMk cId="2206692154" sldId="301"/>
+        </pc:sldMkLst>
+        <pc:spChg chg="mod">
+          <ac:chgData name="Onishi, Saryu" userId="S::saryu@ou.edu::24ec4854-0e9b-4cd9-95b4-b9d15917116b" providerId="AD" clId="Web-{D68BA75F-BB6E-9F18-1648-74F52ADBFB50}" dt="2026-09-14T21:23:01.601" v="188" actId="20577"/>
+          <ac:spMkLst>
+            <pc:docMk/>
+            <pc:sldMk cId="2206692154" sldId="301"/>
+            <ac:spMk id="3" creationId="{B7781857-C6C4-CF29-7D9F-C7FCD74ECA0D}"/>
+          </ac:spMkLst>
+        </pc:spChg>
+      </pc:sldChg>
+      <pc:sldChg chg="modSp">
+        <pc:chgData name="Onishi, Saryu" userId="S::saryu@ou.edu::24ec4854-0e9b-4cd9-95b4-b9d15917116b" providerId="AD" clId="Web-{D68BA75F-BB6E-9F18-1648-74F52ADBFB50}" dt="2026-09-14T21:16:29.569" v="91" actId="20577"/>
+        <pc:sldMkLst>
+          <pc:docMk/>
+          <pc:sldMk cId="404022894" sldId="309"/>
+        </pc:sldMkLst>
+        <pc:spChg chg="mod">
+          <ac:chgData name="Onishi, Saryu" userId="S::saryu@ou.edu::24ec4854-0e9b-4cd9-95b4-b9d15917116b" providerId="AD" clId="Web-{D68BA75F-BB6E-9F18-1648-74F52ADBFB50}" dt="2026-09-14T21:16:29.569" v="91" actId="20577"/>
+          <ac:spMkLst>
+            <pc:docMk/>
+            <pc:sldMk cId="404022894" sldId="309"/>
+            <ac:spMk id="3" creationId="{51729538-923D-458B-77DC-2E172E5670ED}"/>
+          </ac:spMkLst>
+        </pc:spChg>
+      </pc:sldChg>
+      <pc:sldChg chg="modSp">
+        <pc:chgData name="Onishi, Saryu" userId="S::saryu@ou.edu::24ec4854-0e9b-4cd9-95b4-b9d15917116b" providerId="AD" clId="Web-{D68BA75F-BB6E-9F18-1648-74F52ADBFB50}" dt="2026-09-14T21:07:36.208" v="9" actId="1076"/>
+        <pc:sldMkLst>
+          <pc:docMk/>
+          <pc:sldMk cId="2375312425" sldId="341"/>
+        </pc:sldMkLst>
+        <pc:spChg chg="mod">
+          <ac:chgData name="Onishi, Saryu" userId="S::saryu@ou.edu::24ec4854-0e9b-4cd9-95b4-b9d15917116b" providerId="AD" clId="Web-{D68BA75F-BB6E-9F18-1648-74F52ADBFB50}" dt="2026-09-14T21:07:32.817" v="8" actId="20577"/>
+          <ac:spMkLst>
+            <pc:docMk/>
+            <pc:sldMk cId="2375312425" sldId="341"/>
+            <ac:spMk id="3" creationId="{81DA9FF1-2CFE-687B-73EB-63D88B461873}"/>
+          </ac:spMkLst>
+        </pc:spChg>
+        <pc:spChg chg="mod">
+          <ac:chgData name="Onishi, Saryu" userId="S::saryu@ou.edu::24ec4854-0e9b-4cd9-95b4-b9d15917116b" providerId="AD" clId="Web-{D68BA75F-BB6E-9F18-1648-74F52ADBFB50}" dt="2026-09-14T21:07:36.208" v="9" actId="1076"/>
+          <ac:spMkLst>
+            <pc:docMk/>
+            <pc:sldMk cId="2375312425" sldId="341"/>
+            <ac:spMk id="5" creationId="{6F87B829-A4B6-1F78-9DA5-137B29194ED2}"/>
+          </ac:spMkLst>
+        </pc:spChg>
+      </pc:sldChg>
+      <pc:sldChg chg="modSp new">
+        <pc:chgData name="Onishi, Saryu" userId="S::saryu@ou.edu::24ec4854-0e9b-4cd9-95b4-b9d15917116b" providerId="AD" clId="Web-{D68BA75F-BB6E-9F18-1648-74F52ADBFB50}" dt="2026-09-14T21:24:18.789" v="206" actId="20577"/>
+        <pc:sldMkLst>
+          <pc:docMk/>
+          <pc:sldMk cId="2874847518" sldId="354"/>
+        </pc:sldMkLst>
+        <pc:spChg chg="mod">
+          <ac:chgData name="Onishi, Saryu" userId="S::saryu@ou.edu::24ec4854-0e9b-4cd9-95b4-b9d15917116b" providerId="AD" clId="Web-{D68BA75F-BB6E-9F18-1648-74F52ADBFB50}" dt="2026-09-14T21:15:16.819" v="74" actId="20577"/>
+          <ac:spMkLst>
+            <pc:docMk/>
+            <pc:sldMk cId="2874847518" sldId="354"/>
+            <ac:spMk id="2" creationId="{B112D2BE-C4C4-4D20-846C-3EF3A9972AED}"/>
+          </ac:spMkLst>
+        </pc:spChg>
+        <pc:spChg chg="mod">
+          <ac:chgData name="Onishi, Saryu" userId="S::saryu@ou.edu::24ec4854-0e9b-4cd9-95b4-b9d15917116b" providerId="AD" clId="Web-{D68BA75F-BB6E-9F18-1648-74F52ADBFB50}" dt="2026-09-14T21:24:18.789" v="206" actId="20577"/>
+          <ac:spMkLst>
+            <pc:docMk/>
+            <pc:sldMk cId="2874847518" sldId="354"/>
+            <ac:spMk id="3" creationId="{D45FD767-E1AA-9C8B-849F-6E11EB3CB6C0}"/>
+          </ac:spMkLst>
+        </pc:spChg>
+      </pc:sldChg>
+      <pc:sldChg chg="modSp new">
+        <pc:chgData name="Onishi, Saryu" userId="S::saryu@ou.edu::24ec4854-0e9b-4cd9-95b4-b9d15917116b" providerId="AD" clId="Web-{D68BA75F-BB6E-9F18-1648-74F52ADBFB50}" dt="2026-09-14T21:17:39.194" v="127" actId="20577"/>
+        <pc:sldMkLst>
+          <pc:docMk/>
+          <pc:sldMk cId="809028509" sldId="355"/>
+        </pc:sldMkLst>
+        <pc:spChg chg="mod">
+          <ac:chgData name="Onishi, Saryu" userId="S::saryu@ou.edu::24ec4854-0e9b-4cd9-95b4-b9d15917116b" providerId="AD" clId="Web-{D68BA75F-BB6E-9F18-1648-74F52ADBFB50}" dt="2026-09-14T21:17:39.194" v="127" actId="20577"/>
+          <ac:spMkLst>
+            <pc:docMk/>
+            <pc:sldMk cId="809028509" sldId="355"/>
+            <ac:spMk id="2" creationId="{9B3B2596-FD5F-03B2-820D-4B9F36FB3D0A}"/>
+          </ac:spMkLst>
+        </pc:spChg>
+        <pc:spChg chg="mod">
+          <ac:chgData name="Onishi, Saryu" userId="S::saryu@ou.edu::24ec4854-0e9b-4cd9-95b4-b9d15917116b" providerId="AD" clId="Web-{D68BA75F-BB6E-9F18-1648-74F52ADBFB50}" dt="2026-09-14T21:17:17.678" v="121" actId="20577"/>
+          <ac:spMkLst>
+            <pc:docMk/>
+            <pc:sldMk cId="809028509" sldId="355"/>
+            <ac:spMk id="3" creationId="{FAB2016C-BC61-0A1A-E451-7B3E637EF84A}"/>
+          </ac:spMkLst>
+        </pc:spChg>
+      </pc:sldChg>
+      <pc:sldChg chg="modSp new">
+        <pc:chgData name="Onishi, Saryu" userId="S::saryu@ou.edu::24ec4854-0e9b-4cd9-95b4-b9d15917116b" providerId="AD" clId="Web-{D68BA75F-BB6E-9F18-1648-74F52ADBFB50}" dt="2026-09-14T21:17:57.460" v="132" actId="20577"/>
+        <pc:sldMkLst>
+          <pc:docMk/>
+          <pc:sldMk cId="4290967881" sldId="356"/>
+        </pc:sldMkLst>
+        <pc:spChg chg="mod">
+          <ac:chgData name="Onishi, Saryu" userId="S::saryu@ou.edu::24ec4854-0e9b-4cd9-95b4-b9d15917116b" providerId="AD" clId="Web-{D68BA75F-BB6E-9F18-1648-74F52ADBFB50}" dt="2026-09-14T21:17:53.944" v="130" actId="20577"/>
+          <ac:spMkLst>
+            <pc:docMk/>
+            <pc:sldMk cId="4290967881" sldId="356"/>
+            <ac:spMk id="2" creationId="{E2FA18D7-28B2-133F-662F-90CC8F55869B}"/>
+          </ac:spMkLst>
+        </pc:spChg>
+        <pc:spChg chg="mod">
+          <ac:chgData name="Onishi, Saryu" userId="S::saryu@ou.edu::24ec4854-0e9b-4cd9-95b4-b9d15917116b" providerId="AD" clId="Web-{D68BA75F-BB6E-9F18-1648-74F52ADBFB50}" dt="2026-09-14T21:17:57.460" v="132" actId="20577"/>
+          <ac:spMkLst>
+            <pc:docMk/>
+            <pc:sldMk cId="4290967881" sldId="356"/>
+            <ac:spMk id="3" creationId="{C603F302-AE7F-8CE3-9FC5-7C9203D4C4E2}"/>
+          </ac:spMkLst>
+        </pc:spChg>
+      </pc:sldChg>
+      <pc:sldChg chg="modSp add replId">
+        <pc:chgData name="Onishi, Saryu" userId="S::saryu@ou.edu::24ec4854-0e9b-4cd9-95b4-b9d15917116b" providerId="AD" clId="Web-{D68BA75F-BB6E-9F18-1648-74F52ADBFB50}" dt="2026-09-14T21:18:30.835" v="139" actId="20577"/>
+        <pc:sldMkLst>
+          <pc:docMk/>
+          <pc:sldMk cId="1767871761" sldId="357"/>
+        </pc:sldMkLst>
+        <pc:spChg chg="mod">
+          <ac:chgData name="Onishi, Saryu" userId="S::saryu@ou.edu::24ec4854-0e9b-4cd9-95b4-b9d15917116b" providerId="AD" clId="Web-{D68BA75F-BB6E-9F18-1648-74F52ADBFB50}" dt="2026-09-14T21:18:30.835" v="139" actId="20577"/>
+          <ac:spMkLst>
+            <pc:docMk/>
+            <pc:sldMk cId="1767871761" sldId="357"/>
+            <ac:spMk id="3" creationId="{F328F1A0-F2E2-C4F6-63D0-F385C2C08D80}"/>
+          </ac:spMkLst>
+        </pc:spChg>
+      </pc:sldChg>
+      <pc:sldChg chg="add mod replId modShow">
+        <pc:chgData name="Onishi, Saryu" userId="S::saryu@ou.edu::24ec4854-0e9b-4cd9-95b4-b9d15917116b" providerId="AD" clId="Web-{D68BA75F-BB6E-9F18-1648-74F52ADBFB50}" dt="2026-09-14T21:24:20.117" v="207"/>
+        <pc:sldMkLst>
+          <pc:docMk/>
+          <pc:sldMk cId="2995389737" sldId="358"/>
+        </pc:sldMkLst>
+      </pc:sldChg>
+      <pc:sldChg chg="modSp add replId">
+        <pc:chgData name="Onishi, Saryu" userId="S::saryu@ou.edu::24ec4854-0e9b-4cd9-95b4-b9d15917116b" providerId="AD" clId="Web-{D68BA75F-BB6E-9F18-1648-74F52ADBFB50}" dt="2026-09-14T21:25:34.258" v="214" actId="20577"/>
+        <pc:sldMkLst>
+          <pc:docMk/>
+          <pc:sldMk cId="1243830769" sldId="359"/>
+        </pc:sldMkLst>
+        <pc:spChg chg="mod">
+          <ac:chgData name="Onishi, Saryu" userId="S::saryu@ou.edu::24ec4854-0e9b-4cd9-95b4-b9d15917116b" providerId="AD" clId="Web-{D68BA75F-BB6E-9F18-1648-74F52ADBFB50}" dt="2026-09-14T21:25:34.258" v="214" actId="20577"/>
+          <ac:spMkLst>
+            <pc:docMk/>
+            <pc:sldMk cId="1243830769" sldId="359"/>
+            <ac:spMk id="3" creationId="{451547EC-8C64-0100-020D-0D8510686817}"/>
+          </ac:spMkLst>
+        </pc:spChg>
+      </pc:sldChg>
+      <pc:sldChg chg="modSp new">
+        <pc:chgData name="Onishi, Saryu" userId="S::saryu@ou.edu::24ec4854-0e9b-4cd9-95b4-b9d15917116b" providerId="AD" clId="Web-{D68BA75F-BB6E-9F18-1648-74F52ADBFB50}" dt="2026-09-14T21:26:53.070" v="229" actId="20577"/>
+        <pc:sldMkLst>
+          <pc:docMk/>
+          <pc:sldMk cId="2381630488" sldId="360"/>
+        </pc:sldMkLst>
+        <pc:spChg chg="mod">
+          <ac:chgData name="Onishi, Saryu" userId="S::saryu@ou.edu::24ec4854-0e9b-4cd9-95b4-b9d15917116b" providerId="AD" clId="Web-{D68BA75F-BB6E-9F18-1648-74F52ADBFB50}" dt="2026-09-14T21:26:53.070" v="229" actId="20577"/>
+          <ac:spMkLst>
+            <pc:docMk/>
+            <pc:sldMk cId="2381630488" sldId="360"/>
+            <ac:spMk id="3" creationId="{573F9774-8134-A9A4-DA1E-3A021D0E75A4}"/>
+          </ac:spMkLst>
+        </pc:spChg>
+      </pc:sldChg>
+      <pc:sldChg chg="addSp modSp new">
+        <pc:chgData name="Onishi, Saryu" userId="S::saryu@ou.edu::24ec4854-0e9b-4cd9-95b4-b9d15917116b" providerId="AD" clId="Web-{D68BA75F-BB6E-9F18-1648-74F52ADBFB50}" dt="2026-09-14T21:28:09.180" v="264"/>
+        <pc:sldMkLst>
+          <pc:docMk/>
+          <pc:sldMk cId="1486169029" sldId="361"/>
+        </pc:sldMkLst>
+        <pc:spChg chg="mod">
+          <ac:chgData name="Onishi, Saryu" userId="S::saryu@ou.edu::24ec4854-0e9b-4cd9-95b4-b9d15917116b" providerId="AD" clId="Web-{D68BA75F-BB6E-9F18-1648-74F52ADBFB50}" dt="2026-09-14T21:27:11.758" v="238" actId="20577"/>
+          <ac:spMkLst>
+            <pc:docMk/>
+            <pc:sldMk cId="1486169029" sldId="361"/>
+            <ac:spMk id="2" creationId="{519443A2-C56F-F6DF-D387-0E48376C5816}"/>
+          </ac:spMkLst>
+        </pc:spChg>
+        <pc:spChg chg="mod">
+          <ac:chgData name="Onishi, Saryu" userId="S::saryu@ou.edu::24ec4854-0e9b-4cd9-95b4-b9d15917116b" providerId="AD" clId="Web-{D68BA75F-BB6E-9F18-1648-74F52ADBFB50}" dt="2026-09-14T21:27:21.649" v="246" actId="20577"/>
+          <ac:spMkLst>
+            <pc:docMk/>
+            <pc:sldMk cId="1486169029" sldId="361"/>
+            <ac:spMk id="3" creationId="{B4660DEF-0C6D-4352-D4C1-3F9EDC657A6D}"/>
+          </ac:spMkLst>
+        </pc:spChg>
+        <pc:spChg chg="add mod">
+          <ac:chgData name="Onishi, Saryu" userId="S::saryu@ou.edu::24ec4854-0e9b-4cd9-95b4-b9d15917116b" providerId="AD" clId="Web-{D68BA75F-BB6E-9F18-1648-74F52ADBFB50}" dt="2026-09-14T21:28:09.180" v="264"/>
+          <ac:spMkLst>
+            <pc:docMk/>
+            <pc:sldMk cId="1486169029" sldId="361"/>
+            <ac:spMk id="4" creationId="{ADEF0CF4-9F0B-9BCC-D6D4-49A532E4AD93}"/>
+          </ac:spMkLst>
+        </pc:spChg>
+      </pc:sldChg>
+      <pc:sldChg chg="addSp modSp new">
+        <pc:chgData name="Onishi, Saryu" userId="S::saryu@ou.edu::24ec4854-0e9b-4cd9-95b4-b9d15917116b" providerId="AD" clId="Web-{D68BA75F-BB6E-9F18-1648-74F52ADBFB50}" dt="2026-09-14T21:32:21.071" v="322"/>
+        <pc:sldMkLst>
+          <pc:docMk/>
+          <pc:sldMk cId="2995797760" sldId="362"/>
+        </pc:sldMkLst>
+        <pc:spChg chg="mod">
+          <ac:chgData name="Onishi, Saryu" userId="S::saryu@ou.edu::24ec4854-0e9b-4cd9-95b4-b9d15917116b" providerId="AD" clId="Web-{D68BA75F-BB6E-9F18-1648-74F52ADBFB50}" dt="2026-09-14T21:28:52.883" v="278" actId="20577"/>
+          <ac:spMkLst>
+            <pc:docMk/>
+            <pc:sldMk cId="2995797760" sldId="362"/>
+            <ac:spMk id="2" creationId="{79865F0B-0A66-FF8B-3F5C-3BDD7AF304A8}"/>
+          </ac:spMkLst>
+        </pc:spChg>
+        <pc:spChg chg="mod">
+          <ac:chgData name="Onishi, Saryu" userId="S::saryu@ou.edu::24ec4854-0e9b-4cd9-95b4-b9d15917116b" providerId="AD" clId="Web-{D68BA75F-BB6E-9F18-1648-74F52ADBFB50}" dt="2026-09-14T21:32:16.696" v="320" actId="20577"/>
+          <ac:spMkLst>
+            <pc:docMk/>
+            <pc:sldMk cId="2995797760" sldId="362"/>
+            <ac:spMk id="3" creationId="{44203125-B9A9-9921-B918-608635B0F058}"/>
+          </ac:spMkLst>
+        </pc:spChg>
+        <pc:graphicFrameChg chg="add mod modGraphic">
+          <ac:chgData name="Onishi, Saryu" userId="S::saryu@ou.edu::24ec4854-0e9b-4cd9-95b4-b9d15917116b" providerId="AD" clId="Web-{D68BA75F-BB6E-9F18-1648-74F52ADBFB50}" dt="2026-09-14T21:32:21.071" v="322"/>
+          <ac:graphicFrameMkLst>
+            <pc:docMk/>
+            <pc:sldMk cId="2995797760" sldId="362"/>
+            <ac:graphicFrameMk id="5" creationId="{0EB1E87E-8339-EF70-96ED-F69529683223}"/>
+          </ac:graphicFrameMkLst>
+        </pc:graphicFrameChg>
+      </pc:sldChg>
+    </pc:docChg>
+  </pc:docChgLst>
+</pc:chgInfo>
 </file>
 
 <file path=ppt/notesMasters/notesMaster1.xml><?xml version="1.0" encoding="utf-8"?>
@@ -222,7 +485,7 @@
           <a:p>
             <a:fld id="{4995A223-E7C9-A243-9A70-FE01E1A1DD65}" type="datetimeFigureOut">
               <a:rPr lang="en-US" smtClean="0"/>
-              <a:t>9/14/2026</a:t>
+              <a:t>9/15/2026</a:t>
             </a:fld>
             <a:endParaRPr lang="en-US"/>
           </a:p>
@@ -552,7 +815,7 @@
               <a:defRPr/>
             </a:pPr>
             <a:r>
-              <a:rPr lang="en-US" dirty="0"/>
+              <a:rPr lang="en-US"/>
               <a:t>Some people seem to have done some level of analysis already</a:t>
             </a:r>
           </a:p>
@@ -575,7 +838,7 @@
               <a:defRPr/>
             </a:pPr>
             <a:r>
-              <a:rPr lang="en-US" dirty="0"/>
+              <a:rPr lang="en-US"/>
               <a:t>Overwhelming, difficult to know what variable applies</a:t>
             </a:r>
           </a:p>
@@ -598,7 +861,7 @@
               <a:defRPr/>
             </a:pPr>
             <a:r>
-              <a:rPr lang="en-US" dirty="0"/>
+              <a:rPr lang="en-US"/>
               <a:t>Be careful about jumping to conclusions and/or doing analysis to confirm your view point</a:t>
             </a:r>
           </a:p>
@@ -702,14 +965,9 @@
               <a:defRPr/>
             </a:pPr>
             <a:r>
-              <a:rPr lang="en-US" dirty="0"/>
-              <a:t>Difficulty finding data for question </a:t>
-            </a:r>
-            <a:r>
-              <a:rPr lang="en-US"/>
-              <a:t>was most common</a:t>
-            </a:r>
-            <a:endParaRPr lang="en-US" dirty="0"/>
+              <a:rPr lang="en-US"/>
+              <a:t>Difficulty finding data for question was most common</a:t>
+            </a:r>
           </a:p>
           <a:p>
             <a:pPr marL="0" marR="0" lvl="0" indent="0" algn="l" defTabSz="914400" rtl="0" eaLnBrk="1" fontAlgn="auto" latinLnBrk="0" hangingPunct="1">
@@ -730,7 +988,7 @@
               <a:defRPr/>
             </a:pPr>
             <a:r>
-              <a:rPr lang="en-US" dirty="0"/>
+              <a:rPr lang="en-US"/>
               <a:t>Overwhelming, difficult to know what variable applies</a:t>
             </a:r>
           </a:p>
@@ -753,7 +1011,7 @@
               <a:defRPr/>
             </a:pPr>
             <a:r>
-              <a:rPr lang="en-US" dirty="0"/>
+              <a:rPr lang="en-US"/>
               <a:t>Some people seem to have done some level of analysis already</a:t>
             </a:r>
           </a:p>
@@ -776,12 +1034,12 @@
               <a:defRPr/>
             </a:pPr>
             <a:r>
-              <a:rPr lang="en-US" dirty="0"/>
+              <a:rPr lang="en-US"/>
               <a:t>Be careful about jumping to conclusions and/or doing analysis to confirm your view point</a:t>
             </a:r>
           </a:p>
           <a:p>
-            <a:endParaRPr lang="en-US" dirty="0"/>
+            <a:endParaRPr lang="en-US"/>
           </a:p>
         </p:txBody>
       </p:sp>
@@ -866,42 +1124,42 @@
           <a:lstStyle/>
           <a:p>
             <a:r>
-              <a:rPr lang="en-US" dirty="0"/>
+              <a:rPr lang="en-US"/>
               <a:t>There is a saying that originates from the world of computer </a:t>
             </a:r>
             <a:r>
-              <a:rPr lang="en-US" dirty="0" err="1"/>
+              <a:rPr lang="en-US" err="1"/>
               <a:t>sience</a:t>
             </a:r>
             <a:r>
-              <a:rPr lang="en-US" dirty="0"/>
+              <a:rPr lang="en-US"/>
               <a:t> , garbage in garbage out</a:t>
             </a:r>
           </a:p>
           <a:p>
-            <a:endParaRPr lang="en-US" dirty="0"/>
-          </a:p>
-          <a:p>
-            <a:r>
-              <a:rPr lang="en-US" dirty="0"/>
+            <a:endParaRPr lang="en-US"/>
+          </a:p>
+          <a:p>
+            <a:r>
+              <a:rPr lang="en-US"/>
               <a:t>Stats and models cannot fix flawed data</a:t>
             </a:r>
           </a:p>
           <a:p>
             <a:r>
-              <a:rPr lang="en-US" dirty="0"/>
+              <a:rPr lang="en-US"/>
               <a:t>Your analysis is only as good as your data source</a:t>
             </a:r>
           </a:p>
           <a:p>
             <a:r>
-              <a:rPr lang="en-US" dirty="0"/>
+              <a:rPr lang="en-US"/>
               <a:t>Example:</a:t>
             </a:r>
           </a:p>
           <a:p>
             <a:r>
-              <a:rPr lang="en-US" dirty="0"/>
+              <a:rPr lang="en-US"/>
               <a:t>Wrong tagging, errors in device</a:t>
             </a:r>
           </a:p>
@@ -924,9 +1182,9 @@
           <a:p>
             <a:fld id="{1560C251-82B7-4253-A774-38D73C276BCE}" type="slidenum">
               <a:rPr lang="en-US" smtClean="0"/>
-              <a:t>16</a:t>
+              <a:t>14</a:t>
             </a:fld>
-            <a:endParaRPr lang="en-US" dirty="0"/>
+            <a:endParaRPr lang="en-US"/>
           </a:p>
         </p:txBody>
       </p:sp>
@@ -934,6 +1192,206 @@
     <p:extLst>
       <p:ext uri="{BB962C8B-B14F-4D97-AF65-F5344CB8AC3E}">
         <p14:creationId xmlns:p14="http://schemas.microsoft.com/office/powerpoint/2010/main" val="3533247656"/>
+      </p:ext>
+    </p:extLst>
+  </p:cSld>
+  <p:clrMapOvr>
+    <a:masterClrMapping/>
+  </p:clrMapOvr>
+</p:notes>
+</file>
+
+<file path=ppt/notesSlides/notesSlide4.xml><?xml version="1.0" encoding="utf-8"?>
+<p:notes xmlns:a="http://schemas.openxmlformats.org/drawingml/2006/main" xmlns:r="http://schemas.openxmlformats.org/officeDocument/2006/relationships" xmlns:p="http://schemas.openxmlformats.org/presentationml/2006/main">
+  <p:cSld>
+    <p:spTree>
+      <p:nvGrpSpPr>
+        <p:cNvPr id="1" name="">
+          <a:extLst>
+            <a:ext uri="{FF2B5EF4-FFF2-40B4-BE49-F238E27FC236}">
+              <a16:creationId xmlns:a16="http://schemas.microsoft.com/office/drawing/2014/main" id="{BDD89F22-FE82-5B9A-8BCA-28F263DFBCA2}"/>
+            </a:ext>
+          </a:extLst>
+        </p:cNvPr>
+        <p:cNvGrpSpPr/>
+        <p:nvPr/>
+      </p:nvGrpSpPr>
+      <p:grpSpPr>
+        <a:xfrm>
+          <a:off x="0" y="0"/>
+          <a:ext cx="0" cy="0"/>
+          <a:chOff x="0" y="0"/>
+          <a:chExt cx="0" cy="0"/>
+        </a:xfrm>
+      </p:grpSpPr>
+      <p:sp>
+        <p:nvSpPr>
+          <p:cNvPr id="2" name="Slide Image Placeholder 1">
+            <a:extLst>
+              <a:ext uri="{FF2B5EF4-FFF2-40B4-BE49-F238E27FC236}">
+                <a16:creationId xmlns:a16="http://schemas.microsoft.com/office/drawing/2014/main" id="{77C7D0CF-BBF7-321C-4274-BA697A184F8A}"/>
+              </a:ext>
+            </a:extLst>
+          </p:cNvPr>
+          <p:cNvSpPr>
+            <a:spLocks noGrp="1" noRot="1" noChangeAspect="1"/>
+          </p:cNvSpPr>
+          <p:nvPr>
+            <p:ph type="sldImg"/>
+          </p:nvPr>
+        </p:nvSpPr>
+        <p:spPr/>
+      </p:sp>
+      <p:sp>
+        <p:nvSpPr>
+          <p:cNvPr id="3" name="Notes Placeholder 2">
+            <a:extLst>
+              <a:ext uri="{FF2B5EF4-FFF2-40B4-BE49-F238E27FC236}">
+                <a16:creationId xmlns:a16="http://schemas.microsoft.com/office/drawing/2014/main" id="{B8323DB3-5FC4-B1AD-D389-704A488A92A2}"/>
+              </a:ext>
+            </a:extLst>
+          </p:cNvPr>
+          <p:cNvSpPr>
+            <a:spLocks noGrp="1"/>
+          </p:cNvSpPr>
+          <p:nvPr>
+            <p:ph type="body" idx="1"/>
+          </p:nvPr>
+        </p:nvSpPr>
+        <p:spPr/>
+        <p:txBody>
+          <a:bodyPr/>
+          <a:lstStyle/>
+          <a:p>
+            <a:pPr marL="0" marR="0" lvl="0" indent="0" algn="l" defTabSz="914400" rtl="0" eaLnBrk="1" fontAlgn="auto" latinLnBrk="0" hangingPunct="1">
+              <a:lnSpc>
+                <a:spcPct val="100000"/>
+              </a:lnSpc>
+              <a:spcBef>
+                <a:spcPts val="0"/>
+              </a:spcBef>
+              <a:spcAft>
+                <a:spcPts val="0"/>
+              </a:spcAft>
+              <a:buClrTx/>
+              <a:buSzTx/>
+              <a:buFontTx/>
+              <a:buNone/>
+              <a:tabLst/>
+              <a:defRPr/>
+            </a:pPr>
+            <a:r>
+              <a:rPr lang="en-US"/>
+              <a:t>Difficulty finding data for question was most common</a:t>
+            </a:r>
+          </a:p>
+          <a:p>
+            <a:pPr marL="0" marR="0" lvl="0" indent="0" algn="l" defTabSz="914400" rtl="0" eaLnBrk="1" fontAlgn="auto" latinLnBrk="0" hangingPunct="1">
+              <a:lnSpc>
+                <a:spcPct val="100000"/>
+              </a:lnSpc>
+              <a:spcBef>
+                <a:spcPts val="0"/>
+              </a:spcBef>
+              <a:spcAft>
+                <a:spcPts val="0"/>
+              </a:spcAft>
+              <a:buClrTx/>
+              <a:buSzTx/>
+              <a:buFontTx/>
+              <a:buNone/>
+              <a:tabLst/>
+              <a:defRPr/>
+            </a:pPr>
+            <a:r>
+              <a:rPr lang="en-US"/>
+              <a:t>Overwhelming, difficult to know what variable applies</a:t>
+            </a:r>
+          </a:p>
+          <a:p>
+            <a:pPr marL="0" marR="0" lvl="0" indent="0" algn="l" defTabSz="914400" rtl="0" eaLnBrk="1" fontAlgn="auto" latinLnBrk="0" hangingPunct="1">
+              <a:lnSpc>
+                <a:spcPct val="100000"/>
+              </a:lnSpc>
+              <a:spcBef>
+                <a:spcPts val="0"/>
+              </a:spcBef>
+              <a:spcAft>
+                <a:spcPts val="0"/>
+              </a:spcAft>
+              <a:buClrTx/>
+              <a:buSzTx/>
+              <a:buFontTx/>
+              <a:buNone/>
+              <a:tabLst/>
+              <a:defRPr/>
+            </a:pPr>
+            <a:r>
+              <a:rPr lang="en-US"/>
+              <a:t>Some people seem to have done some level of analysis already</a:t>
+            </a:r>
+          </a:p>
+          <a:p>
+            <a:pPr marL="0" marR="0" lvl="0" indent="0" algn="l" defTabSz="914400" rtl="0" eaLnBrk="1" fontAlgn="auto" latinLnBrk="0" hangingPunct="1">
+              <a:lnSpc>
+                <a:spcPct val="100000"/>
+              </a:lnSpc>
+              <a:spcBef>
+                <a:spcPts val="0"/>
+              </a:spcBef>
+              <a:spcAft>
+                <a:spcPts val="0"/>
+              </a:spcAft>
+              <a:buClrTx/>
+              <a:buSzTx/>
+              <a:buFontTx/>
+              <a:buNone/>
+              <a:tabLst/>
+              <a:defRPr/>
+            </a:pPr>
+            <a:r>
+              <a:rPr lang="en-US"/>
+              <a:t>Be careful about jumping to conclusions and/or doing analysis to confirm your view point</a:t>
+            </a:r>
+          </a:p>
+          <a:p>
+            <a:endParaRPr lang="en-US"/>
+          </a:p>
+        </p:txBody>
+      </p:sp>
+      <p:sp>
+        <p:nvSpPr>
+          <p:cNvPr id="4" name="Slide Number Placeholder 3">
+            <a:extLst>
+              <a:ext uri="{FF2B5EF4-FFF2-40B4-BE49-F238E27FC236}">
+                <a16:creationId xmlns:a16="http://schemas.microsoft.com/office/drawing/2014/main" id="{6C4263F6-6D1B-E4D8-E7AC-F8E3B3E563DA}"/>
+              </a:ext>
+            </a:extLst>
+          </p:cNvPr>
+          <p:cNvSpPr>
+            <a:spLocks noGrp="1"/>
+          </p:cNvSpPr>
+          <p:nvPr>
+            <p:ph type="sldNum" sz="quarter" idx="5"/>
+          </p:nvPr>
+        </p:nvSpPr>
+        <p:spPr/>
+        <p:txBody>
+          <a:bodyPr/>
+          <a:lstStyle/>
+          <a:p>
+            <a:fld id="{117D17FD-8842-8E4F-8C3E-EC8B634B2D5A}" type="slidenum">
+              <a:rPr lang="en-US" smtClean="0"/>
+              <a:t>17</a:t>
+            </a:fld>
+            <a:endParaRPr lang="en-US"/>
+          </a:p>
+        </p:txBody>
+      </p:sp>
+    </p:spTree>
+    <p:extLst>
+      <p:ext uri="{BB962C8B-B14F-4D97-AF65-F5344CB8AC3E}">
+        <p14:creationId xmlns:p14="http://schemas.microsoft.com/office/powerpoint/2010/main" val="997983310"/>
       </p:ext>
     </p:extLst>
   </p:cSld>
@@ -999,10 +1457,10 @@
           </a:lstStyle>
           <a:p>
             <a:r>
-              <a:rPr lang="en-GB" dirty="0"/>
+              <a:rPr lang="en-GB"/>
               <a:t>Click to edit Master title style</a:t>
             </a:r>
-            <a:endParaRPr lang="en-US" dirty="0"/>
+            <a:endParaRPr lang="en-US"/>
           </a:p>
         </p:txBody>
       </p:sp>
@@ -1070,10 +1528,10 @@
           </a:lstStyle>
           <a:p>
             <a:r>
-              <a:rPr lang="en-GB" dirty="0"/>
+              <a:rPr lang="en-GB"/>
               <a:t>Click to edit Master subtitle style</a:t>
             </a:r>
-            <a:endParaRPr lang="en-US" dirty="0"/>
+            <a:endParaRPr lang="en-US"/>
           </a:p>
         </p:txBody>
       </p:sp>
@@ -1100,7 +1558,7 @@
           <a:p>
             <a:fld id="{1BF61C71-767E-B84C-BFB3-7B18856D27F4}" type="datetimeFigureOut">
               <a:rPr lang="en-US" smtClean="0"/>
-              <a:t>9/14/2026</a:t>
+              <a:t>9/15/2026</a:t>
             </a:fld>
             <a:endParaRPr lang="en-US"/>
           </a:p>
@@ -1308,7 +1766,7 @@
           <a:p>
             <a:fld id="{1BF61C71-767E-B84C-BFB3-7B18856D27F4}" type="datetimeFigureOut">
               <a:rPr lang="en-US" smtClean="0"/>
-              <a:t>9/14/2026</a:t>
+              <a:t>9/15/2026</a:t>
             </a:fld>
             <a:endParaRPr lang="en-US"/>
           </a:p>
@@ -1526,7 +1984,7 @@
           <a:p>
             <a:fld id="{1BF61C71-767E-B84C-BFB3-7B18856D27F4}" type="datetimeFigureOut">
               <a:rPr lang="en-US" smtClean="0"/>
-              <a:t>9/14/2026</a:t>
+              <a:t>9/15/2026</a:t>
             </a:fld>
             <a:endParaRPr lang="en-US"/>
           </a:p>
@@ -1734,7 +2192,7 @@
           <a:p>
             <a:fld id="{1BF61C71-767E-B84C-BFB3-7B18856D27F4}" type="datetimeFigureOut">
               <a:rPr lang="en-US" smtClean="0"/>
-              <a:t>9/14/2026</a:t>
+              <a:t>9/15/2026</a:t>
             </a:fld>
             <a:endParaRPr lang="en-US"/>
           </a:p>
@@ -1863,10 +2321,10 @@
           </a:lstStyle>
           <a:p>
             <a:r>
-              <a:rPr lang="en-GB" dirty="0"/>
+              <a:rPr lang="en-GB"/>
               <a:t>Click to edit Master title style</a:t>
             </a:r>
-            <a:endParaRPr lang="en-US" dirty="0"/>
+            <a:endParaRPr lang="en-US"/>
           </a:p>
         </p:txBody>
       </p:sp>
@@ -2018,7 +2476,7 @@
           <a:p>
             <a:fld id="{1BF61C71-767E-B84C-BFB3-7B18856D27F4}" type="datetimeFigureOut">
               <a:rPr lang="en-US" smtClean="0"/>
-              <a:t>9/14/2026</a:t>
+              <a:t>9/15/2026</a:t>
             </a:fld>
             <a:endParaRPr lang="en-US"/>
           </a:p>
@@ -2294,7 +2752,7 @@
           <a:p>
             <a:fld id="{1BF61C71-767E-B84C-BFB3-7B18856D27F4}" type="datetimeFigureOut">
               <a:rPr lang="en-US" smtClean="0"/>
-              <a:t>9/14/2026</a:t>
+              <a:t>9/15/2026</a:t>
             </a:fld>
             <a:endParaRPr lang="en-US"/>
           </a:p>
@@ -2717,7 +3175,7 @@
           <a:p>
             <a:fld id="{1BF61C71-767E-B84C-BFB3-7B18856D27F4}" type="datetimeFigureOut">
               <a:rPr lang="en-US" smtClean="0"/>
-              <a:t>9/14/2026</a:t>
+              <a:t>9/15/2026</a:t>
             </a:fld>
             <a:endParaRPr lang="en-US"/>
           </a:p>
@@ -2867,7 +3325,7 @@
           <a:p>
             <a:fld id="{1BF61C71-767E-B84C-BFB3-7B18856D27F4}" type="datetimeFigureOut">
               <a:rPr lang="en-US" smtClean="0"/>
-              <a:t>9/14/2026</a:t>
+              <a:t>9/15/2026</a:t>
             </a:fld>
             <a:endParaRPr lang="en-US"/>
           </a:p>
@@ -2988,7 +3446,7 @@
           <a:p>
             <a:fld id="{1BF61C71-767E-B84C-BFB3-7B18856D27F4}" type="datetimeFigureOut">
               <a:rPr lang="en-US" smtClean="0"/>
-              <a:t>9/14/2026</a:t>
+              <a:t>9/15/2026</a:t>
             </a:fld>
             <a:endParaRPr lang="en-US"/>
           </a:p>
@@ -3309,7 +3767,7 @@
           <a:p>
             <a:fld id="{1BF61C71-767E-B84C-BFB3-7B18856D27F4}" type="datetimeFigureOut">
               <a:rPr lang="en-US" smtClean="0"/>
-              <a:t>9/14/2026</a:t>
+              <a:t>9/15/2026</a:t>
             </a:fld>
             <a:endParaRPr lang="en-US"/>
           </a:p>
@@ -3606,7 +4064,7 @@
           <a:p>
             <a:fld id="{1BF61C71-767E-B84C-BFB3-7B18856D27F4}" type="datetimeFigureOut">
               <a:rPr lang="en-US" smtClean="0"/>
-              <a:t>9/14/2026</a:t>
+              <a:t>9/15/2026</a:t>
             </a:fld>
             <a:endParaRPr lang="en-US"/>
           </a:p>
@@ -3744,10 +4202,10 @@
           <a:lstStyle/>
           <a:p>
             <a:r>
-              <a:rPr lang="en-GB" dirty="0"/>
+              <a:rPr lang="en-GB"/>
               <a:t>Click to edit Master title style</a:t>
             </a:r>
-            <a:endParaRPr lang="en-US" dirty="0"/>
+            <a:endParaRPr lang="en-US"/>
           </a:p>
         </p:txBody>
       </p:sp>
@@ -3860,7 +4318,7 @@
           <a:p>
             <a:fld id="{1BF61C71-767E-B84C-BFB3-7B18856D27F4}" type="datetimeFigureOut">
               <a:rPr lang="en-US" smtClean="0"/>
-              <a:t>9/14/2026</a:t>
+              <a:t>9/15/2026</a:t>
             </a:fld>
             <a:endParaRPr lang="en-US"/>
           </a:p>
@@ -4309,10 +4767,10 @@
           <a:lstStyle/>
           <a:p>
             <a:r>
-              <a:rPr lang="en-US" sz="4800" dirty="0"/>
+              <a:rPr lang="en-US" sz="4800"/>
               <a:t>Validity and Ethics in Sports Analytics</a:t>
             </a:r>
-            <a:endParaRPr lang="en-GB" sz="4800" dirty="0"/>
+            <a:endParaRPr lang="en-GB" sz="4800"/>
           </a:p>
         </p:txBody>
       </p:sp>
@@ -4338,13 +4796,13 @@
           <a:lstStyle/>
           <a:p>
             <a:r>
-              <a:rPr lang="en-GB" dirty="0"/>
+              <a:rPr lang="en-GB"/>
               <a:t>Saryu Onishi</a:t>
             </a:r>
           </a:p>
           <a:p>
             <a:r>
-              <a:rPr lang="en-GB" dirty="0"/>
+              <a:rPr lang="en-GB"/>
               <a:t>HES 3000-002, Sport Performance Analytics</a:t>
             </a:r>
           </a:p>
@@ -4402,7 +4860,7 @@
           <a:lstStyle/>
           <a:p>
             <a:r>
-              <a:rPr lang="en-US" dirty="0"/>
+              <a:rPr lang="en-US"/>
               <a:t>Types of Validity</a:t>
             </a:r>
           </a:p>
@@ -4432,7 +4890,7 @@
           <a:lstStyle/>
           <a:p>
             <a:r>
-              <a:rPr lang="en-US" b="1" dirty="0"/>
+              <a:rPr lang="en-US" dirty="0"/>
               <a:t>Criterion validity</a:t>
             </a:r>
           </a:p>
@@ -4445,7 +4903,7 @@
           </a:p>
           <a:p>
             <a:r>
-              <a:rPr lang="en-US" b="1" dirty="0"/>
+              <a:rPr lang="en-US" dirty="0"/>
               <a:t>Construct validity</a:t>
             </a:r>
           </a:p>
@@ -4458,7 +4916,7 @@
           </a:p>
           <a:p>
             <a:r>
-              <a:rPr lang="en-US" b="1" dirty="0"/>
+              <a:rPr lang="en-US" dirty="0"/>
               <a:t>Ecological validity</a:t>
             </a:r>
           </a:p>
@@ -4503,7 +4961,7 @@
           <a:lstStyle/>
           <a:p>
             <a:r>
-              <a:rPr lang="en-US" sz="2000" dirty="0">
+              <a:rPr lang="en-US" sz="2000">
                 <a:solidFill>
                   <a:srgbClr val="FF0000"/>
                 </a:solidFill>
@@ -4565,7 +5023,7 @@
           <a:lstStyle/>
           <a:p>
             <a:r>
-              <a:rPr lang="en-US" dirty="0"/>
+              <a:rPr lang="en-US"/>
               <a:t>Reliable but Not Valid</a:t>
             </a:r>
           </a:p>
@@ -4661,7 +5119,11 @@
           <a:p>
             <a:pPr lvl="1"/>
             <a:r>
-              <a:rPr lang="en-US" dirty="0"/>
+              <a:rPr lang="en-US" dirty="0">
+                <a:solidFill>
+                  <a:srgbClr val="FF0000"/>
+                </a:solidFill>
+              </a:rPr>
               <a:t>Is this a problem?</a:t>
             </a:r>
           </a:p>
@@ -4715,12 +5177,14 @@
         </p:nvSpPr>
         <p:spPr/>
         <p:txBody>
-          <a:bodyPr/>
+          <a:bodyPr>
+            <a:normAutofit fontScale="90000"/>
+          </a:bodyPr>
           <a:lstStyle/>
           <a:p>
             <a:r>
               <a:rPr lang="en-US" dirty="0"/>
-              <a:t>What Does the Metric Actually Mean?</a:t>
+              <a:t>Understanding What the Metric Actually Means</a:t>
             </a:r>
           </a:p>
         </p:txBody>
@@ -4752,57 +5216,57 @@
               <a:buNone/>
             </a:pPr>
             <a:r>
-              <a:rPr lang="en-US" dirty="0"/>
+              <a:rPr lang="en-US"/>
               <a:t>Consider “player load.”</a:t>
             </a:r>
           </a:p>
           <a:p>
             <a:r>
-              <a:rPr lang="en-US" dirty="0"/>
+              <a:rPr lang="en-US"/>
               <a:t>A device may calculate player load consistently, but:</a:t>
             </a:r>
           </a:p>
           <a:p>
             <a:pPr lvl="1"/>
             <a:r>
-              <a:rPr lang="en-US" dirty="0"/>
+              <a:rPr lang="en-US"/>
               <a:t>Does it measure total physiological stress? </a:t>
             </a:r>
           </a:p>
           <a:p>
             <a:pPr lvl="1"/>
             <a:r>
-              <a:rPr lang="en-US" dirty="0"/>
+              <a:rPr lang="en-US"/>
               <a:t>Does it account for collisions? </a:t>
             </a:r>
           </a:p>
           <a:p>
             <a:pPr lvl="1"/>
             <a:r>
-              <a:rPr lang="en-US" dirty="0"/>
+              <a:rPr lang="en-US"/>
               <a:t>Does it capture psychological fatigue? </a:t>
             </a:r>
           </a:p>
           <a:p>
             <a:pPr lvl="1"/>
             <a:r>
-              <a:rPr lang="en-US" dirty="0"/>
+              <a:rPr lang="en-US"/>
               <a:t>Can values be compared across devices or manufacturers? </a:t>
             </a:r>
           </a:p>
           <a:p>
             <a:pPr lvl="1"/>
             <a:r>
-              <a:rPr lang="en-US" dirty="0"/>
+              <a:rPr lang="en-US"/>
               <a:t>Does the same value mean the same thing for every athlete? </a:t>
             </a:r>
           </a:p>
           <a:p>
             <a:pPr lvl="1"/>
-            <a:endParaRPr lang="en-US" dirty="0"/>
-          </a:p>
-          <a:p>
-            <a:endParaRPr lang="en-US" dirty="0"/>
+            <a:endParaRPr lang="en-US"/>
+          </a:p>
+          <a:p>
+            <a:endParaRPr lang="en-US"/>
           </a:p>
         </p:txBody>
       </p:sp>
@@ -4838,7 +5302,7 @@
               <a:buNone/>
             </a:pPr>
             <a:r>
-              <a:rPr lang="en-US" sz="2000" dirty="0">
+              <a:rPr lang="en-US" sz="2000">
                 <a:solidFill>
                   <a:srgbClr val="FF0000"/>
                 </a:solidFill>
@@ -4900,7 +5364,7 @@
           <a:lstStyle/>
           <a:p>
             <a:r>
-              <a:rPr lang="en-US" dirty="0"/>
+              <a:rPr lang="en-US"/>
               <a:t>Measurement Error Is Not Athlete Change</a:t>
             </a:r>
           </a:p>
@@ -4949,7 +5413,7 @@
                         <m:rPr>
                           <m:nor/>
                         </m:rPr>
-                        <a:rPr lang="en-US" sz="2000">
+                        <a:rPr lang="en-US" sz="2000" i="0">
                           <a:latin typeface="Cambria Math" panose="02040503050406030204" pitchFamily="18" charset="0"/>
                         </a:rPr>
                         <m:t>Observed value</m:t>
@@ -4964,7 +5428,7 @@
                         <m:rPr>
                           <m:nor/>
                         </m:rPr>
-                        <a:rPr lang="en-US" sz="2000">
+                        <a:rPr lang="en-US" sz="2000" i="0">
                           <a:latin typeface="Cambria Math" panose="02040503050406030204" pitchFamily="18" charset="0"/>
                         </a:rPr>
                         <m:t>true performance</m:t>
@@ -4979,7 +5443,7 @@
                         <m:rPr>
                           <m:nor/>
                         </m:rPr>
-                        <a:rPr lang="en-US" sz="2000">
+                        <a:rPr lang="en-US" sz="2000" i="0">
                           <a:latin typeface="Cambria Math" panose="02040503050406030204" pitchFamily="18" charset="0"/>
                         </a:rPr>
                         <m:t>measurement error</m:t>
@@ -4994,7 +5458,7 @@
                         <m:rPr>
                           <m:nor/>
                         </m:rPr>
-                        <a:rPr lang="en-US" sz="2000">
+                        <a:rPr lang="en-US" sz="2000" i="0">
                           <a:latin typeface="Cambria Math" panose="02040503050406030204" pitchFamily="18" charset="0"/>
                         </a:rPr>
                         <m:t>normal variation</m:t>
@@ -5013,7 +5477,15 @@
               <a:p>
                 <a:r>
                   <a:rPr lang="en-US" dirty="0"/>
-                  <a:t>A change in the number does not automatically indicate a meaningful change in the athlete.</a:t>
+                  <a:t>A change in the number does not automatically indicate a </a:t>
+                </a:r>
+                <a:r>
+                  <a:rPr lang="en-US" b="1" dirty="0"/>
+                  <a:t>meaningful change </a:t>
+                </a:r>
+                <a:r>
+                  <a:rPr lang="en-US" dirty="0"/>
+                  <a:t>in the athlete.</a:t>
                 </a:r>
               </a:p>
               <a:p>
@@ -5083,6 +5555,45 @@
           </p:sp>
         </mc:Fallback>
       </mc:AlternateContent>
+      <p:sp>
+        <p:nvSpPr>
+          <p:cNvPr id="4" name="TextBox 3">
+            <a:extLst>
+              <a:ext uri="{FF2B5EF4-FFF2-40B4-BE49-F238E27FC236}">
+                <a16:creationId xmlns:a16="http://schemas.microsoft.com/office/drawing/2014/main" id="{60A5F50C-F05F-FB00-1A68-5887372B92CC}"/>
+              </a:ext>
+            </a:extLst>
+          </p:cNvPr>
+          <p:cNvSpPr txBox="1"/>
+          <p:nvPr/>
+        </p:nvSpPr>
+        <p:spPr>
+          <a:xfrm>
+            <a:off x="2616200" y="5971753"/>
+            <a:ext cx="6693756" cy="369332"/>
+          </a:xfrm>
+          <a:prstGeom prst="rect">
+            <a:avLst/>
+          </a:prstGeom>
+          <a:noFill/>
+        </p:spPr>
+        <p:txBody>
+          <a:bodyPr wrap="none" rtlCol="0">
+            <a:spAutoFit/>
+          </a:bodyPr>
+          <a:lstStyle/>
+          <a:p>
+            <a:r>
+              <a:rPr lang="en-US" dirty="0">
+                <a:solidFill>
+                  <a:srgbClr val="FF0000"/>
+                </a:solidFill>
+              </a:rPr>
+              <a:t>We will revisit this when discussing analytics in athlete monitoring</a:t>
+            </a:r>
+          </a:p>
+        </p:txBody>
+      </p:sp>
     </p:spTree>
     <p:extLst>
       <p:ext uri="{BB962C8B-B14F-4D97-AF65-F5344CB8AC3E}">
@@ -5118,7 +5629,7 @@
           <p:cNvPr id="2" name="Title 1">
             <a:extLst>
               <a:ext uri="{FF2B5EF4-FFF2-40B4-BE49-F238E27FC236}">
-                <a16:creationId xmlns:a16="http://schemas.microsoft.com/office/drawing/2014/main" id="{9071AE29-AC00-FC5D-E6BC-A4689E26BD9B}"/>
+                <a16:creationId xmlns:a16="http://schemas.microsoft.com/office/drawing/2014/main" id="{3B880DEF-9349-2FA7-8D0C-336C11A2FE98}"/>
               </a:ext>
             </a:extLst>
           </p:cNvPr>
@@ -5131,14 +5642,12 @@
         </p:nvSpPr>
         <p:spPr/>
         <p:txBody>
-          <a:bodyPr>
-            <a:normAutofit/>
-          </a:bodyPr>
-          <a:lstStyle/>
-          <a:p>
-            <a:r>
-              <a:rPr lang="en-US" dirty="0"/>
-              <a:t>Sensor Audit</a:t>
+          <a:bodyPr/>
+          <a:lstStyle/>
+          <a:p>
+            <a:r>
+              <a:rPr lang="en-US"/>
+              <a:t>Garbage In, Garbage Out</a:t>
             </a:r>
           </a:p>
         </p:txBody>
@@ -5148,7 +5657,7 @@
           <p:cNvPr id="3" name="Content Placeholder 2">
             <a:extLst>
               <a:ext uri="{FF2B5EF4-FFF2-40B4-BE49-F238E27FC236}">
-                <a16:creationId xmlns:a16="http://schemas.microsoft.com/office/drawing/2014/main" id="{07D46CD0-A75D-E6E0-7B99-4CC8A49229BD}"/>
+                <a16:creationId xmlns:a16="http://schemas.microsoft.com/office/drawing/2014/main" id="{14092F37-6541-2E89-2C50-CA513690CE0E}"/>
               </a:ext>
             </a:extLst>
           </p:cNvPr>
@@ -5161,63 +5670,89 @@
         </p:nvSpPr>
         <p:spPr/>
         <p:txBody>
-          <a:bodyPr>
-            <a:normAutofit/>
-          </a:bodyPr>
-          <a:lstStyle/>
-          <a:p>
-            <a:r>
-              <a:rPr lang="en-US" dirty="0"/>
-              <a:t>Think of a wearable or performance-monitoring device you have used. </a:t>
-            </a:r>
-            <a:r>
-              <a:rPr lang="en-US" b="1" dirty="0"/>
-              <a:t>What is one factor that could produce misleading or unusable data?</a:t>
-            </a:r>
-          </a:p>
-          <a:p>
-            <a:endParaRPr lang="en-US" dirty="0"/>
-          </a:p>
-          <a:p>
-            <a:r>
-              <a:rPr lang="en-US" dirty="0"/>
-              <a:t>Possible categories:</a:t>
-            </a:r>
-          </a:p>
-          <a:p>
-            <a:pPr lvl="1"/>
-            <a:r>
-              <a:rPr lang="en-US" dirty="0"/>
-              <a:t>Device placement </a:t>
-            </a:r>
-          </a:p>
-          <a:p>
-            <a:pPr lvl="1"/>
-            <a:r>
-              <a:rPr lang="en-US" dirty="0"/>
-              <a:t>Poor contact </a:t>
-            </a:r>
-          </a:p>
-          <a:p>
-            <a:pPr lvl="1"/>
-            <a:r>
-              <a:rPr lang="en-US" dirty="0"/>
-              <a:t>Environment </a:t>
-            </a:r>
-          </a:p>
-          <a:p>
-            <a:pPr lvl="1"/>
-            <a:r>
-              <a:rPr lang="en-US" dirty="0"/>
-              <a:t>Athlete behavior</a:t>
-            </a:r>
-          </a:p>
-        </p:txBody>
-      </p:sp>
+          <a:bodyPr/>
+          <a:lstStyle/>
+          <a:p>
+            <a:r>
+              <a:rPr lang="en-US"/>
+              <a:t>Your analysis is only as good as your data source</a:t>
+            </a:r>
+          </a:p>
+          <a:p>
+            <a:r>
+              <a:rPr lang="en-US"/>
+              <a:t>Stats and models cannot fix flawed data</a:t>
+            </a:r>
+          </a:p>
+          <a:p>
+            <a:endParaRPr lang="en-US"/>
+          </a:p>
+        </p:txBody>
+      </p:sp>
+      <p:sp>
+        <p:nvSpPr>
+          <p:cNvPr id="4" name="Slide Number Placeholder 3">
+            <a:extLst>
+              <a:ext uri="{FF2B5EF4-FFF2-40B4-BE49-F238E27FC236}">
+                <a16:creationId xmlns:a16="http://schemas.microsoft.com/office/drawing/2014/main" id="{9A9BAA79-90DF-1B30-BEB1-8375BD3225DA}"/>
+              </a:ext>
+            </a:extLst>
+          </p:cNvPr>
+          <p:cNvSpPr>
+            <a:spLocks noGrp="1"/>
+          </p:cNvSpPr>
+          <p:nvPr>
+            <p:ph type="sldNum" sz="quarter" idx="12"/>
+          </p:nvPr>
+        </p:nvSpPr>
+        <p:spPr/>
+        <p:txBody>
+          <a:bodyPr/>
+          <a:lstStyle/>
+          <a:p>
+            <a:fld id="{45C00377-489B-40EC-B059-26BDDD2E89B9}" type="slidenum">
+              <a:rPr lang="en-US" smtClean="0"/>
+              <a:pPr/>
+              <a:t>14</a:t>
+            </a:fld>
+            <a:endParaRPr lang="en-US"/>
+          </a:p>
+        </p:txBody>
+      </p:sp>
+      <p:pic>
+        <p:nvPicPr>
+          <p:cNvPr id="5" name="Picture 4">
+            <a:extLst>
+              <a:ext uri="{FF2B5EF4-FFF2-40B4-BE49-F238E27FC236}">
+                <a16:creationId xmlns:a16="http://schemas.microsoft.com/office/drawing/2014/main" id="{F5D95BDD-8CDA-F68E-E02D-572E7E414FC1}"/>
+              </a:ext>
+            </a:extLst>
+          </p:cNvPr>
+          <p:cNvPicPr>
+            <a:picLocks noChangeAspect="1"/>
+          </p:cNvPicPr>
+          <p:nvPr/>
+        </p:nvPicPr>
+        <p:blipFill>
+          <a:blip r:embed="rId3"/>
+          <a:stretch>
+            <a:fillRect/>
+          </a:stretch>
+        </p:blipFill>
+        <p:spPr>
+          <a:xfrm>
+            <a:off x="4438650" y="3144203"/>
+            <a:ext cx="3790950" cy="3032760"/>
+          </a:xfrm>
+          <a:prstGeom prst="rect">
+            <a:avLst/>
+          </a:prstGeom>
+        </p:spPr>
+      </p:pic>
     </p:spTree>
     <p:extLst>
       <p:ext uri="{BB962C8B-B14F-4D97-AF65-F5344CB8AC3E}">
-        <p14:creationId xmlns:p14="http://schemas.microsoft.com/office/powerpoint/2010/main" val="1885223585"/>
+        <p14:creationId xmlns:p14="http://schemas.microsoft.com/office/powerpoint/2010/main" val="3911705373"/>
       </p:ext>
     </p:extLst>
   </p:cSld>
@@ -5249,6 +5784,137 @@
           <p:cNvPr id="2" name="Title 1">
             <a:extLst>
               <a:ext uri="{FF2B5EF4-FFF2-40B4-BE49-F238E27FC236}">
+                <a16:creationId xmlns:a16="http://schemas.microsoft.com/office/drawing/2014/main" id="{9071AE29-AC00-FC5D-E6BC-A4689E26BD9B}"/>
+              </a:ext>
+            </a:extLst>
+          </p:cNvPr>
+          <p:cNvSpPr>
+            <a:spLocks noGrp="1"/>
+          </p:cNvSpPr>
+          <p:nvPr>
+            <p:ph type="title"/>
+          </p:nvPr>
+        </p:nvSpPr>
+        <p:spPr/>
+        <p:txBody>
+          <a:bodyPr>
+            <a:normAutofit/>
+          </a:bodyPr>
+          <a:lstStyle/>
+          <a:p>
+            <a:r>
+              <a:rPr lang="en-US"/>
+              <a:t>Sensor Audit</a:t>
+            </a:r>
+          </a:p>
+        </p:txBody>
+      </p:sp>
+      <p:sp>
+        <p:nvSpPr>
+          <p:cNvPr id="3" name="Content Placeholder 2">
+            <a:extLst>
+              <a:ext uri="{FF2B5EF4-FFF2-40B4-BE49-F238E27FC236}">
+                <a16:creationId xmlns:a16="http://schemas.microsoft.com/office/drawing/2014/main" id="{07D46CD0-A75D-E6E0-7B99-4CC8A49229BD}"/>
+              </a:ext>
+            </a:extLst>
+          </p:cNvPr>
+          <p:cNvSpPr>
+            <a:spLocks noGrp="1"/>
+          </p:cNvSpPr>
+          <p:nvPr>
+            <p:ph idx="1"/>
+          </p:nvPr>
+        </p:nvSpPr>
+        <p:spPr/>
+        <p:txBody>
+          <a:bodyPr>
+            <a:normAutofit/>
+          </a:bodyPr>
+          <a:lstStyle/>
+          <a:p>
+            <a:r>
+              <a:rPr lang="en-US"/>
+              <a:t>Think of a wearable or performance-monitoring device you have used. </a:t>
+            </a:r>
+            <a:r>
+              <a:rPr lang="en-US" b="1"/>
+              <a:t>What is one factor that could produce misleading or unusable data?</a:t>
+            </a:r>
+          </a:p>
+          <a:p>
+            <a:endParaRPr lang="en-US"/>
+          </a:p>
+          <a:p>
+            <a:r>
+              <a:rPr lang="en-US"/>
+              <a:t>Possible categories:</a:t>
+            </a:r>
+          </a:p>
+          <a:p>
+            <a:pPr lvl="1"/>
+            <a:r>
+              <a:rPr lang="en-US"/>
+              <a:t>Device placement </a:t>
+            </a:r>
+          </a:p>
+          <a:p>
+            <a:pPr lvl="1"/>
+            <a:r>
+              <a:rPr lang="en-US"/>
+              <a:t>Poor contact </a:t>
+            </a:r>
+          </a:p>
+          <a:p>
+            <a:pPr lvl="1"/>
+            <a:r>
+              <a:rPr lang="en-US"/>
+              <a:t>Environment </a:t>
+            </a:r>
+          </a:p>
+          <a:p>
+            <a:pPr lvl="1"/>
+            <a:r>
+              <a:rPr lang="en-US"/>
+              <a:t>Athlete behavior</a:t>
+            </a:r>
+          </a:p>
+        </p:txBody>
+      </p:sp>
+    </p:spTree>
+    <p:extLst>
+      <p:ext uri="{BB962C8B-B14F-4D97-AF65-F5344CB8AC3E}">
+        <p14:creationId xmlns:p14="http://schemas.microsoft.com/office/powerpoint/2010/main" val="1885223585"/>
+      </p:ext>
+    </p:extLst>
+  </p:cSld>
+  <p:clrMapOvr>
+    <a:masterClrMapping/>
+  </p:clrMapOvr>
+</p:sld>
+</file>
+
+<file path=ppt/slides/slide16.xml><?xml version="1.0" encoding="utf-8"?>
+<p:sld xmlns:a="http://schemas.openxmlformats.org/drawingml/2006/main" xmlns:r="http://schemas.openxmlformats.org/officeDocument/2006/relationships" xmlns:p="http://schemas.openxmlformats.org/presentationml/2006/main">
+  <p:cSld>
+    <p:spTree>
+      <p:nvGrpSpPr>
+        <p:cNvPr id="1" name=""/>
+        <p:cNvGrpSpPr/>
+        <p:nvPr/>
+      </p:nvGrpSpPr>
+      <p:grpSpPr>
+        <a:xfrm>
+          <a:off x="0" y="0"/>
+          <a:ext cx="0" cy="0"/>
+          <a:chOff x="0" y="0"/>
+          <a:chExt cx="0" cy="0"/>
+        </a:xfrm>
+      </p:grpSpPr>
+      <p:sp>
+        <p:nvSpPr>
+          <p:cNvPr id="2" name="Title 1">
+            <a:extLst>
+              <a:ext uri="{FF2B5EF4-FFF2-40B4-BE49-F238E27FC236}">
                 <a16:creationId xmlns:a16="http://schemas.microsoft.com/office/drawing/2014/main" id="{62DD43A4-E717-C56C-7A72-B89CC8DEA2CC}"/>
               </a:ext>
             </a:extLst>
@@ -5266,7 +5932,7 @@
           <a:lstStyle/>
           <a:p>
             <a:r>
-              <a:rPr lang="en-US" dirty="0"/>
+              <a:rPr lang="en-US"/>
               <a:t>Sensor Audit Example</a:t>
             </a:r>
           </a:p>
@@ -5294,40 +5960,40 @@
           <a:lstStyle/>
           <a:p>
             <a:r>
-              <a:rPr lang="en-US" dirty="0"/>
+              <a:rPr lang="en-US"/>
               <a:t>Poor contact or improper placement of a heart-rate chest strap can produce:</a:t>
             </a:r>
           </a:p>
           <a:p>
             <a:pPr lvl="1"/>
             <a:r>
-              <a:rPr lang="en-US" dirty="0"/>
+              <a:rPr lang="en-US"/>
               <a:t>Missing observations </a:t>
             </a:r>
           </a:p>
           <a:p>
             <a:pPr lvl="1"/>
             <a:r>
-              <a:rPr lang="en-US" dirty="0"/>
+              <a:rPr lang="en-US"/>
               <a:t>Sudden heart-rate spikes </a:t>
             </a:r>
           </a:p>
           <a:p>
             <a:pPr lvl="1"/>
             <a:r>
-              <a:rPr lang="en-US" dirty="0"/>
+              <a:rPr lang="en-US"/>
               <a:t>Delayed responses </a:t>
             </a:r>
           </a:p>
           <a:p>
             <a:pPr lvl="1"/>
             <a:r>
-              <a:rPr lang="en-US" dirty="0"/>
+              <a:rPr lang="en-US"/>
               <a:t>Data that appear real but are physiologically unlikely</a:t>
             </a:r>
           </a:p>
           <a:p>
-            <a:endParaRPr lang="en-US" dirty="0"/>
+            <a:endParaRPr lang="en-US"/>
           </a:p>
         </p:txBody>
       </p:sp>
@@ -5374,12 +6040,18 @@
 </p:sld>
 </file>
 
-<file path=ppt/slides/slide16.xml><?xml version="1.0" encoding="utf-8"?>
+<file path=ppt/slides/slide17.xml><?xml version="1.0" encoding="utf-8"?>
 <p:sld xmlns:a="http://schemas.openxmlformats.org/drawingml/2006/main" xmlns:r="http://schemas.openxmlformats.org/officeDocument/2006/relationships" xmlns:p="http://schemas.openxmlformats.org/presentationml/2006/main">
   <p:cSld>
     <p:spTree>
       <p:nvGrpSpPr>
-        <p:cNvPr id="1" name=""/>
+        <p:cNvPr id="1" name="">
+          <a:extLst>
+            <a:ext uri="{FF2B5EF4-FFF2-40B4-BE49-F238E27FC236}">
+              <a16:creationId xmlns:a16="http://schemas.microsoft.com/office/drawing/2014/main" id="{96C4B6F9-F754-6776-911B-0A4FD1C32380}"/>
+            </a:ext>
+          </a:extLst>
+        </p:cNvPr>
         <p:cNvGrpSpPr/>
         <p:nvPr/>
       </p:nvGrpSpPr>
@@ -5393,10 +6065,10 @@
       </p:grpSpPr>
       <p:sp>
         <p:nvSpPr>
-          <p:cNvPr id="2" name="Title 1">
-            <a:extLst>
-              <a:ext uri="{FF2B5EF4-FFF2-40B4-BE49-F238E27FC236}">
-                <a16:creationId xmlns:a16="http://schemas.microsoft.com/office/drawing/2014/main" id="{3B880DEF-9349-2FA7-8D0C-336C11A2FE98}"/>
+          <p:cNvPr id="4" name="Title 3">
+            <a:extLst>
+              <a:ext uri="{FF2B5EF4-FFF2-40B4-BE49-F238E27FC236}">
+                <a16:creationId xmlns:a16="http://schemas.microsoft.com/office/drawing/2014/main" id="{2A84870B-5CF0-4579-E360-A1811465F38F}"/>
               </a:ext>
             </a:extLst>
           </p:cNvPr>
@@ -5407,257 +6079,55 @@
             <p:ph type="title"/>
           </p:nvPr>
         </p:nvSpPr>
-        <p:spPr/>
-        <p:txBody>
-          <a:bodyPr/>
-          <a:lstStyle/>
-          <a:p>
-            <a:r>
-              <a:rPr lang="en-US" dirty="0"/>
-              <a:t>Garbage In, Garbage Out</a:t>
-            </a:r>
-          </a:p>
-        </p:txBody>
-      </p:sp>
-      <p:sp>
-        <p:nvSpPr>
-          <p:cNvPr id="3" name="Content Placeholder 2">
-            <a:extLst>
-              <a:ext uri="{FF2B5EF4-FFF2-40B4-BE49-F238E27FC236}">
-                <a16:creationId xmlns:a16="http://schemas.microsoft.com/office/drawing/2014/main" id="{14092F37-6541-2E89-2C50-CA513690CE0E}"/>
-              </a:ext>
-            </a:extLst>
-          </p:cNvPr>
-          <p:cNvSpPr>
-            <a:spLocks noGrp="1"/>
-          </p:cNvSpPr>
-          <p:nvPr>
-            <p:ph idx="1"/>
-          </p:nvPr>
-        </p:nvSpPr>
-        <p:spPr/>
-        <p:txBody>
-          <a:bodyPr/>
-          <a:lstStyle/>
-          <a:p>
-            <a:r>
-              <a:rPr lang="en-US" dirty="0"/>
-              <a:t>Your analysis is only as good as your data source</a:t>
-            </a:r>
-          </a:p>
-          <a:p>
-            <a:r>
-              <a:rPr lang="en-US" dirty="0"/>
-              <a:t>Stats and models cannot fix flawed data</a:t>
-            </a:r>
-          </a:p>
-          <a:p>
-            <a:endParaRPr lang="en-US" dirty="0"/>
-          </a:p>
-        </p:txBody>
-      </p:sp>
-      <p:sp>
-        <p:nvSpPr>
-          <p:cNvPr id="4" name="Slide Number Placeholder 3">
-            <a:extLst>
-              <a:ext uri="{FF2B5EF4-FFF2-40B4-BE49-F238E27FC236}">
-                <a16:creationId xmlns:a16="http://schemas.microsoft.com/office/drawing/2014/main" id="{9A9BAA79-90DF-1B30-BEB1-8375BD3225DA}"/>
-              </a:ext>
-            </a:extLst>
-          </p:cNvPr>
-          <p:cNvSpPr>
-            <a:spLocks noGrp="1"/>
-          </p:cNvSpPr>
-          <p:nvPr>
-            <p:ph type="sldNum" sz="quarter" idx="12"/>
-          </p:nvPr>
-        </p:nvSpPr>
-        <p:spPr/>
-        <p:txBody>
-          <a:bodyPr/>
-          <a:lstStyle/>
-          <a:p>
-            <a:fld id="{45C00377-489B-40EC-B059-26BDDD2E89B9}" type="slidenum">
-              <a:rPr lang="en-US" smtClean="0"/>
-              <a:pPr/>
-              <a:t>16</a:t>
-            </a:fld>
-            <a:endParaRPr lang="en-US" dirty="0"/>
-          </a:p>
-        </p:txBody>
-      </p:sp>
-      <p:pic>
-        <p:nvPicPr>
-          <p:cNvPr id="5" name="Picture 4">
-            <a:extLst>
-              <a:ext uri="{FF2B5EF4-FFF2-40B4-BE49-F238E27FC236}">
-                <a16:creationId xmlns:a16="http://schemas.microsoft.com/office/drawing/2014/main" id="{F5D95BDD-8CDA-F68E-E02D-572E7E414FC1}"/>
-              </a:ext>
-            </a:extLst>
-          </p:cNvPr>
-          <p:cNvPicPr>
-            <a:picLocks noChangeAspect="1"/>
-          </p:cNvPicPr>
-          <p:nvPr/>
-        </p:nvPicPr>
-        <p:blipFill>
-          <a:blip r:embed="rId3"/>
-          <a:stretch>
-            <a:fillRect/>
-          </a:stretch>
-        </p:blipFill>
         <p:spPr>
           <a:xfrm>
-            <a:off x="4438650" y="3144203"/>
-            <a:ext cx="3790950" cy="3032760"/>
+            <a:off x="831850" y="2956337"/>
+            <a:ext cx="10515600" cy="945327"/>
           </a:xfrm>
-          <a:prstGeom prst="rect">
-            <a:avLst/>
-          </a:prstGeom>
         </p:spPr>
-      </p:pic>
+        <p:txBody>
+          <a:bodyPr>
+            <a:normAutofit/>
+          </a:bodyPr>
+          <a:lstStyle/>
+          <a:p>
+            <a:pPr algn="ctr"/>
+            <a:r>
+              <a:rPr lang="en-US" sz="4800" dirty="0"/>
+              <a:t>Ethics in Sports Analytics</a:t>
+            </a:r>
+          </a:p>
+        </p:txBody>
+      </p:sp>
+      <p:sp>
+        <p:nvSpPr>
+          <p:cNvPr id="5" name="Text Placeholder 4">
+            <a:extLst>
+              <a:ext uri="{FF2B5EF4-FFF2-40B4-BE49-F238E27FC236}">
+                <a16:creationId xmlns:a16="http://schemas.microsoft.com/office/drawing/2014/main" id="{3EF660B1-DB01-EFE0-60C4-62E43D7841FC}"/>
+              </a:ext>
+            </a:extLst>
+          </p:cNvPr>
+          <p:cNvSpPr>
+            <a:spLocks noGrp="1"/>
+          </p:cNvSpPr>
+          <p:nvPr>
+            <p:ph type="body" idx="1"/>
+          </p:nvPr>
+        </p:nvSpPr>
+        <p:spPr/>
+        <p:txBody>
+          <a:bodyPr/>
+          <a:lstStyle/>
+          <a:p>
+            <a:endParaRPr lang="en-US"/>
+          </a:p>
+        </p:txBody>
+      </p:sp>
     </p:spTree>
     <p:extLst>
       <p:ext uri="{BB962C8B-B14F-4D97-AF65-F5344CB8AC3E}">
-        <p14:creationId xmlns:p14="http://schemas.microsoft.com/office/powerpoint/2010/main" val="3911705373"/>
-      </p:ext>
-    </p:extLst>
-  </p:cSld>
-  <p:clrMapOvr>
-    <a:masterClrMapping/>
-  </p:clrMapOvr>
-</p:sld>
-</file>
-
-<file path=ppt/slides/slide17.xml><?xml version="1.0" encoding="utf-8"?>
-<p:sld xmlns:a="http://schemas.openxmlformats.org/drawingml/2006/main" xmlns:r="http://schemas.openxmlformats.org/officeDocument/2006/relationships" xmlns:p="http://schemas.openxmlformats.org/presentationml/2006/main">
-  <p:cSld>
-    <p:spTree>
-      <p:nvGrpSpPr>
-        <p:cNvPr id="1" name=""/>
-        <p:cNvGrpSpPr/>
-        <p:nvPr/>
-      </p:nvGrpSpPr>
-      <p:grpSpPr>
-        <a:xfrm>
-          <a:off x="0" y="0"/>
-          <a:ext cx="0" cy="0"/>
-          <a:chOff x="0" y="0"/>
-          <a:chExt cx="0" cy="0"/>
-        </a:xfrm>
-      </p:grpSpPr>
-      <p:sp>
-        <p:nvSpPr>
-          <p:cNvPr id="2" name="Title 1">
-            <a:extLst>
-              <a:ext uri="{FF2B5EF4-FFF2-40B4-BE49-F238E27FC236}">
-                <a16:creationId xmlns:a16="http://schemas.microsoft.com/office/drawing/2014/main" id="{D1E19A9B-0F79-670C-B231-6B2D811A0953}"/>
-              </a:ext>
-            </a:extLst>
-          </p:cNvPr>
-          <p:cNvSpPr>
-            <a:spLocks noGrp="1"/>
-          </p:cNvSpPr>
-          <p:nvPr>
-            <p:ph type="title"/>
-          </p:nvPr>
-        </p:nvSpPr>
-        <p:spPr/>
-        <p:txBody>
-          <a:bodyPr/>
-          <a:lstStyle/>
-          <a:p>
-            <a:r>
-              <a:rPr lang="en-US" dirty="0"/>
-              <a:t>Ethics in sports performance analytics</a:t>
-            </a:r>
-          </a:p>
-        </p:txBody>
-      </p:sp>
-      <p:sp>
-        <p:nvSpPr>
-          <p:cNvPr id="3" name="Content Placeholder 2">
-            <a:extLst>
-              <a:ext uri="{FF2B5EF4-FFF2-40B4-BE49-F238E27FC236}">
-                <a16:creationId xmlns:a16="http://schemas.microsoft.com/office/drawing/2014/main" id="{8132812F-2337-DC61-EE6F-1583E135D633}"/>
-              </a:ext>
-            </a:extLst>
-          </p:cNvPr>
-          <p:cNvSpPr>
-            <a:spLocks noGrp="1"/>
-          </p:cNvSpPr>
-          <p:nvPr>
-            <p:ph idx="1"/>
-          </p:nvPr>
-        </p:nvSpPr>
-        <p:spPr/>
-        <p:txBody>
-          <a:bodyPr/>
-          <a:lstStyle/>
-          <a:p>
-            <a:r>
-              <a:rPr lang="en-US" dirty="0"/>
-              <a:t>Athlete data may influence:</a:t>
-            </a:r>
-          </a:p>
-          <a:p>
-            <a:pPr lvl="1"/>
-            <a:r>
-              <a:rPr lang="en-US" dirty="0"/>
-              <a:t>Playing time </a:t>
-            </a:r>
-          </a:p>
-          <a:p>
-            <a:pPr lvl="1"/>
-            <a:r>
-              <a:rPr lang="en-US" dirty="0"/>
-              <a:t>Team selection </a:t>
-            </a:r>
-          </a:p>
-          <a:p>
-            <a:pPr lvl="1"/>
-            <a:r>
-              <a:rPr lang="en-US" dirty="0"/>
-              <a:t>Scholarships </a:t>
-            </a:r>
-          </a:p>
-          <a:p>
-            <a:pPr lvl="1"/>
-            <a:r>
-              <a:rPr lang="en-US" dirty="0"/>
-              <a:t>Contracts </a:t>
-            </a:r>
-          </a:p>
-          <a:p>
-            <a:pPr lvl="1"/>
-            <a:r>
-              <a:rPr lang="en-US" dirty="0"/>
-              <a:t>Injury management </a:t>
-            </a:r>
-          </a:p>
-          <a:p>
-            <a:pPr lvl="1"/>
-            <a:r>
-              <a:rPr lang="en-US" dirty="0"/>
-              <a:t>Return-to-play decisions </a:t>
-            </a:r>
-          </a:p>
-          <a:p>
-            <a:pPr lvl="1"/>
-            <a:r>
-              <a:rPr lang="en-US" dirty="0"/>
-              <a:t>How coaches perceive an athlete</a:t>
-            </a:r>
-          </a:p>
-          <a:p>
-            <a:endParaRPr lang="en-US" dirty="0"/>
-          </a:p>
-        </p:txBody>
-      </p:sp>
-    </p:spTree>
-    <p:extLst>
-      <p:ext uri="{BB962C8B-B14F-4D97-AF65-F5344CB8AC3E}">
-        <p14:creationId xmlns:p14="http://schemas.microsoft.com/office/powerpoint/2010/main" val="2348401353"/>
+        <p14:creationId xmlns:p14="http://schemas.microsoft.com/office/powerpoint/2010/main" val="1076799184"/>
       </p:ext>
     </p:extLst>
   </p:cSld>
@@ -5689,7 +6159,7 @@
           <p:cNvPr id="2" name="Title 1">
             <a:extLst>
               <a:ext uri="{FF2B5EF4-FFF2-40B4-BE49-F238E27FC236}">
-                <a16:creationId xmlns:a16="http://schemas.microsoft.com/office/drawing/2014/main" id="{77DC9398-E821-76AE-A6DC-5CD3BC9CFAE9}"/>
+                <a16:creationId xmlns:a16="http://schemas.microsoft.com/office/drawing/2014/main" id="{D1E19A9B-0F79-670C-B231-6B2D811A0953}"/>
               </a:ext>
             </a:extLst>
           </p:cNvPr>
@@ -5709,8 +6179,17 @@
           <a:p>
             <a:r>
               <a:rPr lang="en-US" dirty="0"/>
-              <a:t>consent and ownership</a:t>
-            </a:r>
+              <a:t>Why does it </a:t>
+            </a:r>
+            <a:r>
+              <a:rPr lang="en-US" err="1"/>
+              <a:t>matter</a:t>
+            </a:r>
+            <a:r>
+              <a:rPr lang="en-US"/>
+              <a:t>?</a:t>
+            </a:r>
+            <a:endParaRPr lang="en-US" dirty="0"/>
           </a:p>
         </p:txBody>
       </p:sp>
@@ -5719,7 +6198,7 @@
           <p:cNvPr id="3" name="Content Placeholder 2">
             <a:extLst>
               <a:ext uri="{FF2B5EF4-FFF2-40B4-BE49-F238E27FC236}">
-                <a16:creationId xmlns:a16="http://schemas.microsoft.com/office/drawing/2014/main" id="{8BCAF2A1-DAF7-3CDB-CB77-9129A9080654}"/>
+                <a16:creationId xmlns:a16="http://schemas.microsoft.com/office/drawing/2014/main" id="{8132812F-2337-DC61-EE6F-1583E135D633}"/>
               </a:ext>
             </a:extLst>
           </p:cNvPr>
@@ -5736,76 +6215,68 @@
           <a:lstStyle/>
           <a:p>
             <a:r>
-              <a:rPr lang="en-US" dirty="0"/>
-              <a:t>Athlete monitoring raises several questions:</a:t>
+              <a:rPr lang="en-US"/>
+              <a:t>Athlete data may influence:</a:t>
             </a:r>
           </a:p>
           <a:p>
             <a:pPr lvl="1"/>
             <a:r>
-              <a:rPr lang="en-US" dirty="0"/>
-              <a:t>Do athletes understand what is being collected? </a:t>
+              <a:rPr lang="en-US"/>
+              <a:t>Playing time </a:t>
             </a:r>
           </a:p>
           <a:p>
             <a:pPr lvl="1"/>
             <a:r>
-              <a:rPr lang="en-US" dirty="0"/>
-              <a:t>Can they meaningfully refuse? </a:t>
+              <a:rPr lang="en-US"/>
+              <a:t>Team selection </a:t>
             </a:r>
           </a:p>
           <a:p>
             <a:pPr lvl="1"/>
             <a:r>
-              <a:rPr lang="en-US" dirty="0"/>
-              <a:t>Who owns the data? </a:t>
+              <a:rPr lang="en-US"/>
+              <a:t>Scholarships </a:t>
             </a:r>
           </a:p>
           <a:p>
             <a:pPr lvl="1"/>
             <a:r>
-              <a:rPr lang="en-US" dirty="0"/>
-              <a:t>Who can access it? </a:t>
+              <a:rPr lang="en-US"/>
+              <a:t>Contracts </a:t>
             </a:r>
           </a:p>
           <a:p>
             <a:pPr lvl="1"/>
             <a:r>
-              <a:rPr lang="en-US" dirty="0"/>
-              <a:t>How long will it be stored? </a:t>
+              <a:rPr lang="en-US"/>
+              <a:t>Injury management </a:t>
             </a:r>
           </a:p>
           <a:p>
             <a:pPr lvl="1"/>
             <a:r>
-              <a:rPr lang="en-US" dirty="0"/>
-              <a:t>Can it be used for purposes beyond the original reason for collection? </a:t>
+              <a:rPr lang="en-US"/>
+              <a:t>Return-to-play decisions </a:t>
             </a:r>
           </a:p>
           <a:p>
             <a:pPr lvl="1"/>
             <a:r>
-              <a:rPr lang="en-US" dirty="0"/>
-              <a:t>What happens when an athlete leaves the team?</a:t>
-            </a:r>
-          </a:p>
-          <a:p>
-            <a:pPr lvl="1"/>
-            <a:endParaRPr lang="en-US" dirty="0"/>
-          </a:p>
-          <a:p>
-            <a:r>
-              <a:rPr lang="en-US" b="1" dirty="0"/>
-              <a:t>Participation is not necessarily the same as informed consent.</a:t>
-            </a:r>
-            <a:endParaRPr lang="en-US" dirty="0"/>
+              <a:rPr lang="en-US"/>
+              <a:t>How coaches perceive an athlete</a:t>
+            </a:r>
+          </a:p>
+          <a:p>
+            <a:endParaRPr lang="en-US"/>
           </a:p>
         </p:txBody>
       </p:sp>
     </p:spTree>
     <p:extLst>
       <p:ext uri="{BB962C8B-B14F-4D97-AF65-F5344CB8AC3E}">
-        <p14:creationId xmlns:p14="http://schemas.microsoft.com/office/powerpoint/2010/main" val="3326423056"/>
+        <p14:creationId xmlns:p14="http://schemas.microsoft.com/office/powerpoint/2010/main" val="2348401353"/>
       </p:ext>
     </p:extLst>
   </p:cSld>
@@ -5837,7 +6308,7 @@
           <p:cNvPr id="2" name="Title 1">
             <a:extLst>
               <a:ext uri="{FF2B5EF4-FFF2-40B4-BE49-F238E27FC236}">
-                <a16:creationId xmlns:a16="http://schemas.microsoft.com/office/drawing/2014/main" id="{BAE3FC8E-FC9F-6159-D6D2-C52AAB5450F4}"/>
+                <a16:creationId xmlns:a16="http://schemas.microsoft.com/office/drawing/2014/main" id="{77DC9398-E821-76AE-A6DC-5CD3BC9CFAE9}"/>
               </a:ext>
             </a:extLst>
           </p:cNvPr>
@@ -5850,97 +6321,110 @@
         </p:nvSpPr>
         <p:spPr/>
         <p:txBody>
+          <a:bodyPr>
+            <a:normAutofit/>
+          </a:bodyPr>
+          <a:lstStyle/>
+          <a:p>
+            <a:r>
+              <a:rPr lang="en-US"/>
+              <a:t>consent and ownership</a:t>
+            </a:r>
+          </a:p>
+        </p:txBody>
+      </p:sp>
+      <p:sp>
+        <p:nvSpPr>
+          <p:cNvPr id="3" name="Content Placeholder 2">
+            <a:extLst>
+              <a:ext uri="{FF2B5EF4-FFF2-40B4-BE49-F238E27FC236}">
+                <a16:creationId xmlns:a16="http://schemas.microsoft.com/office/drawing/2014/main" id="{8BCAF2A1-DAF7-3CDB-CB77-9129A9080654}"/>
+              </a:ext>
+            </a:extLst>
+          </p:cNvPr>
+          <p:cNvSpPr>
+            <a:spLocks noGrp="1"/>
+          </p:cNvSpPr>
+          <p:nvPr>
+            <p:ph idx="1"/>
+          </p:nvPr>
+        </p:nvSpPr>
+        <p:spPr/>
+        <p:txBody>
           <a:bodyPr/>
           <a:lstStyle/>
           <a:p>
             <a:r>
-              <a:rPr lang="en-US" dirty="0"/>
-              <a:t>weaponization of data</a:t>
-            </a:r>
-          </a:p>
-        </p:txBody>
-      </p:sp>
-      <p:sp>
-        <p:nvSpPr>
-          <p:cNvPr id="3" name="Content Placeholder 2">
-            <a:extLst>
-              <a:ext uri="{FF2B5EF4-FFF2-40B4-BE49-F238E27FC236}">
-                <a16:creationId xmlns:a16="http://schemas.microsoft.com/office/drawing/2014/main" id="{A7A570FF-5560-CC54-38BA-40BA764555F0}"/>
-              </a:ext>
-            </a:extLst>
-          </p:cNvPr>
-          <p:cNvSpPr>
-            <a:spLocks noGrp="1"/>
-          </p:cNvSpPr>
-          <p:nvPr>
-            <p:ph idx="1"/>
-          </p:nvPr>
-        </p:nvSpPr>
-        <p:spPr/>
-        <p:txBody>
-          <a:bodyPr/>
-          <a:lstStyle/>
-          <a:p>
-            <a:r>
-              <a:rPr lang="en-US" dirty="0"/>
-              <a:t>Data collected to support athletes can also be used against them.</a:t>
+              <a:rPr lang="en-US"/>
+              <a:t>Athlete monitoring raises several questions:</a:t>
             </a:r>
           </a:p>
           <a:p>
             <a:pPr lvl="1"/>
             <a:r>
-              <a:rPr lang="en-US" dirty="0"/>
-              <a:t>Using wellness responses to question commitment </a:t>
+              <a:rPr lang="en-US"/>
+              <a:t>Do athletes understand what is being collected? </a:t>
             </a:r>
           </a:p>
           <a:p>
             <a:pPr lvl="1"/>
             <a:r>
-              <a:rPr lang="en-US" dirty="0"/>
-              <a:t>Using monitoring data during contract negotiations </a:t>
+              <a:rPr lang="en-US"/>
+              <a:t>Can they meaningfully refuse? </a:t>
             </a:r>
           </a:p>
           <a:p>
             <a:pPr lvl="1"/>
             <a:r>
-              <a:rPr lang="en-US" dirty="0"/>
-              <a:t>Punishing athletes for reporting fatigue or pain </a:t>
+              <a:rPr lang="en-US"/>
+              <a:t>Who owns the data? </a:t>
             </a:r>
           </a:p>
           <a:p>
             <a:pPr lvl="1"/>
             <a:r>
-              <a:rPr lang="en-US" dirty="0"/>
-              <a:t>Sharing data outside its original purpose</a:t>
+              <a:rPr lang="en-US"/>
+              <a:t>Who can access it? </a:t>
             </a:r>
           </a:p>
           <a:p>
             <a:pPr lvl="1"/>
-            <a:endParaRPr lang="en-US" dirty="0"/>
-          </a:p>
-          <a:p>
-            <a:r>
-              <a:rPr lang="en-US" dirty="0"/>
-              <a:t>If athletes believe honesty will be punished, they may stop providing honest data.</a:t>
+            <a:r>
+              <a:rPr lang="en-US"/>
+              <a:t>How long will it be stored? </a:t>
             </a:r>
           </a:p>
           <a:p>
             <a:pPr lvl="1"/>
             <a:r>
-              <a:rPr lang="en-US" dirty="0"/>
-              <a:t>This produces both an ethical failure and a data-quality failure.</a:t>
+              <a:rPr lang="en-US"/>
+              <a:t>Can it be used for purposes beyond the original reason for collection? </a:t>
             </a:r>
           </a:p>
           <a:p>
             <a:pPr lvl="1"/>
-            <a:endParaRPr lang="en-US" dirty="0"/>
+            <a:r>
+              <a:rPr lang="en-US"/>
+              <a:t>What happens when an athlete leaves the team?</a:t>
+            </a:r>
+          </a:p>
+          <a:p>
+            <a:pPr lvl="1"/>
+            <a:endParaRPr lang="en-US"/>
+          </a:p>
+          <a:p>
+            <a:r>
+              <a:rPr lang="en-US" b="1"/>
+              <a:t>Participation is not necessarily the same as informed consent.</a:t>
+            </a:r>
+            <a:endParaRPr lang="en-US"/>
           </a:p>
         </p:txBody>
       </p:sp>
     </p:spTree>
     <p:extLst>
       <p:ext uri="{BB962C8B-B14F-4D97-AF65-F5344CB8AC3E}">
-        <p14:creationId xmlns:p14="http://schemas.microsoft.com/office/powerpoint/2010/main" val="47592878"/>
+        <p14:creationId xmlns:p14="http://schemas.microsoft.com/office/powerpoint/2010/main" val="3326423056"/>
       </p:ext>
     </p:extLst>
   </p:cSld>
@@ -5997,7 +6481,7 @@
           <a:p>
             <a:pPr algn="ctr"/>
             <a:r>
-              <a:rPr lang="en-US" sz="4800" dirty="0"/>
+              <a:rPr lang="en-US" sz="4800"/>
               <a:t>Quiz 3</a:t>
             </a:r>
           </a:p>
@@ -6063,7 +6547,7 @@
           <p:cNvPr id="2" name="Title 1">
             <a:extLst>
               <a:ext uri="{FF2B5EF4-FFF2-40B4-BE49-F238E27FC236}">
-                <a16:creationId xmlns:a16="http://schemas.microsoft.com/office/drawing/2014/main" id="{CB487054-D699-058B-0690-31590C9EA974}"/>
+                <a16:creationId xmlns:a16="http://schemas.microsoft.com/office/drawing/2014/main" id="{BAE3FC8E-FC9F-6159-D6D2-C52AAB5450F4}"/>
               </a:ext>
             </a:extLst>
           </p:cNvPr>
@@ -6080,8 +6564,8 @@
           <a:lstStyle/>
           <a:p>
             <a:r>
-              <a:rPr lang="en-US" dirty="0"/>
-              <a:t>The resource divide</a:t>
+              <a:rPr lang="en-US"/>
+              <a:t>weaponization of data</a:t>
             </a:r>
           </a:p>
         </p:txBody>
@@ -6091,7 +6575,7 @@
           <p:cNvPr id="3" name="Content Placeholder 2">
             <a:extLst>
               <a:ext uri="{FF2B5EF4-FFF2-40B4-BE49-F238E27FC236}">
-                <a16:creationId xmlns:a16="http://schemas.microsoft.com/office/drawing/2014/main" id="{C34F2C60-E652-FA59-5ED5-E8E631854A2B}"/>
+                <a16:creationId xmlns:a16="http://schemas.microsoft.com/office/drawing/2014/main" id="{A7A570FF-5560-CC54-38BA-40BA764555F0}"/>
               </a:ext>
             </a:extLst>
           </p:cNvPr>
@@ -6104,76 +6588,69 @@
         </p:nvSpPr>
         <p:spPr/>
         <p:txBody>
-          <a:bodyPr>
-            <a:normAutofit lnSpcReduction="10000"/>
-          </a:bodyPr>
-          <a:lstStyle/>
-          <a:p>
-            <a:r>
-              <a:rPr lang="en-US" dirty="0"/>
-              <a:t>Funding determines ability to collect data</a:t>
+          <a:bodyPr/>
+          <a:lstStyle/>
+          <a:p>
+            <a:r>
+              <a:rPr lang="en-US"/>
+              <a:t>Data collected to support athletes can also be used against them.</a:t>
             </a:r>
           </a:p>
           <a:p>
             <a:pPr lvl="1"/>
             <a:r>
-              <a:rPr lang="en-US" dirty="0"/>
-              <a:t>Tracking technology</a:t>
+              <a:rPr lang="en-US"/>
+              <a:t>Using wellness responses to question commitment </a:t>
             </a:r>
           </a:p>
           <a:p>
             <a:pPr lvl="1"/>
             <a:r>
-              <a:rPr lang="en-US" dirty="0"/>
-              <a:t>Staff and technical expertise</a:t>
+              <a:rPr lang="en-US"/>
+              <a:t>Using monitoring data during contract negotiations </a:t>
             </a:r>
           </a:p>
           <a:p>
             <a:pPr lvl="1"/>
             <a:r>
-              <a:rPr lang="en-US" dirty="0"/>
-              <a:t>Time for quality control</a:t>
+              <a:rPr lang="en-US"/>
+              <a:t>Punishing athletes for reporting fatigue or pain </a:t>
             </a:r>
           </a:p>
           <a:p>
             <a:pPr lvl="1"/>
-            <a:endParaRPr lang="en-US" dirty="0"/>
-          </a:p>
-          <a:p>
-            <a:r>
-              <a:rPr lang="en-US" dirty="0"/>
-              <a:t>Better-resourced organizations do not simply have more data. They often have more opportunities to make the data usable.</a:t>
-            </a:r>
-          </a:p>
-          <a:p>
-            <a:endParaRPr lang="en-US" dirty="0"/>
-          </a:p>
-          <a:p>
-            <a:r>
-              <a:rPr lang="en-US" dirty="0"/>
-              <a:t>How does this affect:</a:t>
+            <a:r>
+              <a:rPr lang="en-US"/>
+              <a:t>Sharing data outside its original purpose</a:t>
             </a:r>
           </a:p>
           <a:p>
             <a:pPr lvl="1"/>
-            <a:r>
-              <a:rPr lang="en-US" dirty="0"/>
-              <a:t>The quality of analytics?</a:t>
+            <a:endParaRPr lang="en-US"/>
+          </a:p>
+          <a:p>
+            <a:r>
+              <a:rPr lang="en-US"/>
+              <a:t>If athletes believe honesty will be punished, they may stop providing honest data.</a:t>
             </a:r>
           </a:p>
           <a:p>
             <a:pPr lvl="1"/>
             <a:r>
-              <a:rPr lang="en-US" dirty="0"/>
-              <a:t>Outcomes in each domain?</a:t>
-            </a:r>
+              <a:rPr lang="en-US"/>
+              <a:t>This produces both an ethical failure and a data-quality failure.</a:t>
+            </a:r>
+          </a:p>
+          <a:p>
+            <a:pPr lvl="1"/>
+            <a:endParaRPr lang="en-US"/>
           </a:p>
         </p:txBody>
       </p:sp>
     </p:spTree>
     <p:extLst>
       <p:ext uri="{BB962C8B-B14F-4D97-AF65-F5344CB8AC3E}">
-        <p14:creationId xmlns:p14="http://schemas.microsoft.com/office/powerpoint/2010/main" val="1168492215"/>
+        <p14:creationId xmlns:p14="http://schemas.microsoft.com/office/powerpoint/2010/main" val="47592878"/>
       </p:ext>
     </p:extLst>
   </p:cSld>
@@ -6205,6 +6682,148 @@
           <p:cNvPr id="2" name="Title 1">
             <a:extLst>
               <a:ext uri="{FF2B5EF4-FFF2-40B4-BE49-F238E27FC236}">
+                <a16:creationId xmlns:a16="http://schemas.microsoft.com/office/drawing/2014/main" id="{CB487054-D699-058B-0690-31590C9EA974}"/>
+              </a:ext>
+            </a:extLst>
+          </p:cNvPr>
+          <p:cNvSpPr>
+            <a:spLocks noGrp="1"/>
+          </p:cNvSpPr>
+          <p:nvPr>
+            <p:ph type="title"/>
+          </p:nvPr>
+        </p:nvSpPr>
+        <p:spPr/>
+        <p:txBody>
+          <a:bodyPr/>
+          <a:lstStyle/>
+          <a:p>
+            <a:r>
+              <a:rPr lang="en-US"/>
+              <a:t>The resource divide</a:t>
+            </a:r>
+          </a:p>
+        </p:txBody>
+      </p:sp>
+      <p:sp>
+        <p:nvSpPr>
+          <p:cNvPr id="3" name="Content Placeholder 2">
+            <a:extLst>
+              <a:ext uri="{FF2B5EF4-FFF2-40B4-BE49-F238E27FC236}">
+                <a16:creationId xmlns:a16="http://schemas.microsoft.com/office/drawing/2014/main" id="{C34F2C60-E652-FA59-5ED5-E8E631854A2B}"/>
+              </a:ext>
+            </a:extLst>
+          </p:cNvPr>
+          <p:cNvSpPr>
+            <a:spLocks noGrp="1"/>
+          </p:cNvSpPr>
+          <p:nvPr>
+            <p:ph idx="1"/>
+          </p:nvPr>
+        </p:nvSpPr>
+        <p:spPr/>
+        <p:txBody>
+          <a:bodyPr>
+            <a:normAutofit lnSpcReduction="10000"/>
+          </a:bodyPr>
+          <a:lstStyle/>
+          <a:p>
+            <a:r>
+              <a:rPr lang="en-US"/>
+              <a:t>Funding determines ability to collect data</a:t>
+            </a:r>
+          </a:p>
+          <a:p>
+            <a:pPr lvl="1"/>
+            <a:r>
+              <a:rPr lang="en-US"/>
+              <a:t>Tracking technology</a:t>
+            </a:r>
+          </a:p>
+          <a:p>
+            <a:pPr lvl="1"/>
+            <a:r>
+              <a:rPr lang="en-US"/>
+              <a:t>Staff and technical expertise</a:t>
+            </a:r>
+          </a:p>
+          <a:p>
+            <a:pPr lvl="1"/>
+            <a:r>
+              <a:rPr lang="en-US"/>
+              <a:t>Time for quality control</a:t>
+            </a:r>
+          </a:p>
+          <a:p>
+            <a:pPr lvl="1"/>
+            <a:endParaRPr lang="en-US"/>
+          </a:p>
+          <a:p>
+            <a:r>
+              <a:rPr lang="en-US"/>
+              <a:t>Better-resourced organizations do not simply have more data. They often have more opportunities to make the data usable.</a:t>
+            </a:r>
+          </a:p>
+          <a:p>
+            <a:endParaRPr lang="en-US"/>
+          </a:p>
+          <a:p>
+            <a:r>
+              <a:rPr lang="en-US"/>
+              <a:t>How does this affect:</a:t>
+            </a:r>
+          </a:p>
+          <a:p>
+            <a:pPr lvl="1"/>
+            <a:r>
+              <a:rPr lang="en-US"/>
+              <a:t>The quality of analytics?</a:t>
+            </a:r>
+          </a:p>
+          <a:p>
+            <a:pPr lvl="1"/>
+            <a:r>
+              <a:rPr lang="en-US"/>
+              <a:t>Outcomes in each domain?</a:t>
+            </a:r>
+          </a:p>
+        </p:txBody>
+      </p:sp>
+    </p:spTree>
+    <p:extLst>
+      <p:ext uri="{BB962C8B-B14F-4D97-AF65-F5344CB8AC3E}">
+        <p14:creationId xmlns:p14="http://schemas.microsoft.com/office/powerpoint/2010/main" val="1168492215"/>
+      </p:ext>
+    </p:extLst>
+  </p:cSld>
+  <p:clrMapOvr>
+    <a:masterClrMapping/>
+  </p:clrMapOvr>
+</p:sld>
+</file>
+
+<file path=ppt/slides/slide22.xml><?xml version="1.0" encoding="utf-8"?>
+<p:sld xmlns:a="http://schemas.openxmlformats.org/drawingml/2006/main" xmlns:r="http://schemas.openxmlformats.org/officeDocument/2006/relationships" xmlns:p="http://schemas.openxmlformats.org/presentationml/2006/main">
+  <p:cSld>
+    <p:spTree>
+      <p:nvGrpSpPr>
+        <p:cNvPr id="1" name=""/>
+        <p:cNvGrpSpPr/>
+        <p:nvPr/>
+      </p:nvGrpSpPr>
+      <p:grpSpPr>
+        <a:xfrm>
+          <a:off x="0" y="0"/>
+          <a:ext cx="0" cy="0"/>
+          <a:chOff x="0" y="0"/>
+          <a:chExt cx="0" cy="0"/>
+        </a:xfrm>
+      </p:grpSpPr>
+      <p:sp>
+        <p:nvSpPr>
+          <p:cNvPr id="2" name="Title 1">
+            <a:extLst>
+              <a:ext uri="{FF2B5EF4-FFF2-40B4-BE49-F238E27FC236}">
                 <a16:creationId xmlns:a16="http://schemas.microsoft.com/office/drawing/2014/main" id="{83A39CA1-79C4-EBC6-6B78-5F27300B13E8}"/>
               </a:ext>
             </a:extLst>
@@ -6224,7 +6843,7 @@
           <a:lstStyle/>
           <a:p>
             <a:r>
-              <a:rPr lang="en-US" dirty="0"/>
+              <a:rPr lang="en-US"/>
               <a:t>How Does the Resource Divide Affect Analytics?</a:t>
             </a:r>
           </a:p>
@@ -6252,37 +6871,37 @@
           <a:lstStyle/>
           <a:p>
             <a:r>
-              <a:rPr lang="en-US" dirty="0"/>
+              <a:rPr lang="en-US"/>
               <a:t>Lower-resource programs may face:</a:t>
             </a:r>
           </a:p>
           <a:p>
             <a:pPr lvl="1"/>
             <a:r>
-              <a:rPr lang="en-US" dirty="0"/>
+              <a:rPr lang="en-US"/>
               <a:t>Smaller datasets </a:t>
             </a:r>
           </a:p>
           <a:p>
             <a:pPr lvl="1"/>
             <a:r>
-              <a:rPr lang="en-US" dirty="0"/>
+              <a:rPr lang="en-US"/>
               <a:t>Less complete dataset</a:t>
             </a:r>
           </a:p>
           <a:p>
             <a:pPr lvl="1"/>
             <a:r>
-              <a:rPr lang="en-US" dirty="0"/>
+              <a:rPr lang="en-US"/>
               <a:t>Less staff time for cleaning and interpretation</a:t>
             </a:r>
           </a:p>
           <a:p>
             <a:pPr lvl="1"/>
-            <a:endParaRPr lang="en-US" dirty="0"/>
-          </a:p>
-          <a:p>
-            <a:endParaRPr lang="en-US" dirty="0"/>
+            <a:endParaRPr lang="en-US"/>
+          </a:p>
+          <a:p>
+            <a:endParaRPr lang="en-US"/>
           </a:p>
         </p:txBody>
       </p:sp>
@@ -6342,7 +6961,7 @@
                         <a:buNone/>
                       </a:pPr>
                       <a:r>
-                        <a:rPr lang="en-US" dirty="0"/>
+                        <a:rPr lang="en-US"/>
                         <a:t>Domain</a:t>
                       </a:r>
                     </a:p>
@@ -6475,7 +7094,7 @@
                         <a:buNone/>
                       </a:pPr>
                       <a:r>
-                        <a:rPr lang="en-US" dirty="0"/>
+                        <a:rPr lang="en-US"/>
                         <a:t>Less detailed opponent and game analysis</a:t>
                       </a:r>
                     </a:p>
@@ -6505,138 +7124,6 @@
 </p:sld>
 </file>
 
-<file path=ppt/slides/slide22.xml><?xml version="1.0" encoding="utf-8"?>
-<p:sld xmlns:a="http://schemas.openxmlformats.org/drawingml/2006/main" xmlns:r="http://schemas.openxmlformats.org/officeDocument/2006/relationships" xmlns:p="http://schemas.openxmlformats.org/presentationml/2006/main">
-  <p:cSld>
-    <p:spTree>
-      <p:nvGrpSpPr>
-        <p:cNvPr id="1" name=""/>
-        <p:cNvGrpSpPr/>
-        <p:nvPr/>
-      </p:nvGrpSpPr>
-      <p:grpSpPr>
-        <a:xfrm>
-          <a:off x="0" y="0"/>
-          <a:ext cx="0" cy="0"/>
-          <a:chOff x="0" y="0"/>
-          <a:chExt cx="0" cy="0"/>
-        </a:xfrm>
-      </p:grpSpPr>
-      <p:sp>
-        <p:nvSpPr>
-          <p:cNvPr id="2" name="Title 1">
-            <a:extLst>
-              <a:ext uri="{FF2B5EF4-FFF2-40B4-BE49-F238E27FC236}">
-                <a16:creationId xmlns:a16="http://schemas.microsoft.com/office/drawing/2014/main" id="{ADA1F041-EA1D-44C9-9A34-3199EB88CCDC}"/>
-              </a:ext>
-            </a:extLst>
-          </p:cNvPr>
-          <p:cNvSpPr>
-            <a:spLocks noGrp="1"/>
-          </p:cNvSpPr>
-          <p:nvPr>
-            <p:ph type="title"/>
-          </p:nvPr>
-        </p:nvSpPr>
-        <p:spPr/>
-        <p:txBody>
-          <a:bodyPr/>
-          <a:lstStyle/>
-          <a:p>
-            <a:r>
-              <a:rPr lang="en-US" dirty="0"/>
-              <a:t>The invisible athlete</a:t>
-            </a:r>
-          </a:p>
-        </p:txBody>
-      </p:sp>
-      <p:sp>
-        <p:nvSpPr>
-          <p:cNvPr id="3" name="Content Placeholder 2">
-            <a:extLst>
-              <a:ext uri="{FF2B5EF4-FFF2-40B4-BE49-F238E27FC236}">
-                <a16:creationId xmlns:a16="http://schemas.microsoft.com/office/drawing/2014/main" id="{81DA9FF1-2CFE-687B-73EB-63D88B461873}"/>
-              </a:ext>
-            </a:extLst>
-          </p:cNvPr>
-          <p:cNvSpPr>
-            <a:spLocks noGrp="1"/>
-          </p:cNvSpPr>
-          <p:nvPr>
-            <p:ph idx="1"/>
-          </p:nvPr>
-        </p:nvSpPr>
-        <p:spPr/>
-        <p:txBody>
-          <a:bodyPr/>
-          <a:lstStyle/>
-          <a:p>
-            <a:endParaRPr lang="en-US"/>
-          </a:p>
-        </p:txBody>
-      </p:sp>
-      <p:sp>
-        <p:nvSpPr>
-          <p:cNvPr id="5" name="TextBox 4">
-            <a:extLst>
-              <a:ext uri="{FF2B5EF4-FFF2-40B4-BE49-F238E27FC236}">
-                <a16:creationId xmlns:a16="http://schemas.microsoft.com/office/drawing/2014/main" id="{6F87B829-A4B6-1F78-9DA5-137B29194ED2}"/>
-              </a:ext>
-            </a:extLst>
-          </p:cNvPr>
-          <p:cNvSpPr txBox="1"/>
-          <p:nvPr/>
-        </p:nvSpPr>
-        <p:spPr>
-          <a:xfrm>
-            <a:off x="3047082" y="5416062"/>
-            <a:ext cx="6097836" cy="646331"/>
-          </a:xfrm>
-          <a:prstGeom prst="rect">
-            <a:avLst/>
-          </a:prstGeom>
-          <a:noFill/>
-        </p:spPr>
-        <p:txBody>
-          <a:bodyPr wrap="square">
-            <a:spAutoFit/>
-          </a:bodyPr>
-          <a:lstStyle/>
-          <a:p>
-            <a:pPr>
-              <a:buNone/>
-            </a:pPr>
-            <a:r>
-              <a:rPr lang="en-US" dirty="0">
-                <a:solidFill>
-                  <a:srgbClr val="FF0000"/>
-                </a:solidFill>
-                <a:latin typeface="+mn-lt"/>
-              </a:rPr>
-              <a:t>If you can't afford the metrics, do you officially cease to exist to modern recruiters?</a:t>
-            </a:r>
-            <a:endParaRPr lang="en-US" dirty="0">
-              <a:solidFill>
-                <a:srgbClr val="FF0000"/>
-              </a:solidFill>
-              <a:latin typeface="Courier New" panose="02070309020205020404" pitchFamily="49" charset="0"/>
-            </a:endParaRPr>
-          </a:p>
-        </p:txBody>
-      </p:sp>
-    </p:spTree>
-    <p:extLst>
-      <p:ext uri="{BB962C8B-B14F-4D97-AF65-F5344CB8AC3E}">
-        <p14:creationId xmlns:p14="http://schemas.microsoft.com/office/powerpoint/2010/main" val="2375312425"/>
-      </p:ext>
-    </p:extLst>
-  </p:cSld>
-  <p:clrMapOvr>
-    <a:masterClrMapping/>
-  </p:clrMapOvr>
-</p:sld>
-</file>
-
 <file path=ppt/slides/slide23.xml><?xml version="1.0" encoding="utf-8"?>
 <p:sld xmlns:a="http://schemas.openxmlformats.org/drawingml/2006/main" xmlns:r="http://schemas.openxmlformats.org/officeDocument/2006/relationships" xmlns:p="http://schemas.openxmlformats.org/presentationml/2006/main">
   <p:cSld>
@@ -6659,7 +7146,7 @@
           <p:cNvPr id="2" name="Title 1">
             <a:extLst>
               <a:ext uri="{FF2B5EF4-FFF2-40B4-BE49-F238E27FC236}">
-                <a16:creationId xmlns:a16="http://schemas.microsoft.com/office/drawing/2014/main" id="{8B4673B5-68D6-7D40-F23C-FDEFA7FE6B2E}"/>
+                <a16:creationId xmlns:a16="http://schemas.microsoft.com/office/drawing/2014/main" id="{ADA1F041-EA1D-44C9-9A34-3199EB88CCDC}"/>
               </a:ext>
             </a:extLst>
           </p:cNvPr>
@@ -6676,8 +7163,8 @@
           <a:lstStyle/>
           <a:p>
             <a:r>
-              <a:rPr lang="en-US" dirty="0"/>
-              <a:t>Finding the invisible athlete</a:t>
+              <a:rPr lang="en-US"/>
+              <a:t>The invisible athlete</a:t>
             </a:r>
           </a:p>
         </p:txBody>
@@ -6687,7 +7174,7 @@
           <p:cNvPr id="3" name="Content Placeholder 2">
             <a:extLst>
               <a:ext uri="{FF2B5EF4-FFF2-40B4-BE49-F238E27FC236}">
-                <a16:creationId xmlns:a16="http://schemas.microsoft.com/office/drawing/2014/main" id="{BA0C76F1-3DE9-4E00-890F-196E99D61C4D}"/>
+                <a16:creationId xmlns:a16="http://schemas.microsoft.com/office/drawing/2014/main" id="{81DA9FF1-2CFE-687B-73EB-63D88B461873}"/>
               </a:ext>
             </a:extLst>
           </p:cNvPr>
@@ -6700,20 +7187,192 @@
         </p:nvSpPr>
         <p:spPr/>
         <p:txBody>
-          <a:bodyPr/>
-          <a:lstStyle/>
-          <a:p>
-            <a:r>
-              <a:rPr lang="en-US" dirty="0"/>
-              <a:t>Simpler, not more complex metrics, can sometimes reveal the diamond in the rough</a:t>
-            </a:r>
+          <a:bodyPr vert="horz" lIns="91440" tIns="45720" rIns="91440" bIns="45720" rtlCol="0" anchor="t">
+            <a:normAutofit/>
+          </a:bodyPr>
+          <a:lstStyle/>
+          <a:p>
+            <a:r>
+              <a:rPr lang="en-US">
+                <a:ea typeface="+mn-lt"/>
+                <a:cs typeface="+mn-lt"/>
+              </a:rPr>
+              <a:t>An athlete may be overlooked because they are:</a:t>
+            </a:r>
+            <a:endParaRPr lang="en-US"/>
+          </a:p>
+          <a:p>
+            <a:pPr lvl="1">
+              <a:buFont typeface="Courier New" panose="020B0604020202020204" pitchFamily="34" charset="0"/>
+              <a:buChar char="o"/>
+            </a:pPr>
+            <a:r>
+              <a:rPr lang="en-US">
+                <a:ea typeface="+mn-lt"/>
+                <a:cs typeface="+mn-lt"/>
+              </a:rPr>
+              <a:t>Outside major recruiting networks </a:t>
+            </a:r>
+            <a:endParaRPr lang="en-US"/>
+          </a:p>
+          <a:p>
+            <a:pPr lvl="1">
+              <a:buFont typeface="Courier New" panose="020B0604020202020204" pitchFamily="34" charset="0"/>
+              <a:buChar char="o"/>
+            </a:pPr>
+            <a:r>
+              <a:rPr lang="en-US">
+                <a:ea typeface="+mn-lt"/>
+                <a:cs typeface="+mn-lt"/>
+              </a:rPr>
+              <a:t>Playing in a lower-resource environment </a:t>
+            </a:r>
+            <a:endParaRPr lang="en-US"/>
+          </a:p>
+          <a:p>
+            <a:pPr lvl="1">
+              <a:buFont typeface="Courier New" panose="020B0604020202020204" pitchFamily="34" charset="0"/>
+              <a:buChar char="o"/>
+            </a:pPr>
+            <a:r>
+              <a:rPr lang="en-US">
+                <a:ea typeface="+mn-lt"/>
+                <a:cs typeface="+mn-lt"/>
+              </a:rPr>
+              <a:t>Missing from commercial databases </a:t>
+            </a:r>
+            <a:endParaRPr lang="en-US"/>
+          </a:p>
+          <a:p>
+            <a:pPr lvl="1">
+              <a:buFont typeface="Courier New" panose="020B0604020202020204" pitchFamily="34" charset="0"/>
+              <a:buChar char="o"/>
+            </a:pPr>
+            <a:r>
+              <a:rPr lang="en-US">
+                <a:ea typeface="+mn-lt"/>
+                <a:cs typeface="+mn-lt"/>
+              </a:rPr>
+              <a:t>Competing against weaker or poorly documented opponents </a:t>
+            </a:r>
+            <a:endParaRPr lang="en-US"/>
+          </a:p>
+          <a:p>
+            <a:pPr lvl="1">
+              <a:buFont typeface="Courier New" panose="020B0604020202020204" pitchFamily="34" charset="0"/>
+              <a:buChar char="o"/>
+            </a:pPr>
+            <a:r>
+              <a:rPr lang="en-US">
+                <a:ea typeface="+mn-lt"/>
+                <a:cs typeface="+mn-lt"/>
+              </a:rPr>
+              <a:t>Measured using inconsistent methods </a:t>
+            </a:r>
+            <a:endParaRPr lang="en-US"/>
+          </a:p>
+          <a:p>
+            <a:pPr lvl="1">
+              <a:buFont typeface="Courier New" panose="020B0604020202020204" pitchFamily="34" charset="0"/>
+              <a:buChar char="o"/>
+            </a:pPr>
+            <a:r>
+              <a:rPr lang="en-US">
+                <a:ea typeface="+mn-lt"/>
+                <a:cs typeface="+mn-lt"/>
+              </a:rPr>
+              <a:t>Strong in qualities that the available metrics do not capture </a:t>
+            </a:r>
+            <a:endParaRPr lang="en-US"/>
+          </a:p>
+          <a:p>
+            <a:endParaRPr lang="en-US">
+              <a:ea typeface="+mn-lt"/>
+              <a:cs typeface="+mn-lt"/>
+            </a:endParaRPr>
+          </a:p>
+          <a:p>
+            <a:r>
+              <a:rPr lang="en-US">
+                <a:ea typeface="+mn-lt"/>
+                <a:cs typeface="+mn-lt"/>
+              </a:rPr>
+              <a:t>No data does not mean no ability.</a:t>
+            </a:r>
+            <a:endParaRPr lang="en-US"/>
+          </a:p>
+          <a:p>
+            <a:pPr lvl="1">
+              <a:buFont typeface="Courier New" panose="020B0604020202020204" pitchFamily="34" charset="0"/>
+              <a:buChar char="o"/>
+            </a:pPr>
+            <a:r>
+              <a:rPr lang="en-US">
+                <a:ea typeface="+mn-lt"/>
+                <a:cs typeface="+mn-lt"/>
+              </a:rPr>
+              <a:t>It may only mean that the athlete was never observed by the system.</a:t>
+            </a:r>
+            <a:endParaRPr lang="en-US"/>
+          </a:p>
+          <a:p>
+            <a:endParaRPr lang="en-US"/>
+          </a:p>
+        </p:txBody>
+      </p:sp>
+      <p:sp>
+        <p:nvSpPr>
+          <p:cNvPr id="5" name="TextBox 4">
+            <a:extLst>
+              <a:ext uri="{FF2B5EF4-FFF2-40B4-BE49-F238E27FC236}">
+                <a16:creationId xmlns:a16="http://schemas.microsoft.com/office/drawing/2014/main" id="{6F87B829-A4B6-1F78-9DA5-137B29194ED2}"/>
+              </a:ext>
+            </a:extLst>
+          </p:cNvPr>
+          <p:cNvSpPr txBox="1"/>
+          <p:nvPr/>
+        </p:nvSpPr>
+        <p:spPr>
+          <a:xfrm>
+            <a:off x="3047082" y="5851491"/>
+            <a:ext cx="6097836" cy="646331"/>
+          </a:xfrm>
+          <a:prstGeom prst="rect">
+            <a:avLst/>
+          </a:prstGeom>
+          <a:noFill/>
+        </p:spPr>
+        <p:txBody>
+          <a:bodyPr wrap="square">
+            <a:spAutoFit/>
+          </a:bodyPr>
+          <a:lstStyle/>
+          <a:p>
+            <a:pPr>
+              <a:buNone/>
+            </a:pPr>
+            <a:r>
+              <a:rPr lang="en-US">
+                <a:solidFill>
+                  <a:srgbClr val="FF0000"/>
+                </a:solidFill>
+                <a:latin typeface="+mn-lt"/>
+              </a:rPr>
+              <a:t>If you can't afford the metrics, do you officially cease to exist to modern recruiters?</a:t>
+            </a:r>
+            <a:endParaRPr lang="en-US">
+              <a:solidFill>
+                <a:srgbClr val="FF0000"/>
+              </a:solidFill>
+              <a:latin typeface="Courier New" panose="02070309020205020404" pitchFamily="49" charset="0"/>
+            </a:endParaRPr>
           </a:p>
         </p:txBody>
       </p:sp>
     </p:spTree>
     <p:extLst>
       <p:ext uri="{BB962C8B-B14F-4D97-AF65-F5344CB8AC3E}">
-        <p14:creationId xmlns:p14="http://schemas.microsoft.com/office/powerpoint/2010/main" val="1508461446"/>
+        <p14:creationId xmlns:p14="http://schemas.microsoft.com/office/powerpoint/2010/main" val="2375312425"/>
       </p:ext>
     </p:extLst>
   </p:cSld>
@@ -6745,7 +7404,7 @@
           <p:cNvPr id="2" name="Title 1">
             <a:extLst>
               <a:ext uri="{FF2B5EF4-FFF2-40B4-BE49-F238E27FC236}">
-                <a16:creationId xmlns:a16="http://schemas.microsoft.com/office/drawing/2014/main" id="{9495A1D2-6E10-ED30-6584-C8F893146855}"/>
+                <a16:creationId xmlns:a16="http://schemas.microsoft.com/office/drawing/2014/main" id="{B112D2BE-C4C4-4D20-846C-3EF3A9972AED}"/>
               </a:ext>
             </a:extLst>
           </p:cNvPr>
@@ -6758,132 +7417,169 @@
         </p:nvSpPr>
         <p:spPr/>
         <p:txBody>
-          <a:bodyPr>
-            <a:normAutofit/>
+          <a:bodyPr/>
+          <a:lstStyle/>
+          <a:p>
+            <a:r>
+              <a:rPr lang="en-US"/>
+              <a:t>Making the invisible athlete</a:t>
+            </a:r>
+          </a:p>
+        </p:txBody>
+      </p:sp>
+      <p:sp>
+        <p:nvSpPr>
+          <p:cNvPr id="3" name="Content Placeholder 2">
+            <a:extLst>
+              <a:ext uri="{FF2B5EF4-FFF2-40B4-BE49-F238E27FC236}">
+                <a16:creationId xmlns:a16="http://schemas.microsoft.com/office/drawing/2014/main" id="{D45FD767-E1AA-9C8B-849F-6E11EB3CB6C0}"/>
+              </a:ext>
+            </a:extLst>
+          </p:cNvPr>
+          <p:cNvSpPr>
+            <a:spLocks noGrp="1"/>
+          </p:cNvSpPr>
+          <p:nvPr>
+            <p:ph idx="1"/>
+          </p:nvPr>
+        </p:nvSpPr>
+        <p:spPr/>
+        <p:txBody>
+          <a:bodyPr vert="horz" lIns="91440" tIns="45720" rIns="91440" bIns="45720" rtlCol="0" anchor="t">
+            <a:normAutofit fontScale="92500"/>
           </a:bodyPr>
           <a:lstStyle/>
           <a:p>
-            <a:r>
-              <a:rPr lang="en-US" dirty="0"/>
-              <a:t>Protect your analysis from bad data</a:t>
-            </a:r>
-          </a:p>
-        </p:txBody>
-      </p:sp>
-      <p:sp>
-        <p:nvSpPr>
-          <p:cNvPr id="3" name="Content Placeholder 2">
-            <a:extLst>
-              <a:ext uri="{FF2B5EF4-FFF2-40B4-BE49-F238E27FC236}">
-                <a16:creationId xmlns:a16="http://schemas.microsoft.com/office/drawing/2014/main" id="{51729538-923D-458B-77DC-2E172E5670ED}"/>
-              </a:ext>
-            </a:extLst>
-          </p:cNvPr>
-          <p:cNvSpPr>
-            <a:spLocks noGrp="1"/>
-          </p:cNvSpPr>
-          <p:nvPr>
-            <p:ph idx="1"/>
-          </p:nvPr>
-        </p:nvSpPr>
-        <p:spPr/>
-        <p:txBody>
-          <a:bodyPr/>
-          <a:lstStyle/>
-          <a:p>
-            <a:r>
-              <a:rPr lang="en-US" dirty="0"/>
-              <a:t>Start with the question</a:t>
-            </a:r>
-          </a:p>
-          <a:p>
-            <a:r>
-              <a:rPr lang="en-US" b="1" dirty="0"/>
-              <a:t>Before analyzing any dataset, ask yourself:</a:t>
-            </a:r>
-            <a:endParaRPr lang="en-US" dirty="0"/>
-          </a:p>
-          <a:p>
-            <a:pPr lvl="1"/>
-            <a:r>
-              <a:rPr lang="en-US" dirty="0"/>
-              <a:t>Who collected this and why?</a:t>
-            </a:r>
-          </a:p>
-          <a:p>
-            <a:pPr lvl="1"/>
-            <a:r>
-              <a:rPr lang="en-US" dirty="0"/>
-              <a:t>What technology/method was used?</a:t>
-            </a:r>
-          </a:p>
-          <a:p>
-            <a:pPr lvl="1"/>
-            <a:r>
-              <a:rPr lang="en-US" dirty="0"/>
-              <a:t>Has this technology/method been validated?</a:t>
-            </a:r>
-          </a:p>
-          <a:p>
-            <a:pPr lvl="1"/>
-            <a:r>
-              <a:rPr lang="en-US" dirty="0"/>
-              <a:t>Has the methodology been consistent over time?</a:t>
-            </a:r>
-          </a:p>
-          <a:p>
-            <a:pPr lvl="1"/>
-            <a:r>
-              <a:rPr lang="en-US" dirty="0"/>
-              <a:t>What's NOT being measured?</a:t>
-            </a:r>
-          </a:p>
-          <a:p>
-            <a:r>
-              <a:rPr lang="en-US" dirty="0"/>
-              <a:t>Be aware of the data quality red flags</a:t>
-            </a:r>
-          </a:p>
-          <a:p>
-            <a:pPr lvl="1"/>
-            <a:endParaRPr lang="en-US" dirty="0"/>
-          </a:p>
-        </p:txBody>
-      </p:sp>
-      <p:sp>
-        <p:nvSpPr>
-          <p:cNvPr id="4" name="Slide Number Placeholder 3">
-            <a:extLst>
-              <a:ext uri="{FF2B5EF4-FFF2-40B4-BE49-F238E27FC236}">
-                <a16:creationId xmlns:a16="http://schemas.microsoft.com/office/drawing/2014/main" id="{BC9D84DC-1007-4E28-B03C-026232E22A68}"/>
-              </a:ext>
-            </a:extLst>
-          </p:cNvPr>
-          <p:cNvSpPr>
-            <a:spLocks noGrp="1"/>
-          </p:cNvSpPr>
-          <p:nvPr>
-            <p:ph type="sldNum" sz="quarter" idx="12"/>
-          </p:nvPr>
-        </p:nvSpPr>
-        <p:spPr/>
-        <p:txBody>
-          <a:bodyPr/>
-          <a:lstStyle/>
-          <a:p>
-            <a:fld id="{45C00377-489B-40EC-B059-26BDDD2E89B9}" type="slidenum">
-              <a:rPr lang="en-US" smtClean="0"/>
-              <a:pPr/>
-              <a:t>24</a:t>
-            </a:fld>
-            <a:endParaRPr lang="en-US" dirty="0"/>
+            <a:pPr marL="0" indent="0">
+              <a:buNone/>
+            </a:pPr>
+            <a:r>
+              <a:rPr lang="en-US">
+                <a:ea typeface="+mn-lt"/>
+                <a:cs typeface="+mn-lt"/>
+              </a:rPr>
+              <a:t>Statistical models can only identify athletes represented by their data.</a:t>
+            </a:r>
+            <a:endParaRPr lang="en-US"/>
+          </a:p>
+          <a:p>
+            <a:pPr>
+              <a:buFont typeface="Arial"/>
+              <a:buChar char="•"/>
+            </a:pPr>
+            <a:r>
+              <a:rPr lang="en-US">
+                <a:ea typeface="+mn-lt"/>
+                <a:cs typeface="+mn-lt"/>
+              </a:rPr>
+              <a:t>If scouting data primarily include:</a:t>
+            </a:r>
+          </a:p>
+          <a:p>
+            <a:pPr lvl="1">
+              <a:buFont typeface="Courier New"/>
+              <a:buChar char="o"/>
+            </a:pPr>
+            <a:r>
+              <a:rPr lang="en-US">
+                <a:ea typeface="+mn-lt"/>
+                <a:cs typeface="+mn-lt"/>
+              </a:rPr>
+              <a:t>Highly recruited athletes </a:t>
+            </a:r>
+            <a:endParaRPr lang="en-US"/>
+          </a:p>
+          <a:p>
+            <a:pPr lvl="1">
+              <a:buFont typeface="Courier New"/>
+              <a:buChar char="o"/>
+            </a:pPr>
+            <a:r>
+              <a:rPr lang="en-US">
+                <a:ea typeface="+mn-lt"/>
+                <a:cs typeface="+mn-lt"/>
+              </a:rPr>
+              <a:t>Major competitions </a:t>
+            </a:r>
+            <a:endParaRPr lang="en-US"/>
+          </a:p>
+          <a:p>
+            <a:pPr lvl="1">
+              <a:buFont typeface="Courier New"/>
+              <a:buChar char="o"/>
+            </a:pPr>
+            <a:r>
+              <a:rPr lang="en-US">
+                <a:ea typeface="+mn-lt"/>
+                <a:cs typeface="+mn-lt"/>
+              </a:rPr>
+              <a:t>Well-funded programs </a:t>
+            </a:r>
+            <a:endParaRPr lang="en-US"/>
+          </a:p>
+          <a:p>
+            <a:pPr lvl="1">
+              <a:buFont typeface="Courier New"/>
+              <a:buChar char="o"/>
+            </a:pPr>
+            <a:r>
+              <a:rPr lang="en-US">
+                <a:ea typeface="+mn-lt"/>
+                <a:cs typeface="+mn-lt"/>
+              </a:rPr>
+              <a:t>Easily measured performance outcomes </a:t>
+            </a:r>
+            <a:endParaRPr lang="en-US"/>
+          </a:p>
+          <a:p>
+            <a:pPr>
+              <a:buFont typeface="Arial"/>
+              <a:buChar char="•"/>
+            </a:pPr>
+            <a:r>
+              <a:rPr lang="en-US">
+                <a:ea typeface="+mn-lt"/>
+                <a:cs typeface="+mn-lt"/>
+              </a:rPr>
+              <a:t>then the resulting analysis may reinforce existing scouting patterns.</a:t>
+            </a:r>
+          </a:p>
+          <a:p>
+            <a:pPr>
+              <a:buFont typeface="Arial"/>
+            </a:pPr>
+            <a:endParaRPr lang="en-US">
+              <a:ea typeface="+mn-lt"/>
+              <a:cs typeface="+mn-lt"/>
+            </a:endParaRPr>
+          </a:p>
+          <a:p>
+            <a:pPr marL="0" indent="0">
+              <a:buNone/>
+            </a:pPr>
+            <a:r>
+              <a:rPr lang="en-US">
+                <a:ea typeface="+mn-lt"/>
+                <a:cs typeface="+mn-lt"/>
+              </a:rPr>
+              <a:t>A model may learn who traditionally receives opportunities, not who has the most potential.</a:t>
+            </a:r>
+          </a:p>
+          <a:p>
+            <a:pPr>
+              <a:buFont typeface="Arial"/>
+            </a:pPr>
+            <a:endParaRPr lang="en-US">
+              <a:ea typeface="+mn-lt"/>
+              <a:cs typeface="+mn-lt"/>
+            </a:endParaRPr>
           </a:p>
         </p:txBody>
       </p:sp>
     </p:spTree>
     <p:extLst>
       <p:ext uri="{BB962C8B-B14F-4D97-AF65-F5344CB8AC3E}">
-        <p14:creationId xmlns:p14="http://schemas.microsoft.com/office/powerpoint/2010/main" val="404022894"/>
+        <p14:creationId xmlns:p14="http://schemas.microsoft.com/office/powerpoint/2010/main" val="2874847518"/>
       </p:ext>
     </p:extLst>
   </p:cSld>
@@ -6894,6 +7590,191 @@
 </file>
 
 <file path=ppt/slides/slide25.xml><?xml version="1.0" encoding="utf-8"?>
+<p:sld xmlns:a="http://schemas.openxmlformats.org/drawingml/2006/main" xmlns:r="http://schemas.openxmlformats.org/officeDocument/2006/relationships" xmlns:p="http://schemas.openxmlformats.org/presentationml/2006/main" show="0">
+  <p:cSld>
+    <p:spTree>
+      <p:nvGrpSpPr>
+        <p:cNvPr id="1" name="">
+          <a:extLst>
+            <a:ext uri="{FF2B5EF4-FFF2-40B4-BE49-F238E27FC236}">
+              <a16:creationId xmlns:a16="http://schemas.microsoft.com/office/drawing/2014/main" id="{B6F1FAF6-5C59-DB9B-077D-2C7BD9156FF8}"/>
+            </a:ext>
+          </a:extLst>
+        </p:cNvPr>
+        <p:cNvGrpSpPr/>
+        <p:nvPr/>
+      </p:nvGrpSpPr>
+      <p:grpSpPr>
+        <a:xfrm>
+          <a:off x="0" y="0"/>
+          <a:ext cx="0" cy="0"/>
+          <a:chOff x="0" y="0"/>
+          <a:chExt cx="0" cy="0"/>
+        </a:xfrm>
+      </p:grpSpPr>
+      <p:sp>
+        <p:nvSpPr>
+          <p:cNvPr id="2" name="Title 1">
+            <a:extLst>
+              <a:ext uri="{FF2B5EF4-FFF2-40B4-BE49-F238E27FC236}">
+                <a16:creationId xmlns:a16="http://schemas.microsoft.com/office/drawing/2014/main" id="{668462C2-217C-F3D3-1750-3F678F189EFD}"/>
+              </a:ext>
+            </a:extLst>
+          </p:cNvPr>
+          <p:cNvSpPr>
+            <a:spLocks noGrp="1"/>
+          </p:cNvSpPr>
+          <p:nvPr>
+            <p:ph type="title"/>
+          </p:nvPr>
+        </p:nvSpPr>
+        <p:spPr/>
+        <p:txBody>
+          <a:bodyPr/>
+          <a:lstStyle/>
+          <a:p>
+            <a:r>
+              <a:rPr lang="en-US"/>
+              <a:t>Making the invisible athlete</a:t>
+            </a:r>
+          </a:p>
+        </p:txBody>
+      </p:sp>
+      <p:sp>
+        <p:nvSpPr>
+          <p:cNvPr id="3" name="Content Placeholder 2">
+            <a:extLst>
+              <a:ext uri="{FF2B5EF4-FFF2-40B4-BE49-F238E27FC236}">
+                <a16:creationId xmlns:a16="http://schemas.microsoft.com/office/drawing/2014/main" id="{5EE70C3A-0556-FE20-A40D-00CEF7BEA9FC}"/>
+              </a:ext>
+            </a:extLst>
+          </p:cNvPr>
+          <p:cNvSpPr>
+            <a:spLocks noGrp="1"/>
+          </p:cNvSpPr>
+          <p:nvPr>
+            <p:ph idx="1"/>
+          </p:nvPr>
+        </p:nvSpPr>
+        <p:spPr/>
+        <p:txBody>
+          <a:bodyPr vert="horz" lIns="91440" tIns="45720" rIns="91440" bIns="45720" rtlCol="0" anchor="t">
+            <a:normAutofit/>
+          </a:bodyPr>
+          <a:lstStyle/>
+          <a:p>
+            <a:pPr>
+              <a:buFont typeface="Arial"/>
+              <a:buChar char="•"/>
+            </a:pPr>
+            <a:r>
+              <a:rPr lang="en-US">
+                <a:ea typeface="+mn-lt"/>
+                <a:cs typeface="+mn-lt"/>
+              </a:rPr>
+              <a:t>Analytics may reproduce existing visibility inequalities when models are trained using:</a:t>
+            </a:r>
+          </a:p>
+          <a:p>
+            <a:pPr lvl="1">
+              <a:buFont typeface="Courier New" panose="020B0604020202020204" pitchFamily="34" charset="0"/>
+              <a:buChar char="o"/>
+            </a:pPr>
+            <a:r>
+              <a:rPr lang="en-US">
+                <a:ea typeface="+mn-lt"/>
+                <a:cs typeface="+mn-lt"/>
+              </a:rPr>
+              <a:t>Previously recruited athletes</a:t>
+            </a:r>
+          </a:p>
+          <a:p>
+            <a:pPr lvl="1">
+              <a:buFont typeface="Courier New" panose="020B0604020202020204" pitchFamily="34" charset="0"/>
+              <a:buChar char="o"/>
+            </a:pPr>
+            <a:r>
+              <a:rPr lang="en-US">
+                <a:ea typeface="+mn-lt"/>
+                <a:cs typeface="+mn-lt"/>
+              </a:rPr>
+              <a:t>Major competitions</a:t>
+            </a:r>
+          </a:p>
+          <a:p>
+            <a:pPr lvl="1">
+              <a:buFont typeface="Courier New" panose="020B0604020202020204" pitchFamily="34" charset="0"/>
+              <a:buChar char="o"/>
+            </a:pPr>
+            <a:r>
+              <a:rPr lang="en-US">
+                <a:ea typeface="+mn-lt"/>
+                <a:cs typeface="+mn-lt"/>
+              </a:rPr>
+              <a:t>Well-funded schools or clubs</a:t>
+            </a:r>
+          </a:p>
+          <a:p>
+            <a:pPr lvl="1">
+              <a:buFont typeface="Courier New" panose="020B0604020202020204" pitchFamily="34" charset="0"/>
+              <a:buChar char="o"/>
+            </a:pPr>
+            <a:r>
+              <a:rPr lang="en-US">
+                <a:ea typeface="+mn-lt"/>
+                <a:cs typeface="+mn-lt"/>
+              </a:rPr>
+              <a:t>Easily measured performance outcomes</a:t>
+            </a:r>
+          </a:p>
+          <a:p>
+            <a:pPr lvl="1">
+              <a:buFont typeface="Courier New" panose="020B0604020202020204" pitchFamily="34" charset="0"/>
+              <a:buChar char="o"/>
+            </a:pPr>
+            <a:r>
+              <a:rPr lang="en-US">
+                <a:ea typeface="+mn-lt"/>
+                <a:cs typeface="+mn-lt"/>
+              </a:rPr>
+              <a:t>Historical decisions made by scouts or coaches</a:t>
+            </a:r>
+          </a:p>
+          <a:p>
+            <a:pPr lvl="1">
+              <a:buFont typeface="Courier New" panose="020B0604020202020204" pitchFamily="34" charset="0"/>
+              <a:buChar char="o"/>
+            </a:pPr>
+            <a:endParaRPr lang="en-US">
+              <a:ea typeface="+mn-lt"/>
+              <a:cs typeface="+mn-lt"/>
+            </a:endParaRPr>
+          </a:p>
+          <a:p>
+            <a:r>
+              <a:rPr lang="en-US">
+                <a:ea typeface="+mn-lt"/>
+                <a:cs typeface="+mn-lt"/>
+              </a:rPr>
+              <a:t>If past opportunity determines who appears in the data, a model may learn to predict opportunity and not talent.</a:t>
+            </a:r>
+          </a:p>
+        </p:txBody>
+      </p:sp>
+    </p:spTree>
+    <p:extLst>
+      <p:ext uri="{BB962C8B-B14F-4D97-AF65-F5344CB8AC3E}">
+        <p14:creationId xmlns:p14="http://schemas.microsoft.com/office/powerpoint/2010/main" val="2995389737"/>
+      </p:ext>
+    </p:extLst>
+  </p:cSld>
+  <p:clrMapOvr>
+    <a:masterClrMapping/>
+  </p:clrMapOvr>
+</p:sld>
+</file>
+
+<file path=ppt/slides/slide26.xml><?xml version="1.0" encoding="utf-8"?>
 <p:sld xmlns:a="http://schemas.openxmlformats.org/drawingml/2006/main" xmlns:r="http://schemas.openxmlformats.org/officeDocument/2006/relationships" xmlns:p="http://schemas.openxmlformats.org/presentationml/2006/main">
   <p:cSld>
     <p:spTree>
@@ -6915,7 +7796,7 @@
           <p:cNvPr id="2" name="Title 1">
             <a:extLst>
               <a:ext uri="{FF2B5EF4-FFF2-40B4-BE49-F238E27FC236}">
-                <a16:creationId xmlns:a16="http://schemas.microsoft.com/office/drawing/2014/main" id="{FBFD6EB5-FEC2-47DE-01A3-F0E170543F3C}"/>
+                <a16:creationId xmlns:a16="http://schemas.microsoft.com/office/drawing/2014/main" id="{8B4673B5-68D6-7D40-F23C-FDEFA7FE6B2E}"/>
               </a:ext>
             </a:extLst>
           </p:cNvPr>
@@ -6928,16 +7809,13 @@
         </p:nvSpPr>
         <p:spPr/>
         <p:txBody>
-          <a:bodyPr>
-            <a:normAutofit/>
-          </a:bodyPr>
-          <a:lstStyle/>
-          <a:p>
-            <a:r>
-              <a:rPr lang="en-GB" dirty="0"/>
-              <a:t>Summary &amp; Looking Ahead</a:t>
-            </a:r>
-            <a:endParaRPr lang="en-US" dirty="0"/>
+          <a:bodyPr/>
+          <a:lstStyle/>
+          <a:p>
+            <a:r>
+              <a:rPr lang="en-US"/>
+              <a:t>Finding the invisible athlete</a:t>
+            </a:r>
           </a:p>
         </p:txBody>
       </p:sp>
@@ -6946,7 +7824,7 @@
           <p:cNvPr id="3" name="Content Placeholder 2">
             <a:extLst>
               <a:ext uri="{FF2B5EF4-FFF2-40B4-BE49-F238E27FC236}">
-                <a16:creationId xmlns:a16="http://schemas.microsoft.com/office/drawing/2014/main" id="{B7781857-C6C4-CF29-7D9F-C7FCD74ECA0D}"/>
+                <a16:creationId xmlns:a16="http://schemas.microsoft.com/office/drawing/2014/main" id="{BA0C76F1-3DE9-4E00-890F-196E99D61C4D}"/>
               </a:ext>
             </a:extLst>
           </p:cNvPr>
@@ -6963,8 +7841,8 @@
           <a:lstStyle/>
           <a:p>
             <a:r>
-              <a:rPr lang="en-US" dirty="0"/>
-              <a:t>Next:</a:t>
+              <a:rPr lang="en-US"/>
+              <a:t>Simpler, not more complex metrics, can sometimes reveal the diamond in the rough</a:t>
             </a:r>
           </a:p>
         </p:txBody>
@@ -6972,7 +7850,7 @@
     </p:spTree>
     <p:extLst>
       <p:ext uri="{BB962C8B-B14F-4D97-AF65-F5344CB8AC3E}">
-        <p14:creationId xmlns:p14="http://schemas.microsoft.com/office/powerpoint/2010/main" val="2206692154"/>
+        <p14:creationId xmlns:p14="http://schemas.microsoft.com/office/powerpoint/2010/main" val="1508461446"/>
       </p:ext>
     </p:extLst>
   </p:cSld>
@@ -6982,8 +7860,165 @@
 </p:sld>
 </file>
 
-<file path=ppt/slides/slide26.xml><?xml version="1.0" encoding="utf-8"?>
-<p:sld xmlns:a="http://schemas.openxmlformats.org/drawingml/2006/main" xmlns:r="http://schemas.openxmlformats.org/officeDocument/2006/relationships" xmlns:p="http://schemas.openxmlformats.org/presentationml/2006/main" show="0">
+<file path=ppt/slides/slide27.xml><?xml version="1.0" encoding="utf-8"?>
+<p:sld xmlns:a="http://schemas.openxmlformats.org/drawingml/2006/main" xmlns:r="http://schemas.openxmlformats.org/officeDocument/2006/relationships" xmlns:p="http://schemas.openxmlformats.org/presentationml/2006/main">
+  <p:cSld>
+    <p:spTree>
+      <p:nvGrpSpPr>
+        <p:cNvPr id="1" name="">
+          <a:extLst>
+            <a:ext uri="{FF2B5EF4-FFF2-40B4-BE49-F238E27FC236}">
+              <a16:creationId xmlns:a16="http://schemas.microsoft.com/office/drawing/2014/main" id="{C364EB18-608F-8802-D194-101660423B79}"/>
+            </a:ext>
+          </a:extLst>
+        </p:cNvPr>
+        <p:cNvGrpSpPr/>
+        <p:nvPr/>
+      </p:nvGrpSpPr>
+      <p:grpSpPr>
+        <a:xfrm>
+          <a:off x="0" y="0"/>
+          <a:ext cx="0" cy="0"/>
+          <a:chOff x="0" y="0"/>
+          <a:chExt cx="0" cy="0"/>
+        </a:xfrm>
+      </p:grpSpPr>
+      <p:sp>
+        <p:nvSpPr>
+          <p:cNvPr id="2" name="Title 1">
+            <a:extLst>
+              <a:ext uri="{FF2B5EF4-FFF2-40B4-BE49-F238E27FC236}">
+                <a16:creationId xmlns:a16="http://schemas.microsoft.com/office/drawing/2014/main" id="{A1972B0F-8AC5-42F8-7BBE-D879510B88E4}"/>
+              </a:ext>
+            </a:extLst>
+          </p:cNvPr>
+          <p:cNvSpPr>
+            <a:spLocks noGrp="1"/>
+          </p:cNvSpPr>
+          <p:nvPr>
+            <p:ph type="title"/>
+          </p:nvPr>
+        </p:nvSpPr>
+        <p:spPr/>
+        <p:txBody>
+          <a:bodyPr/>
+          <a:lstStyle/>
+          <a:p>
+            <a:r>
+              <a:rPr lang="en-US"/>
+              <a:t>Finding the invisible athlete</a:t>
+            </a:r>
+          </a:p>
+        </p:txBody>
+      </p:sp>
+      <p:sp>
+        <p:nvSpPr>
+          <p:cNvPr id="3" name="Content Placeholder 2">
+            <a:extLst>
+              <a:ext uri="{FF2B5EF4-FFF2-40B4-BE49-F238E27FC236}">
+                <a16:creationId xmlns:a16="http://schemas.microsoft.com/office/drawing/2014/main" id="{451547EC-8C64-0100-020D-0D8510686817}"/>
+              </a:ext>
+            </a:extLst>
+          </p:cNvPr>
+          <p:cNvSpPr>
+            <a:spLocks noGrp="1"/>
+          </p:cNvSpPr>
+          <p:nvPr>
+            <p:ph idx="1"/>
+          </p:nvPr>
+        </p:nvSpPr>
+        <p:spPr/>
+        <p:txBody>
+          <a:bodyPr vert="horz" lIns="91440" tIns="45720" rIns="91440" bIns="45720" rtlCol="0" anchor="t">
+            <a:normAutofit/>
+          </a:bodyPr>
+          <a:lstStyle/>
+          <a:p>
+            <a:r>
+              <a:rPr lang="en-US">
+                <a:ea typeface="+mn-lt"/>
+                <a:cs typeface="+mn-lt"/>
+              </a:rPr>
+              <a:t>Suppose the original question is:</a:t>
+            </a:r>
+          </a:p>
+          <a:p>
+            <a:pPr lvl="1">
+              <a:buFont typeface="Courier New" panose="020B0604020202020204" pitchFamily="34" charset="0"/>
+              <a:buChar char="o"/>
+            </a:pPr>
+            <a:r>
+              <a:rPr lang="en-US">
+                <a:ea typeface="+mn-lt"/>
+                <a:cs typeface="+mn-lt"/>
+              </a:rPr>
+              <a:t>Which athletes have the potential to succeed at the next level?</a:t>
+            </a:r>
+          </a:p>
+          <a:p>
+            <a:r>
+              <a:rPr lang="en-US">
+                <a:ea typeface="+mn-lt"/>
+                <a:cs typeface="+mn-lt"/>
+              </a:rPr>
+              <a:t>The available data might only allow us to answer:</a:t>
+            </a:r>
+          </a:p>
+          <a:p>
+            <a:pPr lvl="1">
+              <a:buFont typeface="Courier New" panose="020B0604020202020204" pitchFamily="34" charset="0"/>
+              <a:buChar char="o"/>
+            </a:pPr>
+            <a:r>
+              <a:rPr lang="en-US">
+                <a:ea typeface="+mn-lt"/>
+                <a:cs typeface="+mn-lt"/>
+              </a:rPr>
+              <a:t>Which highly visible athletes currently have the best statistics?</a:t>
+            </a:r>
+          </a:p>
+          <a:p>
+            <a:r>
+              <a:rPr lang="en-US">
+                <a:ea typeface="+mn-lt"/>
+                <a:cs typeface="+mn-lt"/>
+              </a:rPr>
+              <a:t>Those are not the same question.</a:t>
+            </a:r>
+          </a:p>
+          <a:p>
+            <a:pPr lvl="1">
+              <a:buFont typeface="Courier New" panose="020B0604020202020204" pitchFamily="34" charset="0"/>
+              <a:buChar char="o"/>
+            </a:pPr>
+            <a:r>
+              <a:rPr lang="en-US">
+                <a:ea typeface="+mn-lt"/>
+                <a:cs typeface="+mn-lt"/>
+              </a:rPr>
+              <a:t>Changing the question would be easier but it would preserve the same blind spots as everyone else.</a:t>
+            </a:r>
+          </a:p>
+          <a:p>
+            <a:endParaRPr lang="en-US"/>
+          </a:p>
+        </p:txBody>
+      </p:sp>
+    </p:spTree>
+    <p:extLst>
+      <p:ext uri="{BB962C8B-B14F-4D97-AF65-F5344CB8AC3E}">
+        <p14:creationId xmlns:p14="http://schemas.microsoft.com/office/powerpoint/2010/main" val="1243830769"/>
+      </p:ext>
+    </p:extLst>
+  </p:cSld>
+  <p:clrMapOvr>
+    <a:masterClrMapping/>
+  </p:clrMapOvr>
+</p:sld>
+</file>
+
+<file path=ppt/slides/slide28.xml><?xml version="1.0" encoding="utf-8"?>
+<p:sld xmlns:a="http://schemas.openxmlformats.org/drawingml/2006/main" xmlns:r="http://schemas.openxmlformats.org/officeDocument/2006/relationships" xmlns:p="http://schemas.openxmlformats.org/presentationml/2006/main">
   <p:cSld>
     <p:spTree>
       <p:nvGrpSpPr>
@@ -7004,7 +8039,7 @@
           <p:cNvPr id="2" name="Title 1">
             <a:extLst>
               <a:ext uri="{FF2B5EF4-FFF2-40B4-BE49-F238E27FC236}">
-                <a16:creationId xmlns:a16="http://schemas.microsoft.com/office/drawing/2014/main" id="{0EA8D9B6-7685-F178-75AE-9F7C2D524F95}"/>
+                <a16:creationId xmlns:a16="http://schemas.microsoft.com/office/drawing/2014/main" id="{0C24F4EC-D09F-1299-C75A-51B984608467}"/>
               </a:ext>
             </a:extLst>
           </p:cNvPr>
@@ -7020,10 +8055,7 @@
           <a:bodyPr/>
           <a:lstStyle/>
           <a:p>
-            <a:r>
-              <a:rPr lang="en-US" dirty="0"/>
-              <a:t>Ethics and Data Quality</a:t>
-            </a:r>
+            <a:endParaRPr lang="en-US"/>
           </a:p>
         </p:txBody>
       </p:sp>
@@ -7032,7 +8064,7 @@
           <p:cNvPr id="3" name="Content Placeholder 2">
             <a:extLst>
               <a:ext uri="{FF2B5EF4-FFF2-40B4-BE49-F238E27FC236}">
-                <a16:creationId xmlns:a16="http://schemas.microsoft.com/office/drawing/2014/main" id="{E8CDD4DB-A820-1D03-618F-9AB277D56FE9}"/>
+                <a16:creationId xmlns:a16="http://schemas.microsoft.com/office/drawing/2014/main" id="{573F9774-8134-A9A4-DA1E-3A021D0E75A4}"/>
               </a:ext>
             </a:extLst>
           </p:cNvPr>
@@ -7045,484 +8077,125 @@
         </p:nvSpPr>
         <p:spPr/>
         <p:txBody>
-          <a:bodyPr/>
-          <a:lstStyle/>
-          <a:p>
-            <a:endParaRPr lang="en-US" dirty="0"/>
-          </a:p>
-        </p:txBody>
-      </p:sp>
-      <p:sp>
-        <p:nvSpPr>
-          <p:cNvPr id="4" name="Rectangle: Rounded Corners 3">
-            <a:extLst>
-              <a:ext uri="{FF2B5EF4-FFF2-40B4-BE49-F238E27FC236}">
-                <a16:creationId xmlns:a16="http://schemas.microsoft.com/office/drawing/2014/main" id="{03A86C87-B9F7-9ABC-F77B-D76A8E2DA7D7}"/>
-              </a:ext>
-            </a:extLst>
-          </p:cNvPr>
-          <p:cNvSpPr/>
-          <p:nvPr/>
-        </p:nvSpPr>
-        <p:spPr>
-          <a:xfrm>
-            <a:off x="5231175" y="1685580"/>
-            <a:ext cx="1729649" cy="914400"/>
-          </a:xfrm>
-          <a:prstGeom prst="roundRect">
-            <a:avLst/>
-          </a:prstGeom>
-        </p:spPr>
-        <p:style>
-          <a:lnRef idx="2">
-            <a:schemeClr val="accent1">
-              <a:shade val="15000"/>
-            </a:schemeClr>
-          </a:lnRef>
-          <a:fillRef idx="1">
-            <a:schemeClr val="accent1"/>
-          </a:fillRef>
-          <a:effectRef idx="0">
-            <a:schemeClr val="accent1"/>
-          </a:effectRef>
-          <a:fontRef idx="minor">
-            <a:schemeClr val="lt1"/>
-          </a:fontRef>
-        </p:style>
-        <p:txBody>
-          <a:bodyPr rtlCol="0" anchor="ctr"/>
-          <a:lstStyle/>
-          <a:p>
-            <a:pPr algn="ctr"/>
-            <a:r>
-              <a:rPr lang="en-US" dirty="0"/>
-              <a:t>Low-quality data</a:t>
-            </a:r>
-          </a:p>
-        </p:txBody>
-      </p:sp>
-      <p:sp>
-        <p:nvSpPr>
-          <p:cNvPr id="6" name="Rectangle: Rounded Corners 5">
-            <a:extLst>
-              <a:ext uri="{FF2B5EF4-FFF2-40B4-BE49-F238E27FC236}">
-                <a16:creationId xmlns:a16="http://schemas.microsoft.com/office/drawing/2014/main" id="{0C59778E-295C-21E0-5D44-2084FB20B168}"/>
-              </a:ext>
-            </a:extLst>
-          </p:cNvPr>
-          <p:cNvSpPr/>
-          <p:nvPr/>
-        </p:nvSpPr>
-        <p:spPr>
-          <a:xfrm>
-            <a:off x="7884405" y="3177380"/>
-            <a:ext cx="1729649" cy="914400"/>
-          </a:xfrm>
-          <a:prstGeom prst="roundRect">
-            <a:avLst/>
-          </a:prstGeom>
-        </p:spPr>
-        <p:style>
-          <a:lnRef idx="2">
-            <a:schemeClr val="accent1">
-              <a:shade val="15000"/>
-            </a:schemeClr>
-          </a:lnRef>
-          <a:fillRef idx="1">
-            <a:schemeClr val="accent1"/>
-          </a:fillRef>
-          <a:effectRef idx="0">
-            <a:schemeClr val="accent1"/>
-          </a:effectRef>
-          <a:fontRef idx="minor">
-            <a:schemeClr val="lt1"/>
-          </a:fontRef>
-        </p:style>
-        <p:txBody>
-          <a:bodyPr rtlCol="0" anchor="ctr"/>
-          <a:lstStyle/>
-          <a:p>
-            <a:pPr algn="ctr"/>
-            <a:r>
-              <a:rPr lang="en-US" dirty="0"/>
-              <a:t>Low-quality analysis</a:t>
-            </a:r>
-          </a:p>
-        </p:txBody>
-      </p:sp>
-      <p:sp>
-        <p:nvSpPr>
-          <p:cNvPr id="8" name="Rectangle: Rounded Corners 7">
-            <a:extLst>
-              <a:ext uri="{FF2B5EF4-FFF2-40B4-BE49-F238E27FC236}">
-                <a16:creationId xmlns:a16="http://schemas.microsoft.com/office/drawing/2014/main" id="{8987573E-E4F5-DFC0-5CE8-33F7FD7727F1}"/>
-              </a:ext>
-            </a:extLst>
-          </p:cNvPr>
-          <p:cNvSpPr/>
-          <p:nvPr/>
-        </p:nvSpPr>
-        <p:spPr>
-          <a:xfrm>
-            <a:off x="6676785" y="5074539"/>
-            <a:ext cx="1729649" cy="914400"/>
-          </a:xfrm>
-          <a:prstGeom prst="roundRect">
-            <a:avLst/>
-          </a:prstGeom>
-        </p:spPr>
-        <p:style>
-          <a:lnRef idx="2">
-            <a:schemeClr val="accent1">
-              <a:shade val="15000"/>
-            </a:schemeClr>
-          </a:lnRef>
-          <a:fillRef idx="1">
-            <a:schemeClr val="accent1"/>
-          </a:fillRef>
-          <a:effectRef idx="0">
-            <a:schemeClr val="accent1"/>
-          </a:effectRef>
-          <a:fontRef idx="minor">
-            <a:schemeClr val="lt1"/>
-          </a:fontRef>
-        </p:style>
-        <p:txBody>
-          <a:bodyPr rtlCol="0" anchor="ctr"/>
-          <a:lstStyle/>
-          <a:p>
-            <a:pPr algn="ctr"/>
-            <a:r>
-              <a:rPr lang="en-US" dirty="0"/>
-              <a:t>Worse decisions</a:t>
-            </a:r>
-          </a:p>
-        </p:txBody>
-      </p:sp>
-      <p:sp>
-        <p:nvSpPr>
-          <p:cNvPr id="10" name="Rectangle: Rounded Corners 9">
-            <a:extLst>
-              <a:ext uri="{FF2B5EF4-FFF2-40B4-BE49-F238E27FC236}">
-                <a16:creationId xmlns:a16="http://schemas.microsoft.com/office/drawing/2014/main" id="{8DF57152-AC9D-84BA-8D7A-F10AE8B7CAA1}"/>
-              </a:ext>
-            </a:extLst>
-          </p:cNvPr>
-          <p:cNvSpPr/>
-          <p:nvPr/>
-        </p:nvSpPr>
-        <p:spPr>
-          <a:xfrm>
-            <a:off x="3660042" y="5061686"/>
-            <a:ext cx="1729649" cy="914400"/>
-          </a:xfrm>
-          <a:prstGeom prst="roundRect">
-            <a:avLst/>
-          </a:prstGeom>
-        </p:spPr>
-        <p:style>
-          <a:lnRef idx="2">
-            <a:schemeClr val="accent1">
-              <a:shade val="15000"/>
-            </a:schemeClr>
-          </a:lnRef>
-          <a:fillRef idx="1">
-            <a:schemeClr val="accent1"/>
-          </a:fillRef>
-          <a:effectRef idx="0">
-            <a:schemeClr val="accent1"/>
-          </a:effectRef>
-          <a:fontRef idx="minor">
-            <a:schemeClr val="lt1"/>
-          </a:fontRef>
-        </p:style>
-        <p:txBody>
-          <a:bodyPr rtlCol="0" anchor="ctr"/>
-          <a:lstStyle/>
-          <a:p>
-            <a:pPr algn="ctr"/>
-            <a:r>
-              <a:rPr lang="en-US" dirty="0"/>
-              <a:t>Athlete distrust</a:t>
-            </a:r>
-          </a:p>
-        </p:txBody>
-      </p:sp>
-      <p:sp>
-        <p:nvSpPr>
-          <p:cNvPr id="12" name="Rectangle: Rounded Corners 11">
-            <a:extLst>
-              <a:ext uri="{FF2B5EF4-FFF2-40B4-BE49-F238E27FC236}">
-                <a16:creationId xmlns:a16="http://schemas.microsoft.com/office/drawing/2014/main" id="{F290065A-B18B-A035-8FC0-ABAB6AE7C8C3}"/>
-              </a:ext>
-            </a:extLst>
-          </p:cNvPr>
-          <p:cNvSpPr/>
-          <p:nvPr/>
-        </p:nvSpPr>
-        <p:spPr>
-          <a:xfrm>
-            <a:off x="2297015" y="3251812"/>
-            <a:ext cx="1729649" cy="914400"/>
-          </a:xfrm>
-          <a:prstGeom prst="roundRect">
-            <a:avLst/>
-          </a:prstGeom>
-        </p:spPr>
-        <p:style>
-          <a:lnRef idx="2">
-            <a:schemeClr val="accent1">
-              <a:shade val="15000"/>
-            </a:schemeClr>
-          </a:lnRef>
-          <a:fillRef idx="1">
-            <a:schemeClr val="accent1"/>
-          </a:fillRef>
-          <a:effectRef idx="0">
-            <a:schemeClr val="accent1"/>
-          </a:effectRef>
-          <a:fontRef idx="minor">
-            <a:schemeClr val="lt1"/>
-          </a:fontRef>
-        </p:style>
-        <p:txBody>
-          <a:bodyPr rtlCol="0" anchor="ctr"/>
-          <a:lstStyle/>
-          <a:p>
-            <a:pPr algn="ctr"/>
-            <a:r>
-              <a:rPr lang="en-US" dirty="0"/>
-              <a:t>Less honest reporting</a:t>
-            </a:r>
-          </a:p>
-        </p:txBody>
-      </p:sp>
-      <p:sp>
-        <p:nvSpPr>
-          <p:cNvPr id="13" name="Arrow: Right 12">
-            <a:extLst>
-              <a:ext uri="{FF2B5EF4-FFF2-40B4-BE49-F238E27FC236}">
-                <a16:creationId xmlns:a16="http://schemas.microsoft.com/office/drawing/2014/main" id="{7ACB6CEC-1571-70EA-3699-F6717F108EF7}"/>
-              </a:ext>
-            </a:extLst>
-          </p:cNvPr>
-          <p:cNvSpPr/>
-          <p:nvPr/>
-        </p:nvSpPr>
-        <p:spPr>
-          <a:xfrm rot="2353011">
-            <a:off x="7148425" y="2402219"/>
-            <a:ext cx="978408" cy="484632"/>
-          </a:xfrm>
-          <a:prstGeom prst="rightArrow">
-            <a:avLst/>
-          </a:prstGeom>
-        </p:spPr>
-        <p:style>
-          <a:lnRef idx="2">
-            <a:schemeClr val="accent1">
-              <a:shade val="15000"/>
-            </a:schemeClr>
-          </a:lnRef>
-          <a:fillRef idx="1">
-            <a:schemeClr val="accent1"/>
-          </a:fillRef>
-          <a:effectRef idx="0">
-            <a:schemeClr val="accent1"/>
-          </a:effectRef>
-          <a:fontRef idx="minor">
-            <a:schemeClr val="lt1"/>
-          </a:fontRef>
-        </p:style>
-        <p:txBody>
-          <a:bodyPr rtlCol="0" anchor="ctr"/>
-          <a:lstStyle/>
-          <a:p>
-            <a:pPr algn="ctr"/>
-            <a:endParaRPr lang="en-US"/>
-          </a:p>
-        </p:txBody>
-      </p:sp>
-      <p:sp>
-        <p:nvSpPr>
-          <p:cNvPr id="15" name="Arrow: Right 14">
-            <a:extLst>
-              <a:ext uri="{FF2B5EF4-FFF2-40B4-BE49-F238E27FC236}">
-                <a16:creationId xmlns:a16="http://schemas.microsoft.com/office/drawing/2014/main" id="{ABCDA285-EEAA-ACDC-3420-DF09520C8437}"/>
-              </a:ext>
-            </a:extLst>
-          </p:cNvPr>
-          <p:cNvSpPr/>
-          <p:nvPr/>
-        </p:nvSpPr>
-        <p:spPr>
-          <a:xfrm rot="7834450">
-            <a:off x="8260026" y="4422125"/>
-            <a:ext cx="978408" cy="484632"/>
-          </a:xfrm>
-          <a:prstGeom prst="rightArrow">
-            <a:avLst/>
-          </a:prstGeom>
-        </p:spPr>
-        <p:style>
-          <a:lnRef idx="2">
-            <a:schemeClr val="accent1">
-              <a:shade val="15000"/>
-            </a:schemeClr>
-          </a:lnRef>
-          <a:fillRef idx="1">
-            <a:schemeClr val="accent1"/>
-          </a:fillRef>
-          <a:effectRef idx="0">
-            <a:schemeClr val="accent1"/>
-          </a:effectRef>
-          <a:fontRef idx="minor">
-            <a:schemeClr val="lt1"/>
-          </a:fontRef>
-        </p:style>
-        <p:txBody>
-          <a:bodyPr rtlCol="0" anchor="ctr"/>
-          <a:lstStyle/>
-          <a:p>
-            <a:pPr algn="ctr"/>
-            <a:endParaRPr lang="en-US"/>
-          </a:p>
-        </p:txBody>
-      </p:sp>
-      <p:sp>
-        <p:nvSpPr>
-          <p:cNvPr id="17" name="Arrow: Right 16">
-            <a:extLst>
-              <a:ext uri="{FF2B5EF4-FFF2-40B4-BE49-F238E27FC236}">
-                <a16:creationId xmlns:a16="http://schemas.microsoft.com/office/drawing/2014/main" id="{EFF4B582-3AA6-B55C-0EFF-0717B9E5535E}"/>
-              </a:ext>
-            </a:extLst>
-          </p:cNvPr>
-          <p:cNvSpPr/>
-          <p:nvPr/>
-        </p:nvSpPr>
-        <p:spPr>
-          <a:xfrm rot="13659880">
-            <a:off x="2764414" y="4502600"/>
-            <a:ext cx="978408" cy="484632"/>
-          </a:xfrm>
-          <a:prstGeom prst="rightArrow">
-            <a:avLst/>
-          </a:prstGeom>
-        </p:spPr>
-        <p:style>
-          <a:lnRef idx="2">
-            <a:schemeClr val="accent1">
-              <a:shade val="15000"/>
-            </a:schemeClr>
-          </a:lnRef>
-          <a:fillRef idx="1">
-            <a:schemeClr val="accent1"/>
-          </a:fillRef>
-          <a:effectRef idx="0">
-            <a:schemeClr val="accent1"/>
-          </a:effectRef>
-          <a:fontRef idx="minor">
-            <a:schemeClr val="lt1"/>
-          </a:fontRef>
-        </p:style>
-        <p:txBody>
-          <a:bodyPr rtlCol="0" anchor="ctr"/>
-          <a:lstStyle/>
-          <a:p>
-            <a:pPr algn="ctr"/>
-            <a:endParaRPr lang="en-US"/>
-          </a:p>
-        </p:txBody>
-      </p:sp>
-      <p:sp>
-        <p:nvSpPr>
-          <p:cNvPr id="19" name="Arrow: Right 18">
-            <a:extLst>
-              <a:ext uri="{FF2B5EF4-FFF2-40B4-BE49-F238E27FC236}">
-                <a16:creationId xmlns:a16="http://schemas.microsoft.com/office/drawing/2014/main" id="{D7510D14-CB83-4698-6F33-4D4E655A9592}"/>
-              </a:ext>
-            </a:extLst>
-          </p:cNvPr>
-          <p:cNvSpPr/>
-          <p:nvPr/>
-        </p:nvSpPr>
-        <p:spPr>
-          <a:xfrm rot="10800000">
-            <a:off x="5512041" y="5289423"/>
-            <a:ext cx="978408" cy="484632"/>
-          </a:xfrm>
-          <a:prstGeom prst="rightArrow">
-            <a:avLst/>
-          </a:prstGeom>
-        </p:spPr>
-        <p:style>
-          <a:lnRef idx="2">
-            <a:schemeClr val="accent1">
-              <a:shade val="15000"/>
-            </a:schemeClr>
-          </a:lnRef>
-          <a:fillRef idx="1">
-            <a:schemeClr val="accent1"/>
-          </a:fillRef>
-          <a:effectRef idx="0">
-            <a:schemeClr val="accent1"/>
-          </a:effectRef>
-          <a:fontRef idx="minor">
-            <a:schemeClr val="lt1"/>
-          </a:fontRef>
-        </p:style>
-        <p:txBody>
-          <a:bodyPr rtlCol="0" anchor="ctr"/>
-          <a:lstStyle/>
-          <a:p>
-            <a:pPr algn="ctr"/>
-            <a:endParaRPr lang="en-US"/>
-          </a:p>
-        </p:txBody>
-      </p:sp>
-      <p:sp>
-        <p:nvSpPr>
-          <p:cNvPr id="21" name="Arrow: Right 20">
-            <a:extLst>
-              <a:ext uri="{FF2B5EF4-FFF2-40B4-BE49-F238E27FC236}">
-                <a16:creationId xmlns:a16="http://schemas.microsoft.com/office/drawing/2014/main" id="{4CFF4EA4-08AD-35D3-5B48-E6052171065D}"/>
-              </a:ext>
-            </a:extLst>
-          </p:cNvPr>
-          <p:cNvSpPr/>
-          <p:nvPr/>
-        </p:nvSpPr>
-        <p:spPr>
-          <a:xfrm rot="19324540">
-            <a:off x="3961867" y="2422793"/>
-            <a:ext cx="978408" cy="484632"/>
-          </a:xfrm>
-          <a:prstGeom prst="rightArrow">
-            <a:avLst/>
-          </a:prstGeom>
-        </p:spPr>
-        <p:style>
-          <a:lnRef idx="2">
-            <a:schemeClr val="accent1">
-              <a:shade val="15000"/>
-            </a:schemeClr>
-          </a:lnRef>
-          <a:fillRef idx="1">
-            <a:schemeClr val="accent1"/>
-          </a:fillRef>
-          <a:effectRef idx="0">
-            <a:schemeClr val="accent1"/>
-          </a:effectRef>
-          <a:fontRef idx="minor">
-            <a:schemeClr val="lt1"/>
-          </a:fontRef>
-        </p:style>
-        <p:txBody>
-          <a:bodyPr rtlCol="0" anchor="ctr"/>
-          <a:lstStyle/>
-          <a:p>
-            <a:pPr algn="ctr"/>
+          <a:bodyPr vert="horz" lIns="91440" tIns="45720" rIns="91440" bIns="45720" rtlCol="0" anchor="t">
+            <a:normAutofit/>
+          </a:bodyPr>
+          <a:lstStyle/>
+          <a:p>
+            <a:r>
+              <a:rPr lang="en-US">
+                <a:ea typeface="+mn-lt"/>
+                <a:cs typeface="+mn-lt"/>
+              </a:rPr>
+              <a:t>When the available data do not answer the original question, analysts can:</a:t>
+            </a:r>
+            <a:endParaRPr lang="en-US"/>
+          </a:p>
+          <a:p>
+            <a:pPr lvl="1">
+              <a:buFont typeface="Courier New" panose="020B0604020202020204" pitchFamily="34" charset="0"/>
+              <a:buChar char="o"/>
+            </a:pPr>
+            <a:r>
+              <a:rPr lang="en-US">
+                <a:ea typeface="+mn-lt"/>
+                <a:cs typeface="+mn-lt"/>
+              </a:rPr>
+              <a:t>Seek alternative data sources </a:t>
+            </a:r>
+            <a:endParaRPr lang="en-US"/>
+          </a:p>
+          <a:p>
+            <a:pPr lvl="1">
+              <a:buFont typeface="Courier New" panose="020B0604020202020204" pitchFamily="34" charset="0"/>
+              <a:buChar char="o"/>
+            </a:pPr>
+            <a:r>
+              <a:rPr lang="en-US">
+                <a:ea typeface="+mn-lt"/>
+                <a:cs typeface="+mn-lt"/>
+              </a:rPr>
+              <a:t>Collect new measurements </a:t>
+            </a:r>
+            <a:endParaRPr lang="en-US"/>
+          </a:p>
+          <a:p>
+            <a:pPr lvl="1">
+              <a:buFont typeface="Courier New" panose="020B0604020202020204" pitchFamily="34" charset="0"/>
+              <a:buChar char="o"/>
+            </a:pPr>
+            <a:r>
+              <a:rPr lang="en-US">
+                <a:ea typeface="+mn-lt"/>
+                <a:cs typeface="+mn-lt"/>
+              </a:rPr>
+              <a:t>Develop proxies for qualities that are difficult to observe </a:t>
+            </a:r>
+            <a:endParaRPr lang="en-US"/>
+          </a:p>
+          <a:p>
+            <a:pPr lvl="1">
+              <a:buFont typeface="Courier New" panose="020B0604020202020204" pitchFamily="34" charset="0"/>
+              <a:buChar char="o"/>
+            </a:pPr>
+            <a:r>
+              <a:rPr lang="en-US">
+                <a:ea typeface="+mn-lt"/>
+                <a:cs typeface="+mn-lt"/>
+              </a:rPr>
+              <a:t>Adjust performance for competition and opportunity </a:t>
+            </a:r>
+            <a:endParaRPr lang="en-US"/>
+          </a:p>
+          <a:p>
+            <a:pPr lvl="1">
+              <a:buFont typeface="Courier New" panose="020B0604020202020204" pitchFamily="34" charset="0"/>
+              <a:buChar char="o"/>
+            </a:pPr>
+            <a:r>
+              <a:rPr lang="en-US">
+                <a:ea typeface="+mn-lt"/>
+                <a:cs typeface="+mn-lt"/>
+              </a:rPr>
+              <a:t>Examine athletes outside established recruiting pipelines </a:t>
+            </a:r>
+            <a:endParaRPr lang="en-US"/>
+          </a:p>
+          <a:p>
+            <a:pPr lvl="1">
+              <a:buFont typeface="Courier New" panose="020B0604020202020204" pitchFamily="34" charset="0"/>
+              <a:buChar char="o"/>
+            </a:pPr>
+            <a:r>
+              <a:rPr lang="en-US">
+                <a:ea typeface="+mn-lt"/>
+                <a:cs typeface="+mn-lt"/>
+              </a:rPr>
+              <a:t>Combine quantitative evidence with scouting context </a:t>
+            </a:r>
+            <a:endParaRPr lang="en-US"/>
+          </a:p>
+          <a:p>
+            <a:pPr lvl="1">
+              <a:buFont typeface="Courier New" panose="020B0604020202020204" pitchFamily="34" charset="0"/>
+              <a:buChar char="o"/>
+            </a:pPr>
+            <a:endParaRPr lang="en-US">
+              <a:ea typeface="+mn-lt"/>
+              <a:cs typeface="+mn-lt"/>
+            </a:endParaRPr>
+          </a:p>
+          <a:p>
+            <a:r>
+              <a:rPr lang="en-US">
+                <a:ea typeface="+mn-lt"/>
+                <a:cs typeface="+mn-lt"/>
+              </a:rPr>
+              <a:t>The goal is not to force an answer from inadequate data. It is to find a better way to investigate the original question.</a:t>
+            </a:r>
+            <a:endParaRPr lang="en-US"/>
+          </a:p>
+          <a:p>
             <a:endParaRPr lang="en-US"/>
           </a:p>
         </p:txBody>
@@ -7530,7 +8203,222 @@
     </p:spTree>
     <p:extLst>
       <p:ext uri="{BB962C8B-B14F-4D97-AF65-F5344CB8AC3E}">
-        <p14:creationId xmlns:p14="http://schemas.microsoft.com/office/powerpoint/2010/main" val="806632781"/>
+        <p14:creationId xmlns:p14="http://schemas.microsoft.com/office/powerpoint/2010/main" val="2381630488"/>
+      </p:ext>
+    </p:extLst>
+  </p:cSld>
+  <p:clrMapOvr>
+    <a:masterClrMapping/>
+  </p:clrMapOvr>
+</p:sld>
+</file>
+
+<file path=ppt/slides/slide29.xml><?xml version="1.0" encoding="utf-8"?>
+<p:sld xmlns:a="http://schemas.openxmlformats.org/drawingml/2006/main" xmlns:r="http://schemas.openxmlformats.org/officeDocument/2006/relationships" xmlns:p="http://schemas.openxmlformats.org/presentationml/2006/main">
+  <p:cSld>
+    <p:spTree>
+      <p:nvGrpSpPr>
+        <p:cNvPr id="1" name=""/>
+        <p:cNvGrpSpPr/>
+        <p:nvPr/>
+      </p:nvGrpSpPr>
+      <p:grpSpPr>
+        <a:xfrm>
+          <a:off x="0" y="0"/>
+          <a:ext cx="0" cy="0"/>
+          <a:chOff x="0" y="0"/>
+          <a:chExt cx="0" cy="0"/>
+        </a:xfrm>
+      </p:grpSpPr>
+      <p:sp>
+        <p:nvSpPr>
+          <p:cNvPr id="2" name="Title 1">
+            <a:extLst>
+              <a:ext uri="{FF2B5EF4-FFF2-40B4-BE49-F238E27FC236}">
+                <a16:creationId xmlns:a16="http://schemas.microsoft.com/office/drawing/2014/main" id="{519443A2-C56F-F6DF-D387-0E48376C5816}"/>
+              </a:ext>
+            </a:extLst>
+          </p:cNvPr>
+          <p:cNvSpPr>
+            <a:spLocks noGrp="1"/>
+          </p:cNvSpPr>
+          <p:nvPr>
+            <p:ph type="title"/>
+          </p:nvPr>
+        </p:nvSpPr>
+        <p:spPr/>
+        <p:txBody>
+          <a:bodyPr/>
+          <a:lstStyle/>
+          <a:p>
+            <a:r>
+              <a:rPr lang="en-US"/>
+              <a:t>Pursuing the harder question</a:t>
+            </a:r>
+          </a:p>
+        </p:txBody>
+      </p:sp>
+      <p:sp>
+        <p:nvSpPr>
+          <p:cNvPr id="3" name="Content Placeholder 2">
+            <a:extLst>
+              <a:ext uri="{FF2B5EF4-FFF2-40B4-BE49-F238E27FC236}">
+                <a16:creationId xmlns:a16="http://schemas.microsoft.com/office/drawing/2014/main" id="{B4660DEF-0C6D-4352-D4C1-3F9EDC657A6D}"/>
+              </a:ext>
+            </a:extLst>
+          </p:cNvPr>
+          <p:cNvSpPr>
+            <a:spLocks noGrp="1"/>
+          </p:cNvSpPr>
+          <p:nvPr>
+            <p:ph idx="1"/>
+          </p:nvPr>
+        </p:nvSpPr>
+        <p:spPr/>
+        <p:txBody>
+          <a:bodyPr vert="horz" lIns="91440" tIns="45720" rIns="91440" bIns="45720" rtlCol="0" anchor="t">
+            <a:normAutofit/>
+          </a:bodyPr>
+          <a:lstStyle/>
+          <a:p>
+            <a:r>
+              <a:rPr lang="en-US">
+                <a:ea typeface="+mn-lt"/>
+                <a:cs typeface="+mn-lt"/>
+              </a:rPr>
+              <a:t>Overlooked athletes may be:</a:t>
+            </a:r>
+          </a:p>
+          <a:p>
+            <a:pPr lvl="1">
+              <a:buFont typeface="Courier New" panose="020B0604020202020204" pitchFamily="34" charset="0"/>
+              <a:buChar char="o"/>
+            </a:pPr>
+            <a:r>
+              <a:rPr lang="en-US">
+                <a:ea typeface="+mn-lt"/>
+                <a:cs typeface="+mn-lt"/>
+              </a:rPr>
+              <a:t>Less expensive to recruit or acquire </a:t>
+            </a:r>
+          </a:p>
+          <a:p>
+            <a:pPr lvl="1">
+              <a:buFont typeface="Courier New" panose="020B0604020202020204" pitchFamily="34" charset="0"/>
+              <a:buChar char="o"/>
+            </a:pPr>
+            <a:r>
+              <a:rPr lang="en-US">
+                <a:ea typeface="+mn-lt"/>
+                <a:cs typeface="+mn-lt"/>
+              </a:rPr>
+              <a:t>Undervalued by competitors </a:t>
+            </a:r>
+          </a:p>
+          <a:p>
+            <a:pPr lvl="1">
+              <a:buFont typeface="Courier New" panose="020B0604020202020204" pitchFamily="34" charset="0"/>
+              <a:buChar char="o"/>
+            </a:pPr>
+            <a:r>
+              <a:rPr lang="en-US">
+                <a:ea typeface="+mn-lt"/>
+                <a:cs typeface="+mn-lt"/>
+              </a:rPr>
+              <a:t>Available later in a draft or recruiting process </a:t>
+            </a:r>
+          </a:p>
+          <a:p>
+            <a:pPr lvl="1">
+              <a:buFont typeface="Courier New" panose="020B0604020202020204" pitchFamily="34" charset="0"/>
+              <a:buChar char="o"/>
+            </a:pPr>
+            <a:r>
+              <a:rPr lang="en-US">
+                <a:ea typeface="+mn-lt"/>
+                <a:cs typeface="+mn-lt"/>
+              </a:rPr>
+              <a:t>Better than their conventional statistics suggest </a:t>
+            </a:r>
+          </a:p>
+          <a:p>
+            <a:pPr lvl="1">
+              <a:buFont typeface="Courier New" panose="020B0604020202020204" pitchFamily="34" charset="0"/>
+              <a:buChar char="o"/>
+            </a:pPr>
+            <a:endParaRPr lang="en-US">
+              <a:ea typeface="+mn-lt"/>
+              <a:cs typeface="+mn-lt"/>
+            </a:endParaRPr>
+          </a:p>
+          <a:p>
+            <a:r>
+              <a:rPr lang="en-US">
+                <a:ea typeface="+mn-lt"/>
+                <a:cs typeface="+mn-lt"/>
+              </a:rPr>
+              <a:t>If every organization uses the same convenient data, they will tend to identify the same athletes.</a:t>
+            </a:r>
+          </a:p>
+          <a:p>
+            <a:endParaRPr lang="en-US"/>
+          </a:p>
+        </p:txBody>
+      </p:sp>
+      <p:sp>
+        <p:nvSpPr>
+          <p:cNvPr id="4" name="TextBox 3">
+            <a:extLst>
+              <a:ext uri="{FF2B5EF4-FFF2-40B4-BE49-F238E27FC236}">
+                <a16:creationId xmlns:a16="http://schemas.microsoft.com/office/drawing/2014/main" id="{ADEF0CF4-9F0B-9BCC-D6D4-49A532E4AD93}"/>
+              </a:ext>
+            </a:extLst>
+          </p:cNvPr>
+          <p:cNvSpPr txBox="1"/>
+          <p:nvPr/>
+        </p:nvSpPr>
+        <p:spPr>
+          <a:xfrm>
+            <a:off x="836840" y="5191125"/>
+            <a:ext cx="10518320" cy="646331"/>
+          </a:xfrm>
+          <a:prstGeom prst="rect">
+            <a:avLst/>
+          </a:prstGeom>
+          <a:noFill/>
+        </p:spPr>
+        <p:txBody>
+          <a:bodyPr rot="0" spcFirstLastPara="0" vertOverflow="overflow" horzOverflow="overflow" vert="horz" wrap="square" lIns="91440" tIns="45720" rIns="91440" bIns="45720" numCol="1" spcCol="0" rtlCol="0" fromWordArt="0" anchor="t" anchorCtr="0" forceAA="0" compatLnSpc="1">
+            <a:prstTxWarp prst="textNoShape">
+              <a:avLst/>
+            </a:prstTxWarp>
+            <a:spAutoFit/>
+          </a:bodyPr>
+          <a:lstStyle/>
+          <a:p>
+            <a:pPr algn="ctr"/>
+            <a:r>
+              <a:rPr lang="en-US">
+                <a:solidFill>
+                  <a:srgbClr val="FF0000"/>
+                </a:solidFill>
+                <a:ea typeface="+mn-lt"/>
+                <a:cs typeface="+mn-lt"/>
+              </a:rPr>
+              <a:t>Competitive advantage often comes from answering an important question that others abandoned because the necessary data were difficult to obtain.</a:t>
+            </a:r>
+            <a:endParaRPr lang="en-US">
+              <a:solidFill>
+                <a:srgbClr val="FF0000"/>
+              </a:solidFill>
+            </a:endParaRPr>
+          </a:p>
+        </p:txBody>
+      </p:sp>
+    </p:spTree>
+    <p:extLst>
+      <p:ext uri="{BB962C8B-B14F-4D97-AF65-F5344CB8AC3E}">
+        <p14:creationId xmlns:p14="http://schemas.microsoft.com/office/powerpoint/2010/main" val="1486169029"/>
       </p:ext>
     </p:extLst>
   </p:cSld>
@@ -7581,7 +8469,7 @@
           <a:lstStyle/>
           <a:p>
             <a:r>
-              <a:rPr lang="en-US" dirty="0"/>
+              <a:rPr lang="en-US"/>
               <a:t>Illusion of precision</a:t>
             </a:r>
           </a:p>
@@ -7609,21 +8497,21 @@
           <a:lstStyle/>
           <a:p>
             <a:r>
-              <a:rPr lang="en-US" dirty="0"/>
+              <a:rPr lang="en-US"/>
               <a:t>Media framing implies that GPS vests, force plates, and optical tracking systems give us an infallible, objective window into an athlete's soul and body.</a:t>
             </a:r>
           </a:p>
           <a:p>
-            <a:endParaRPr lang="en-US" dirty="0"/>
-          </a:p>
-          <a:p>
-            <a:r>
-              <a:rPr lang="en-US" dirty="0"/>
+            <a:endParaRPr lang="en-US"/>
+          </a:p>
+          <a:p>
+            <a:r>
+              <a:rPr lang="en-US"/>
               <a:t>systems may produce numbers with multiple decimal places, but precision does not guarantee accuracy.</a:t>
             </a:r>
           </a:p>
           <a:p>
-            <a:endParaRPr lang="en-US" dirty="0"/>
+            <a:endParaRPr lang="en-US"/>
           </a:p>
         </p:txBody>
       </p:sp>
@@ -7631,6 +8519,1810 @@
     <p:extLst>
       <p:ext uri="{BB962C8B-B14F-4D97-AF65-F5344CB8AC3E}">
         <p14:creationId xmlns:p14="http://schemas.microsoft.com/office/powerpoint/2010/main" val="3276002507"/>
+      </p:ext>
+    </p:extLst>
+  </p:cSld>
+  <p:clrMapOvr>
+    <a:masterClrMapping/>
+  </p:clrMapOvr>
+</p:sld>
+</file>
+
+<file path=ppt/slides/slide30.xml><?xml version="1.0" encoding="utf-8"?>
+<p:sld xmlns:a="http://schemas.openxmlformats.org/drawingml/2006/main" xmlns:r="http://schemas.openxmlformats.org/officeDocument/2006/relationships" xmlns:p="http://schemas.openxmlformats.org/presentationml/2006/main">
+  <p:cSld>
+    <p:spTree>
+      <p:nvGrpSpPr>
+        <p:cNvPr id="1" name=""/>
+        <p:cNvGrpSpPr/>
+        <p:nvPr/>
+      </p:nvGrpSpPr>
+      <p:grpSpPr>
+        <a:xfrm>
+          <a:off x="0" y="0"/>
+          <a:ext cx="0" cy="0"/>
+          <a:chOff x="0" y="0"/>
+          <a:chExt cx="0" cy="0"/>
+        </a:xfrm>
+      </p:grpSpPr>
+      <p:sp>
+        <p:nvSpPr>
+          <p:cNvPr id="2" name="Title 1">
+            <a:extLst>
+              <a:ext uri="{FF2B5EF4-FFF2-40B4-BE49-F238E27FC236}">
+                <a16:creationId xmlns:a16="http://schemas.microsoft.com/office/drawing/2014/main" id="{79865F0B-0A66-FF8B-3F5C-3BDD7AF304A8}"/>
+              </a:ext>
+            </a:extLst>
+          </p:cNvPr>
+          <p:cNvSpPr>
+            <a:spLocks noGrp="1"/>
+          </p:cNvSpPr>
+          <p:nvPr>
+            <p:ph type="title"/>
+          </p:nvPr>
+        </p:nvSpPr>
+        <p:spPr/>
+        <p:txBody>
+          <a:bodyPr/>
+          <a:lstStyle/>
+          <a:p>
+            <a:r>
+              <a:rPr lang="en-US"/>
+              <a:t>Streetlight effect - revisited</a:t>
+            </a:r>
+          </a:p>
+        </p:txBody>
+      </p:sp>
+      <p:sp>
+        <p:nvSpPr>
+          <p:cNvPr id="3" name="Content Placeholder 2">
+            <a:extLst>
+              <a:ext uri="{FF2B5EF4-FFF2-40B4-BE49-F238E27FC236}">
+                <a16:creationId xmlns:a16="http://schemas.microsoft.com/office/drawing/2014/main" id="{44203125-B9A9-9921-B918-608635B0F058}"/>
+              </a:ext>
+            </a:extLst>
+          </p:cNvPr>
+          <p:cNvSpPr>
+            <a:spLocks noGrp="1"/>
+          </p:cNvSpPr>
+          <p:nvPr>
+            <p:ph idx="1"/>
+          </p:nvPr>
+        </p:nvSpPr>
+        <p:spPr/>
+        <p:txBody>
+          <a:bodyPr vert="horz" lIns="91440" tIns="45720" rIns="91440" bIns="45720" rtlCol="0" anchor="t">
+            <a:normAutofit/>
+          </a:bodyPr>
+          <a:lstStyle/>
+          <a:p>
+            <a:r>
+              <a:rPr lang="en-US">
+                <a:ea typeface="+mn-lt"/>
+                <a:cs typeface="+mn-lt"/>
+              </a:rPr>
+              <a:t>The poorly illuminated area may contain the greatest competitive advantage.</a:t>
+            </a:r>
+          </a:p>
+          <a:p>
+            <a:r>
+              <a:rPr lang="en-US"/>
+              <a:t>Response to limited data:</a:t>
+            </a:r>
+          </a:p>
+        </p:txBody>
+      </p:sp>
+      <p:graphicFrame>
+        <p:nvGraphicFramePr>
+          <p:cNvPr id="5" name="Table 4">
+            <a:extLst>
+              <a:ext uri="{FF2B5EF4-FFF2-40B4-BE49-F238E27FC236}">
+                <a16:creationId xmlns:a16="http://schemas.microsoft.com/office/drawing/2014/main" id="{0EB1E87E-8339-EF70-96ED-F69529683223}"/>
+              </a:ext>
+            </a:extLst>
+          </p:cNvPr>
+          <p:cNvGraphicFramePr>
+            <a:graphicFrameLocks noGrp="1"/>
+          </p:cNvGraphicFramePr>
+          <p:nvPr>
+            <p:extLst>
+              <p:ext uri="{D42A27DB-BD31-4B8C-83A1-F6EECF244321}">
+                <p14:modId xmlns:p14="http://schemas.microsoft.com/office/powerpoint/2010/main" val="2300597641"/>
+              </p:ext>
+            </p:extLst>
+          </p:nvPr>
+        </p:nvGraphicFramePr>
+        <p:xfrm>
+          <a:off x="2580105" y="3048000"/>
+          <a:ext cx="7036346" cy="2377440"/>
+        </p:xfrm>
+        <a:graphic>
+          <a:graphicData uri="http://schemas.openxmlformats.org/drawingml/2006/table">
+            <a:tbl>
+              <a:tblPr firstRow="1" bandRow="1">
+                <a:tableStyleId>{5C22544A-7EE6-4342-B048-85BDC9FD1C3A}</a:tableStyleId>
+              </a:tblPr>
+              <a:tblGrid>
+                <a:gridCol w="3518173">
+                  <a:extLst>
+                    <a:ext uri="{9D8B030D-6E8A-4147-A177-3AD203B41FA5}">
+                      <a16:colId xmlns:a16="http://schemas.microsoft.com/office/drawing/2014/main" val="1050926683"/>
+                    </a:ext>
+                  </a:extLst>
+                </a:gridCol>
+                <a:gridCol w="3518173">
+                  <a:extLst>
+                    <a:ext uri="{9D8B030D-6E8A-4147-A177-3AD203B41FA5}">
+                      <a16:colId xmlns:a16="http://schemas.microsoft.com/office/drawing/2014/main" val="3941890480"/>
+                    </a:ext>
+                  </a:extLst>
+                </a:gridCol>
+              </a:tblGrid>
+              <a:tr h="0">
+                <a:tc>
+                  <a:txBody>
+                    <a:bodyPr/>
+                    <a:lstStyle/>
+                    <a:p>
+                      <a:pPr>
+                        <a:buNone/>
+                      </a:pPr>
+                      <a:r>
+                        <a:rPr lang="en-US"/>
+                        <a:t>Streetlight response</a:t>
+                      </a:r>
+                    </a:p>
+                  </a:txBody>
+                  <a:tcPr anchor="ctr"/>
+                </a:tc>
+                <a:tc>
+                  <a:txBody>
+                    <a:bodyPr/>
+                    <a:lstStyle/>
+                    <a:p>
+                      <a:pPr lvl="0">
+                        <a:buNone/>
+                      </a:pPr>
+                      <a:r>
+                        <a:rPr lang="en-US"/>
+                        <a:t>Appropriate response </a:t>
+                      </a:r>
+                    </a:p>
+                  </a:txBody>
+                  <a:tcPr anchor="ctr"/>
+                </a:tc>
+                <a:extLst>
+                  <a:ext uri="{0D108BD9-81ED-4DB2-BD59-A6C34878D82A}">
+                    <a16:rowId xmlns:a16="http://schemas.microsoft.com/office/drawing/2014/main" val="265347740"/>
+                  </a:ext>
+                </a:extLst>
+              </a:tr>
+              <a:tr h="0">
+                <a:tc>
+                  <a:txBody>
+                    <a:bodyPr/>
+                    <a:lstStyle/>
+                    <a:p>
+                      <a:pPr>
+                        <a:buNone/>
+                      </a:pPr>
+                      <a:r>
+                        <a:rPr lang="en-US"/>
+                        <a:t>Replace it with what the dataset can easily answer</a:t>
+                      </a:r>
+                    </a:p>
+                  </a:txBody>
+                  <a:tcPr anchor="ctr"/>
+                </a:tc>
+                <a:tc>
+                  <a:txBody>
+                    <a:bodyPr/>
+                    <a:lstStyle/>
+                    <a:p>
+                      <a:pPr lvl="0">
+                        <a:buNone/>
+                      </a:pPr>
+                      <a:r>
+                        <a:rPr lang="en-US"/>
+                        <a:t>Preserve the purpose of the question</a:t>
+                      </a:r>
+                    </a:p>
+                  </a:txBody>
+                  <a:tcPr anchor="ctr"/>
+                </a:tc>
+                <a:extLst>
+                  <a:ext uri="{0D108BD9-81ED-4DB2-BD59-A6C34878D82A}">
+                    <a16:rowId xmlns:a16="http://schemas.microsoft.com/office/drawing/2014/main" val="3399097239"/>
+                  </a:ext>
+                </a:extLst>
+              </a:tr>
+              <a:tr h="0">
+                <a:tc>
+                  <a:txBody>
+                    <a:bodyPr/>
+                    <a:lstStyle/>
+                    <a:p>
+                      <a:pPr>
+                        <a:buNone/>
+                      </a:pPr>
+                      <a:r>
+                        <a:rPr lang="en-US"/>
+                        <a:t>Analyze only familiar variables</a:t>
+                      </a:r>
+                    </a:p>
+                  </a:txBody>
+                  <a:tcPr anchor="ctr"/>
+                </a:tc>
+                <a:tc>
+                  <a:txBody>
+                    <a:bodyPr/>
+                    <a:lstStyle/>
+                    <a:p>
+                      <a:pPr lvl="0">
+                        <a:buNone/>
+                      </a:pPr>
+                      <a:r>
+                        <a:rPr lang="en-US"/>
+                        <a:t>Seek new data or useful proxies</a:t>
+                      </a:r>
+                    </a:p>
+                  </a:txBody>
+                  <a:tcPr anchor="ctr"/>
+                </a:tc>
+                <a:extLst>
+                  <a:ext uri="{0D108BD9-81ED-4DB2-BD59-A6C34878D82A}">
+                    <a16:rowId xmlns:a16="http://schemas.microsoft.com/office/drawing/2014/main" val="1469828312"/>
+                  </a:ext>
+                </a:extLst>
+              </a:tr>
+              <a:tr h="0">
+                <a:tc>
+                  <a:txBody>
+                    <a:bodyPr/>
+                    <a:lstStyle/>
+                    <a:p>
+                      <a:pPr>
+                        <a:buNone/>
+                      </a:pPr>
+                      <a:r>
+                        <a:rPr lang="en-US"/>
+                        <a:t>Overstate what available data establish</a:t>
+                      </a:r>
+                    </a:p>
+                  </a:txBody>
+                  <a:tcPr anchor="ctr"/>
+                </a:tc>
+                <a:tc>
+                  <a:txBody>
+                    <a:bodyPr/>
+                    <a:lstStyle/>
+                    <a:p>
+                      <a:pPr lvl="0">
+                        <a:buNone/>
+                      </a:pPr>
+                      <a:r>
+                        <a:rPr lang="en-US"/>
+                        <a:t>State uncertainty and limitations</a:t>
+                      </a:r>
+                    </a:p>
+                  </a:txBody>
+                  <a:tcPr anchor="ctr"/>
+                </a:tc>
+                <a:extLst>
+                  <a:ext uri="{0D108BD9-81ED-4DB2-BD59-A6C34878D82A}">
+                    <a16:rowId xmlns:a16="http://schemas.microsoft.com/office/drawing/2014/main" val="3555200676"/>
+                  </a:ext>
+                </a:extLst>
+              </a:tr>
+              <a:tr h="0">
+                <a:tc>
+                  <a:txBody>
+                    <a:bodyPr/>
+                    <a:lstStyle/>
+                    <a:p>
+                      <a:pPr>
+                        <a:buNone/>
+                      </a:pPr>
+                      <a:r>
+                        <a:rPr lang="en-US"/>
+                        <a:t>Reproduce existing rankings</a:t>
+                      </a:r>
+                    </a:p>
+                  </a:txBody>
+                  <a:tcPr anchor="ctr"/>
+                </a:tc>
+                <a:tc>
+                  <a:txBody>
+                    <a:bodyPr/>
+                    <a:lstStyle/>
+                    <a:p>
+                      <a:pPr lvl="0">
+                        <a:buNone/>
+                      </a:pPr>
+                      <a:r>
+                        <a:rPr lang="en-US"/>
+                        <a:t>Investigate overlooked athletes</a:t>
+                      </a:r>
+                    </a:p>
+                  </a:txBody>
+                  <a:tcPr anchor="ctr"/>
+                </a:tc>
+                <a:extLst>
+                  <a:ext uri="{0D108BD9-81ED-4DB2-BD59-A6C34878D82A}">
+                    <a16:rowId xmlns:a16="http://schemas.microsoft.com/office/drawing/2014/main" val="2250576451"/>
+                  </a:ext>
+                </a:extLst>
+              </a:tr>
+            </a:tbl>
+          </a:graphicData>
+        </a:graphic>
+      </p:graphicFrame>
+    </p:spTree>
+    <p:extLst>
+      <p:ext uri="{BB962C8B-B14F-4D97-AF65-F5344CB8AC3E}">
+        <p14:creationId xmlns:p14="http://schemas.microsoft.com/office/powerpoint/2010/main" val="2995797760"/>
+      </p:ext>
+    </p:extLst>
+  </p:cSld>
+  <p:clrMapOvr>
+    <a:masterClrMapping/>
+  </p:clrMapOvr>
+</p:sld>
+</file>
+
+<file path=ppt/slides/slide31.xml><?xml version="1.0" encoding="utf-8"?>
+<p:sld xmlns:a="http://schemas.openxmlformats.org/drawingml/2006/main" xmlns:r="http://schemas.openxmlformats.org/officeDocument/2006/relationships" xmlns:p="http://schemas.openxmlformats.org/presentationml/2006/main">
+  <p:cSld>
+    <p:spTree>
+      <p:nvGrpSpPr>
+        <p:cNvPr id="1" name=""/>
+        <p:cNvGrpSpPr/>
+        <p:nvPr/>
+      </p:nvGrpSpPr>
+      <p:grpSpPr>
+        <a:xfrm>
+          <a:off x="0" y="0"/>
+          <a:ext cx="0" cy="0"/>
+          <a:chOff x="0" y="0"/>
+          <a:chExt cx="0" cy="0"/>
+        </a:xfrm>
+      </p:grpSpPr>
+      <p:sp>
+        <p:nvSpPr>
+          <p:cNvPr id="2" name="Title 1">
+            <a:extLst>
+              <a:ext uri="{FF2B5EF4-FFF2-40B4-BE49-F238E27FC236}">
+                <a16:creationId xmlns:a16="http://schemas.microsoft.com/office/drawing/2014/main" id="{9495A1D2-6E10-ED30-6584-C8F893146855}"/>
+              </a:ext>
+            </a:extLst>
+          </p:cNvPr>
+          <p:cNvSpPr>
+            <a:spLocks noGrp="1"/>
+          </p:cNvSpPr>
+          <p:nvPr>
+            <p:ph type="title"/>
+          </p:nvPr>
+        </p:nvSpPr>
+        <p:spPr/>
+        <p:txBody>
+          <a:bodyPr>
+            <a:normAutofit/>
+          </a:bodyPr>
+          <a:lstStyle/>
+          <a:p>
+            <a:r>
+              <a:rPr lang="en-US"/>
+              <a:t>Protect your analysis from bad data</a:t>
+            </a:r>
+          </a:p>
+        </p:txBody>
+      </p:sp>
+      <p:sp>
+        <p:nvSpPr>
+          <p:cNvPr id="3" name="Content Placeholder 2">
+            <a:extLst>
+              <a:ext uri="{FF2B5EF4-FFF2-40B4-BE49-F238E27FC236}">
+                <a16:creationId xmlns:a16="http://schemas.microsoft.com/office/drawing/2014/main" id="{51729538-923D-458B-77DC-2E172E5670ED}"/>
+              </a:ext>
+            </a:extLst>
+          </p:cNvPr>
+          <p:cNvSpPr>
+            <a:spLocks noGrp="1"/>
+          </p:cNvSpPr>
+          <p:nvPr>
+            <p:ph idx="1"/>
+          </p:nvPr>
+        </p:nvSpPr>
+        <p:spPr/>
+        <p:txBody>
+          <a:bodyPr vert="horz" lIns="91440" tIns="45720" rIns="91440" bIns="45720" rtlCol="0" anchor="t">
+            <a:normAutofit/>
+          </a:bodyPr>
+          <a:lstStyle/>
+          <a:p>
+            <a:r>
+              <a:rPr lang="en-US">
+                <a:ea typeface="+mn-lt"/>
+                <a:cs typeface="+mn-lt"/>
+              </a:rPr>
+              <a:t>Before analyzing a dataset, ask:</a:t>
+            </a:r>
+            <a:endParaRPr lang="en-US"/>
+          </a:p>
+          <a:p>
+            <a:pPr lvl="1"/>
+            <a:r>
+              <a:rPr lang="en-US">
+                <a:ea typeface="+mn-lt"/>
+                <a:cs typeface="+mn-lt"/>
+              </a:rPr>
+              <a:t>Who collected the data, and why?</a:t>
+            </a:r>
+          </a:p>
+          <a:p>
+            <a:pPr lvl="1"/>
+            <a:r>
+              <a:rPr lang="en-US">
+                <a:ea typeface="+mn-lt"/>
+                <a:cs typeface="+mn-lt"/>
+              </a:rPr>
+              <a:t>What technology or method was used?</a:t>
+            </a:r>
+          </a:p>
+          <a:p>
+            <a:pPr lvl="1"/>
+            <a:r>
+              <a:rPr lang="en-US">
+                <a:ea typeface="+mn-lt"/>
+                <a:cs typeface="+mn-lt"/>
+              </a:rPr>
+              <a:t>Has that method been validated for this setting?</a:t>
+            </a:r>
+          </a:p>
+          <a:p>
+            <a:pPr lvl="1"/>
+            <a:r>
+              <a:rPr lang="en-US">
+                <a:ea typeface="+mn-lt"/>
+                <a:cs typeface="+mn-lt"/>
+              </a:rPr>
+              <a:t>Was the methodology consistent across athletes and over time?</a:t>
+            </a:r>
+          </a:p>
+          <a:p>
+            <a:pPr lvl="1"/>
+            <a:r>
+              <a:rPr lang="en-US">
+                <a:ea typeface="+mn-lt"/>
+                <a:cs typeface="+mn-lt"/>
+              </a:rPr>
+              <a:t>What values are missing?</a:t>
+            </a:r>
+            <a:endParaRPr lang="en-US"/>
+          </a:p>
+          <a:p>
+            <a:pPr lvl="1"/>
+            <a:r>
+              <a:rPr lang="en-US">
+                <a:ea typeface="+mn-lt"/>
+                <a:cs typeface="+mn-lt"/>
+              </a:rPr>
+              <a:t>Who or what is not represented?</a:t>
+            </a:r>
+            <a:endParaRPr lang="en-US"/>
+          </a:p>
+          <a:p>
+            <a:pPr lvl="1"/>
+            <a:r>
+              <a:rPr lang="en-US">
+                <a:ea typeface="+mn-lt"/>
+                <a:cs typeface="+mn-lt"/>
+              </a:rPr>
+              <a:t>What decisions could be affected by the analysis?</a:t>
+            </a:r>
+          </a:p>
+          <a:p>
+            <a:pPr lvl="1"/>
+            <a:r>
+              <a:rPr lang="en-US">
+                <a:ea typeface="+mn-lt"/>
+                <a:cs typeface="+mn-lt"/>
+              </a:rPr>
+              <a:t>What can the data not establish?</a:t>
+            </a:r>
+            <a:endParaRPr lang="en-US"/>
+          </a:p>
+          <a:p>
+            <a:pPr lvl="1"/>
+            <a:endParaRPr lang="en-US"/>
+          </a:p>
+        </p:txBody>
+      </p:sp>
+      <p:sp>
+        <p:nvSpPr>
+          <p:cNvPr id="4" name="Slide Number Placeholder 3">
+            <a:extLst>
+              <a:ext uri="{FF2B5EF4-FFF2-40B4-BE49-F238E27FC236}">
+                <a16:creationId xmlns:a16="http://schemas.microsoft.com/office/drawing/2014/main" id="{BC9D84DC-1007-4E28-B03C-026232E22A68}"/>
+              </a:ext>
+            </a:extLst>
+          </p:cNvPr>
+          <p:cNvSpPr>
+            <a:spLocks noGrp="1"/>
+          </p:cNvSpPr>
+          <p:nvPr>
+            <p:ph type="sldNum" sz="quarter" idx="12"/>
+          </p:nvPr>
+        </p:nvSpPr>
+        <p:spPr/>
+        <p:txBody>
+          <a:bodyPr/>
+          <a:lstStyle/>
+          <a:p>
+            <a:fld id="{45C00377-489B-40EC-B059-26BDDD2E89B9}" type="slidenum">
+              <a:rPr lang="en-US" smtClean="0"/>
+              <a:pPr/>
+              <a:t>31</a:t>
+            </a:fld>
+            <a:endParaRPr lang="en-US"/>
+          </a:p>
+        </p:txBody>
+      </p:sp>
+    </p:spTree>
+    <p:extLst>
+      <p:ext uri="{BB962C8B-B14F-4D97-AF65-F5344CB8AC3E}">
+        <p14:creationId xmlns:p14="http://schemas.microsoft.com/office/powerpoint/2010/main" val="404022894"/>
+      </p:ext>
+    </p:extLst>
+  </p:cSld>
+  <p:clrMapOvr>
+    <a:masterClrMapping/>
+  </p:clrMapOvr>
+</p:sld>
+</file>
+
+<file path=ppt/slides/slide32.xml><?xml version="1.0" encoding="utf-8"?>
+<p:sld xmlns:a="http://schemas.openxmlformats.org/drawingml/2006/main" xmlns:r="http://schemas.openxmlformats.org/officeDocument/2006/relationships" xmlns:p="http://schemas.openxmlformats.org/presentationml/2006/main">
+  <p:cSld>
+    <p:spTree>
+      <p:nvGrpSpPr>
+        <p:cNvPr id="1" name=""/>
+        <p:cNvGrpSpPr/>
+        <p:nvPr/>
+      </p:nvGrpSpPr>
+      <p:grpSpPr>
+        <a:xfrm>
+          <a:off x="0" y="0"/>
+          <a:ext cx="0" cy="0"/>
+          <a:chOff x="0" y="0"/>
+          <a:chExt cx="0" cy="0"/>
+        </a:xfrm>
+      </p:grpSpPr>
+      <p:sp>
+        <p:nvSpPr>
+          <p:cNvPr id="2" name="Title 1">
+            <a:extLst>
+              <a:ext uri="{FF2B5EF4-FFF2-40B4-BE49-F238E27FC236}">
+                <a16:creationId xmlns:a16="http://schemas.microsoft.com/office/drawing/2014/main" id="{9B3B2596-FD5F-03B2-820D-4B9F36FB3D0A}"/>
+              </a:ext>
+            </a:extLst>
+          </p:cNvPr>
+          <p:cNvSpPr>
+            <a:spLocks noGrp="1"/>
+          </p:cNvSpPr>
+          <p:nvPr>
+            <p:ph type="title"/>
+          </p:nvPr>
+        </p:nvSpPr>
+        <p:spPr/>
+        <p:txBody>
+          <a:bodyPr>
+            <a:normAutofit/>
+          </a:bodyPr>
+          <a:lstStyle/>
+          <a:p>
+            <a:r>
+              <a:rPr lang="en-US">
+                <a:ea typeface="+mj-lt"/>
+                <a:cs typeface="+mj-lt"/>
+              </a:rPr>
+              <a:t>Data-Quality Red Flags</a:t>
+            </a:r>
+            <a:endParaRPr lang="en-US"/>
+          </a:p>
+        </p:txBody>
+      </p:sp>
+      <p:sp>
+        <p:nvSpPr>
+          <p:cNvPr id="3" name="Content Placeholder 2">
+            <a:extLst>
+              <a:ext uri="{FF2B5EF4-FFF2-40B4-BE49-F238E27FC236}">
+                <a16:creationId xmlns:a16="http://schemas.microsoft.com/office/drawing/2014/main" id="{FAB2016C-BC61-0A1A-E451-7B3E637EF84A}"/>
+              </a:ext>
+            </a:extLst>
+          </p:cNvPr>
+          <p:cNvSpPr>
+            <a:spLocks noGrp="1"/>
+          </p:cNvSpPr>
+          <p:nvPr>
+            <p:ph idx="1"/>
+          </p:nvPr>
+        </p:nvSpPr>
+        <p:spPr/>
+        <p:txBody>
+          <a:bodyPr vert="horz" lIns="91440" tIns="45720" rIns="91440" bIns="45720" rtlCol="0" anchor="t">
+            <a:normAutofit/>
+          </a:bodyPr>
+          <a:lstStyle/>
+          <a:p>
+            <a:r>
+              <a:rPr lang="en-US">
+                <a:ea typeface="+mn-lt"/>
+                <a:cs typeface="+mn-lt"/>
+              </a:rPr>
+              <a:t>Watch for:</a:t>
+            </a:r>
+            <a:endParaRPr lang="en-US"/>
+          </a:p>
+          <a:p>
+            <a:pPr lvl="1">
+              <a:buFont typeface="Courier New" panose="020B0604020202020204" pitchFamily="34" charset="0"/>
+              <a:buChar char="o"/>
+            </a:pPr>
+            <a:r>
+              <a:rPr lang="en-US">
+                <a:ea typeface="+mn-lt"/>
+                <a:cs typeface="+mn-lt"/>
+              </a:rPr>
+              <a:t>Impossible or implausible values </a:t>
+            </a:r>
+            <a:endParaRPr lang="en-US"/>
+          </a:p>
+          <a:p>
+            <a:pPr lvl="1">
+              <a:buFont typeface="Courier New" panose="020B0604020202020204" pitchFamily="34" charset="0"/>
+              <a:buChar char="o"/>
+            </a:pPr>
+            <a:r>
+              <a:rPr lang="en-US">
+                <a:ea typeface="+mn-lt"/>
+                <a:cs typeface="+mn-lt"/>
+              </a:rPr>
+              <a:t>Sudden changes in measurement scale </a:t>
+            </a:r>
+            <a:endParaRPr lang="en-US"/>
+          </a:p>
+          <a:p>
+            <a:pPr lvl="1">
+              <a:buFont typeface="Courier New" panose="020B0604020202020204" pitchFamily="34" charset="0"/>
+              <a:buChar char="o"/>
+            </a:pPr>
+            <a:r>
+              <a:rPr lang="en-US">
+                <a:ea typeface="+mn-lt"/>
+                <a:cs typeface="+mn-lt"/>
+              </a:rPr>
+              <a:t>Duplicate observations </a:t>
+            </a:r>
+            <a:endParaRPr lang="en-US"/>
+          </a:p>
+          <a:p>
+            <a:pPr lvl="1">
+              <a:buFont typeface="Courier New" panose="020B0604020202020204" pitchFamily="34" charset="0"/>
+              <a:buChar char="o"/>
+            </a:pPr>
+            <a:r>
+              <a:rPr lang="en-US">
+                <a:ea typeface="+mn-lt"/>
+                <a:cs typeface="+mn-lt"/>
+              </a:rPr>
+              <a:t>Unexplained missing data </a:t>
+            </a:r>
+            <a:endParaRPr lang="en-US"/>
+          </a:p>
+          <a:p>
+            <a:pPr lvl="1">
+              <a:buFont typeface="Courier New" panose="020B0604020202020204" pitchFamily="34" charset="0"/>
+              <a:buChar char="o"/>
+            </a:pPr>
+            <a:r>
+              <a:rPr lang="en-US">
+                <a:ea typeface="+mn-lt"/>
+                <a:cs typeface="+mn-lt"/>
+              </a:rPr>
+              <a:t>Changes in devices or software </a:t>
+            </a:r>
+            <a:endParaRPr lang="en-US"/>
+          </a:p>
+          <a:p>
+            <a:pPr lvl="1">
+              <a:buFont typeface="Courier New" panose="020B0604020202020204" pitchFamily="34" charset="0"/>
+              <a:buChar char="o"/>
+            </a:pPr>
+            <a:r>
+              <a:rPr lang="en-US">
+                <a:ea typeface="+mn-lt"/>
+                <a:cs typeface="+mn-lt"/>
+              </a:rPr>
+              <a:t>Inconsistent testing conditions </a:t>
+            </a:r>
+            <a:endParaRPr lang="en-US"/>
+          </a:p>
+          <a:p>
+            <a:pPr lvl="1">
+              <a:buFont typeface="Courier New" panose="020B0604020202020204" pitchFamily="34" charset="0"/>
+              <a:buChar char="o"/>
+            </a:pPr>
+            <a:r>
+              <a:rPr lang="en-US">
+                <a:ea typeface="+mn-lt"/>
+                <a:cs typeface="+mn-lt"/>
+              </a:rPr>
+              <a:t>Different definitions across seasons </a:t>
+            </a:r>
+            <a:endParaRPr lang="en-US"/>
+          </a:p>
+          <a:p>
+            <a:pPr lvl="1">
+              <a:buFont typeface="Courier New" panose="020B0604020202020204" pitchFamily="34" charset="0"/>
+              <a:buChar char="o"/>
+            </a:pPr>
+            <a:r>
+              <a:rPr lang="en-US">
+                <a:ea typeface="+mn-lt"/>
+                <a:cs typeface="+mn-lt"/>
+              </a:rPr>
+              <a:t>Metrics with unclear calculations </a:t>
+            </a:r>
+            <a:endParaRPr lang="en-US"/>
+          </a:p>
+          <a:p>
+            <a:pPr lvl="1">
+              <a:buFont typeface="Courier New" panose="020B0604020202020204" pitchFamily="34" charset="0"/>
+              <a:buChar char="o"/>
+            </a:pPr>
+            <a:r>
+              <a:rPr lang="en-US">
+                <a:ea typeface="+mn-lt"/>
+                <a:cs typeface="+mn-lt"/>
+              </a:rPr>
+              <a:t>Systematic differences between groups </a:t>
+            </a:r>
+            <a:endParaRPr lang="en-US"/>
+          </a:p>
+          <a:p>
+            <a:pPr lvl="1">
+              <a:buFont typeface="Courier New" panose="020B0604020202020204" pitchFamily="34" charset="0"/>
+              <a:buChar char="o"/>
+            </a:pPr>
+            <a:r>
+              <a:rPr lang="en-US">
+                <a:ea typeface="+mn-lt"/>
+                <a:cs typeface="+mn-lt"/>
+              </a:rPr>
+              <a:t>Values that are unusually perfect</a:t>
+            </a:r>
+            <a:endParaRPr lang="en-US"/>
+          </a:p>
+          <a:p>
+            <a:endParaRPr lang="en-US"/>
+          </a:p>
+        </p:txBody>
+      </p:sp>
+    </p:spTree>
+    <p:extLst>
+      <p:ext uri="{BB962C8B-B14F-4D97-AF65-F5344CB8AC3E}">
+        <p14:creationId xmlns:p14="http://schemas.microsoft.com/office/powerpoint/2010/main" val="809028509"/>
+      </p:ext>
+    </p:extLst>
+  </p:cSld>
+  <p:clrMapOvr>
+    <a:masterClrMapping/>
+  </p:clrMapOvr>
+</p:sld>
+</file>
+
+<file path=ppt/slides/slide33.xml><?xml version="1.0" encoding="utf-8"?>
+<p:sld xmlns:a="http://schemas.openxmlformats.org/drawingml/2006/main" xmlns:r="http://schemas.openxmlformats.org/officeDocument/2006/relationships" xmlns:p="http://schemas.openxmlformats.org/presentationml/2006/main">
+  <p:cSld>
+    <p:spTree>
+      <p:nvGrpSpPr>
+        <p:cNvPr id="1" name=""/>
+        <p:cNvGrpSpPr/>
+        <p:nvPr/>
+      </p:nvGrpSpPr>
+      <p:grpSpPr>
+        <a:xfrm>
+          <a:off x="0" y="0"/>
+          <a:ext cx="0" cy="0"/>
+          <a:chOff x="0" y="0"/>
+          <a:chExt cx="0" cy="0"/>
+        </a:xfrm>
+      </p:grpSpPr>
+      <p:sp>
+        <p:nvSpPr>
+          <p:cNvPr id="2" name="Title 1">
+            <a:extLst>
+              <a:ext uri="{FF2B5EF4-FFF2-40B4-BE49-F238E27FC236}">
+                <a16:creationId xmlns:a16="http://schemas.microsoft.com/office/drawing/2014/main" id="{E2FA18D7-28B2-133F-662F-90CC8F55869B}"/>
+              </a:ext>
+            </a:extLst>
+          </p:cNvPr>
+          <p:cNvSpPr>
+            <a:spLocks noGrp="1"/>
+          </p:cNvSpPr>
+          <p:nvPr>
+            <p:ph type="title"/>
+          </p:nvPr>
+        </p:nvSpPr>
+        <p:spPr/>
+        <p:txBody>
+          <a:bodyPr/>
+          <a:lstStyle/>
+          <a:p>
+            <a:r>
+              <a:rPr lang="en-US">
+                <a:ea typeface="+mj-lt"/>
+                <a:cs typeface="+mj-lt"/>
+              </a:rPr>
+              <a:t>Scenario Activity: Trust the Number?</a:t>
+            </a:r>
+            <a:endParaRPr lang="en-US"/>
+          </a:p>
+        </p:txBody>
+      </p:sp>
+      <p:sp>
+        <p:nvSpPr>
+          <p:cNvPr id="3" name="Content Placeholder 2">
+            <a:extLst>
+              <a:ext uri="{FF2B5EF4-FFF2-40B4-BE49-F238E27FC236}">
+                <a16:creationId xmlns:a16="http://schemas.microsoft.com/office/drawing/2014/main" id="{C603F302-AE7F-8CE3-9FC5-7C9203D4C4E2}"/>
+              </a:ext>
+            </a:extLst>
+          </p:cNvPr>
+          <p:cNvSpPr>
+            <a:spLocks noGrp="1"/>
+          </p:cNvSpPr>
+          <p:nvPr>
+            <p:ph idx="1"/>
+          </p:nvPr>
+        </p:nvSpPr>
+        <p:spPr/>
+        <p:txBody>
+          <a:bodyPr vert="horz" lIns="91440" tIns="45720" rIns="91440" bIns="45720" rtlCol="0" anchor="t">
+            <a:normAutofit/>
+          </a:bodyPr>
+          <a:lstStyle/>
+          <a:p>
+            <a:r>
+              <a:rPr lang="en-US">
+                <a:ea typeface="+mn-lt"/>
+                <a:cs typeface="+mn-lt"/>
+              </a:rPr>
+              <a:t>A coach sees that an athlete’s jump height decreased by 4% and recommends reducing their training load.</a:t>
+            </a:r>
+            <a:endParaRPr lang="en-US"/>
+          </a:p>
+          <a:p>
+            <a:r>
+              <a:rPr lang="en-US">
+                <a:ea typeface="+mn-lt"/>
+                <a:cs typeface="+mn-lt"/>
+              </a:rPr>
+              <a:t>Before accepting the recommendation, what would you need to know?</a:t>
+            </a:r>
+            <a:endParaRPr lang="en-US"/>
+          </a:p>
+          <a:p>
+            <a:endParaRPr lang="en-US"/>
+          </a:p>
+        </p:txBody>
+      </p:sp>
+    </p:spTree>
+    <p:extLst>
+      <p:ext uri="{BB962C8B-B14F-4D97-AF65-F5344CB8AC3E}">
+        <p14:creationId xmlns:p14="http://schemas.microsoft.com/office/powerpoint/2010/main" val="4290967881"/>
+      </p:ext>
+    </p:extLst>
+  </p:cSld>
+  <p:clrMapOvr>
+    <a:masterClrMapping/>
+  </p:clrMapOvr>
+</p:sld>
+</file>
+
+<file path=ppt/slides/slide34.xml><?xml version="1.0" encoding="utf-8"?>
+<p:sld xmlns:a="http://schemas.openxmlformats.org/drawingml/2006/main" xmlns:r="http://schemas.openxmlformats.org/officeDocument/2006/relationships" xmlns:p="http://schemas.openxmlformats.org/presentationml/2006/main">
+  <p:cSld>
+    <p:spTree>
+      <p:nvGrpSpPr>
+        <p:cNvPr id="1" name="">
+          <a:extLst>
+            <a:ext uri="{FF2B5EF4-FFF2-40B4-BE49-F238E27FC236}">
+              <a16:creationId xmlns:a16="http://schemas.microsoft.com/office/drawing/2014/main" id="{9570E4B0-F4CB-5A17-682A-4D9E20E04FD7}"/>
+            </a:ext>
+          </a:extLst>
+        </p:cNvPr>
+        <p:cNvGrpSpPr/>
+        <p:nvPr/>
+      </p:nvGrpSpPr>
+      <p:grpSpPr>
+        <a:xfrm>
+          <a:off x="0" y="0"/>
+          <a:ext cx="0" cy="0"/>
+          <a:chOff x="0" y="0"/>
+          <a:chExt cx="0" cy="0"/>
+        </a:xfrm>
+      </p:grpSpPr>
+      <p:sp>
+        <p:nvSpPr>
+          <p:cNvPr id="2" name="Title 1">
+            <a:extLst>
+              <a:ext uri="{FF2B5EF4-FFF2-40B4-BE49-F238E27FC236}">
+                <a16:creationId xmlns:a16="http://schemas.microsoft.com/office/drawing/2014/main" id="{BD102CB6-AC53-DC15-6C59-4D446EC7C0EE}"/>
+              </a:ext>
+            </a:extLst>
+          </p:cNvPr>
+          <p:cNvSpPr>
+            <a:spLocks noGrp="1"/>
+          </p:cNvSpPr>
+          <p:nvPr>
+            <p:ph type="title"/>
+          </p:nvPr>
+        </p:nvSpPr>
+        <p:spPr/>
+        <p:txBody>
+          <a:bodyPr/>
+          <a:lstStyle/>
+          <a:p>
+            <a:r>
+              <a:rPr lang="en-US">
+                <a:ea typeface="+mj-lt"/>
+                <a:cs typeface="+mj-lt"/>
+              </a:rPr>
+              <a:t>Scenario Activity: Trust the Number?</a:t>
+            </a:r>
+            <a:endParaRPr lang="en-US"/>
+          </a:p>
+        </p:txBody>
+      </p:sp>
+      <p:sp>
+        <p:nvSpPr>
+          <p:cNvPr id="3" name="Content Placeholder 2">
+            <a:extLst>
+              <a:ext uri="{FF2B5EF4-FFF2-40B4-BE49-F238E27FC236}">
+                <a16:creationId xmlns:a16="http://schemas.microsoft.com/office/drawing/2014/main" id="{F328F1A0-F2E2-C4F6-63D0-F385C2C08D80}"/>
+              </a:ext>
+            </a:extLst>
+          </p:cNvPr>
+          <p:cNvSpPr>
+            <a:spLocks noGrp="1"/>
+          </p:cNvSpPr>
+          <p:nvPr>
+            <p:ph idx="1"/>
+          </p:nvPr>
+        </p:nvSpPr>
+        <p:spPr/>
+        <p:txBody>
+          <a:bodyPr vert="horz" lIns="91440" tIns="45720" rIns="91440" bIns="45720" rtlCol="0" anchor="t">
+            <a:normAutofit/>
+          </a:bodyPr>
+          <a:lstStyle/>
+          <a:p>
+            <a:r>
+              <a:rPr lang="en-US">
+                <a:ea typeface="+mn-lt"/>
+                <a:cs typeface="+mn-lt"/>
+              </a:rPr>
+              <a:t>possible questions:</a:t>
+            </a:r>
+          </a:p>
+          <a:p>
+            <a:pPr lvl="1">
+              <a:buFont typeface="Courier New" panose="020B0604020202020204" pitchFamily="34" charset="0"/>
+              <a:buChar char="o"/>
+            </a:pPr>
+            <a:r>
+              <a:rPr lang="en-US">
+                <a:ea typeface="+mn-lt"/>
+                <a:cs typeface="+mn-lt"/>
+              </a:rPr>
+              <a:t>Typical measurement error </a:t>
+            </a:r>
+            <a:endParaRPr lang="en-US"/>
+          </a:p>
+          <a:p>
+            <a:pPr lvl="1">
+              <a:buFont typeface="Courier New" panose="020B0604020202020204" pitchFamily="34" charset="0"/>
+              <a:buChar char="o"/>
+            </a:pPr>
+            <a:r>
+              <a:rPr lang="en-US">
+                <a:ea typeface="+mn-lt"/>
+                <a:cs typeface="+mn-lt"/>
+              </a:rPr>
+              <a:t>Athlete day-to-day variation </a:t>
+            </a:r>
+            <a:endParaRPr lang="en-US"/>
+          </a:p>
+          <a:p>
+            <a:pPr lvl="1">
+              <a:buFont typeface="Courier New" panose="020B0604020202020204" pitchFamily="34" charset="0"/>
+              <a:buChar char="o"/>
+            </a:pPr>
+            <a:r>
+              <a:rPr lang="en-US">
+                <a:ea typeface="+mn-lt"/>
+                <a:cs typeface="+mn-lt"/>
+              </a:rPr>
+              <a:t>Device placement </a:t>
+            </a:r>
+            <a:endParaRPr lang="en-US"/>
+          </a:p>
+          <a:p>
+            <a:pPr lvl="1">
+              <a:buFont typeface="Courier New" panose="020B0604020202020204" pitchFamily="34" charset="0"/>
+              <a:buChar char="o"/>
+            </a:pPr>
+            <a:r>
+              <a:rPr lang="en-US">
+                <a:ea typeface="+mn-lt"/>
+                <a:cs typeface="+mn-lt"/>
+              </a:rPr>
+              <a:t>Warm-up and testing procedure </a:t>
+            </a:r>
+            <a:endParaRPr lang="en-US"/>
+          </a:p>
+          <a:p>
+            <a:pPr lvl="1">
+              <a:buFont typeface="Courier New" panose="020B0604020202020204" pitchFamily="34" charset="0"/>
+              <a:buChar char="o"/>
+            </a:pPr>
+            <a:r>
+              <a:rPr lang="en-US">
+                <a:ea typeface="+mn-lt"/>
+                <a:cs typeface="+mn-lt"/>
+              </a:rPr>
+              <a:t>Fatigue or soreness </a:t>
+            </a:r>
+            <a:endParaRPr lang="en-US"/>
+          </a:p>
+          <a:p>
+            <a:pPr lvl="1">
+              <a:buFont typeface="Courier New" panose="020B0604020202020204" pitchFamily="34" charset="0"/>
+              <a:buChar char="o"/>
+            </a:pPr>
+            <a:r>
+              <a:rPr lang="en-US">
+                <a:ea typeface="+mn-lt"/>
+                <a:cs typeface="+mn-lt"/>
+              </a:rPr>
+              <a:t>Whether the same device was used </a:t>
+            </a:r>
+            <a:endParaRPr lang="en-US"/>
+          </a:p>
+          <a:p>
+            <a:pPr lvl="1">
+              <a:buFont typeface="Courier New" panose="020B0604020202020204" pitchFamily="34" charset="0"/>
+              <a:buChar char="o"/>
+            </a:pPr>
+            <a:r>
+              <a:rPr lang="en-US">
+                <a:ea typeface="+mn-lt"/>
+                <a:cs typeface="+mn-lt"/>
+              </a:rPr>
+              <a:t>Whether 4% is practically meaningful </a:t>
+            </a:r>
+            <a:endParaRPr lang="en-US"/>
+          </a:p>
+          <a:p>
+            <a:pPr lvl="1">
+              <a:buFont typeface="Courier New" panose="020B0604020202020204" pitchFamily="34" charset="0"/>
+              <a:buChar char="o"/>
+            </a:pPr>
+            <a:r>
+              <a:rPr lang="en-US">
+                <a:ea typeface="+mn-lt"/>
+                <a:cs typeface="+mn-lt"/>
+              </a:rPr>
+              <a:t>How the result will be communicated and used</a:t>
+            </a:r>
+            <a:endParaRPr lang="en-US"/>
+          </a:p>
+          <a:p>
+            <a:endParaRPr lang="en-US"/>
+          </a:p>
+        </p:txBody>
+      </p:sp>
+    </p:spTree>
+    <p:extLst>
+      <p:ext uri="{BB962C8B-B14F-4D97-AF65-F5344CB8AC3E}">
+        <p14:creationId xmlns:p14="http://schemas.microsoft.com/office/powerpoint/2010/main" val="1767871761"/>
+      </p:ext>
+    </p:extLst>
+  </p:cSld>
+  <p:clrMapOvr>
+    <a:masterClrMapping/>
+  </p:clrMapOvr>
+</p:sld>
+</file>
+
+<file path=ppt/slides/slide35.xml><?xml version="1.0" encoding="utf-8"?>
+<p:sld xmlns:a="http://schemas.openxmlformats.org/drawingml/2006/main" xmlns:r="http://schemas.openxmlformats.org/officeDocument/2006/relationships" xmlns:p="http://schemas.openxmlformats.org/presentationml/2006/main">
+  <p:cSld>
+    <p:spTree>
+      <p:nvGrpSpPr>
+        <p:cNvPr id="1" name=""/>
+        <p:cNvGrpSpPr/>
+        <p:nvPr/>
+      </p:nvGrpSpPr>
+      <p:grpSpPr>
+        <a:xfrm>
+          <a:off x="0" y="0"/>
+          <a:ext cx="0" cy="0"/>
+          <a:chOff x="0" y="0"/>
+          <a:chExt cx="0" cy="0"/>
+        </a:xfrm>
+      </p:grpSpPr>
+      <p:sp>
+        <p:nvSpPr>
+          <p:cNvPr id="2" name="Title 1">
+            <a:extLst>
+              <a:ext uri="{FF2B5EF4-FFF2-40B4-BE49-F238E27FC236}">
+                <a16:creationId xmlns:a16="http://schemas.microsoft.com/office/drawing/2014/main" id="{FBFD6EB5-FEC2-47DE-01A3-F0E170543F3C}"/>
+              </a:ext>
+            </a:extLst>
+          </p:cNvPr>
+          <p:cNvSpPr>
+            <a:spLocks noGrp="1"/>
+          </p:cNvSpPr>
+          <p:nvPr>
+            <p:ph type="title"/>
+          </p:nvPr>
+        </p:nvSpPr>
+        <p:spPr/>
+        <p:txBody>
+          <a:bodyPr>
+            <a:normAutofit/>
+          </a:bodyPr>
+          <a:lstStyle/>
+          <a:p>
+            <a:r>
+              <a:rPr lang="en-GB"/>
+              <a:t>Summary &amp; Looking Ahead</a:t>
+            </a:r>
+            <a:endParaRPr lang="en-US"/>
+          </a:p>
+        </p:txBody>
+      </p:sp>
+      <p:sp>
+        <p:nvSpPr>
+          <p:cNvPr id="3" name="Content Placeholder 2">
+            <a:extLst>
+              <a:ext uri="{FF2B5EF4-FFF2-40B4-BE49-F238E27FC236}">
+                <a16:creationId xmlns:a16="http://schemas.microsoft.com/office/drawing/2014/main" id="{B7781857-C6C4-CF29-7D9F-C7FCD74ECA0D}"/>
+              </a:ext>
+            </a:extLst>
+          </p:cNvPr>
+          <p:cNvSpPr>
+            <a:spLocks noGrp="1"/>
+          </p:cNvSpPr>
+          <p:nvPr>
+            <p:ph idx="1"/>
+          </p:nvPr>
+        </p:nvSpPr>
+        <p:spPr/>
+        <p:txBody>
+          <a:bodyPr vert="horz" lIns="91440" tIns="45720" rIns="91440" bIns="45720" rtlCol="0" anchor="t">
+            <a:normAutofit/>
+          </a:bodyPr>
+          <a:lstStyle/>
+          <a:p>
+            <a:r>
+              <a:rPr lang="en-US">
+                <a:ea typeface="+mn-lt"/>
+                <a:cs typeface="+mn-lt"/>
+              </a:rPr>
+              <a:t>Data are not automatically objective simply because they are numerical. Their credibility depends on how they were collected, interpreted, and used.</a:t>
+            </a:r>
+            <a:endParaRPr lang="en-US"/>
+          </a:p>
+          <a:p>
+            <a:r>
+              <a:rPr lang="en-US"/>
+              <a:t>Before analysis, consider </a:t>
+            </a:r>
+            <a:r>
+              <a:rPr lang="en-US" b="1"/>
+              <a:t>reliability</a:t>
+            </a:r>
+            <a:r>
+              <a:rPr lang="en-US"/>
+              <a:t>, </a:t>
+            </a:r>
+            <a:r>
+              <a:rPr lang="en-US" b="1"/>
+              <a:t>validity </a:t>
+            </a:r>
+            <a:r>
+              <a:rPr lang="en-US"/>
+              <a:t>and </a:t>
+            </a:r>
+            <a:r>
+              <a:rPr lang="en-US" b="1"/>
+              <a:t>ethics.</a:t>
+            </a:r>
+          </a:p>
+          <a:p>
+            <a:r>
+              <a:rPr lang="en-US"/>
+              <a:t>Next: data characteristics</a:t>
+            </a:r>
+          </a:p>
+        </p:txBody>
+      </p:sp>
+    </p:spTree>
+    <p:extLst>
+      <p:ext uri="{BB962C8B-B14F-4D97-AF65-F5344CB8AC3E}">
+        <p14:creationId xmlns:p14="http://schemas.microsoft.com/office/powerpoint/2010/main" val="2206692154"/>
+      </p:ext>
+    </p:extLst>
+  </p:cSld>
+  <p:clrMapOvr>
+    <a:masterClrMapping/>
+  </p:clrMapOvr>
+</p:sld>
+</file>
+
+<file path=ppt/slides/slide36.xml><?xml version="1.0" encoding="utf-8"?>
+<p:sld xmlns:a="http://schemas.openxmlformats.org/drawingml/2006/main" xmlns:r="http://schemas.openxmlformats.org/officeDocument/2006/relationships" xmlns:p="http://schemas.openxmlformats.org/presentationml/2006/main" show="0">
+  <p:cSld>
+    <p:spTree>
+      <p:nvGrpSpPr>
+        <p:cNvPr id="1" name=""/>
+        <p:cNvGrpSpPr/>
+        <p:nvPr/>
+      </p:nvGrpSpPr>
+      <p:grpSpPr>
+        <a:xfrm>
+          <a:off x="0" y="0"/>
+          <a:ext cx="0" cy="0"/>
+          <a:chOff x="0" y="0"/>
+          <a:chExt cx="0" cy="0"/>
+        </a:xfrm>
+      </p:grpSpPr>
+      <p:sp>
+        <p:nvSpPr>
+          <p:cNvPr id="2" name="Title 1">
+            <a:extLst>
+              <a:ext uri="{FF2B5EF4-FFF2-40B4-BE49-F238E27FC236}">
+                <a16:creationId xmlns:a16="http://schemas.microsoft.com/office/drawing/2014/main" id="{0EA8D9B6-7685-F178-75AE-9F7C2D524F95}"/>
+              </a:ext>
+            </a:extLst>
+          </p:cNvPr>
+          <p:cNvSpPr>
+            <a:spLocks noGrp="1"/>
+          </p:cNvSpPr>
+          <p:nvPr>
+            <p:ph type="title"/>
+          </p:nvPr>
+        </p:nvSpPr>
+        <p:spPr/>
+        <p:txBody>
+          <a:bodyPr/>
+          <a:lstStyle/>
+          <a:p>
+            <a:r>
+              <a:rPr lang="en-US"/>
+              <a:t>Ethics and Data Quality</a:t>
+            </a:r>
+          </a:p>
+        </p:txBody>
+      </p:sp>
+      <p:sp>
+        <p:nvSpPr>
+          <p:cNvPr id="3" name="Content Placeholder 2">
+            <a:extLst>
+              <a:ext uri="{FF2B5EF4-FFF2-40B4-BE49-F238E27FC236}">
+                <a16:creationId xmlns:a16="http://schemas.microsoft.com/office/drawing/2014/main" id="{E8CDD4DB-A820-1D03-618F-9AB277D56FE9}"/>
+              </a:ext>
+            </a:extLst>
+          </p:cNvPr>
+          <p:cNvSpPr>
+            <a:spLocks noGrp="1"/>
+          </p:cNvSpPr>
+          <p:nvPr>
+            <p:ph idx="1"/>
+          </p:nvPr>
+        </p:nvSpPr>
+        <p:spPr/>
+        <p:txBody>
+          <a:bodyPr/>
+          <a:lstStyle/>
+          <a:p>
+            <a:endParaRPr lang="en-US"/>
+          </a:p>
+        </p:txBody>
+      </p:sp>
+      <p:sp>
+        <p:nvSpPr>
+          <p:cNvPr id="4" name="Rectangle: Rounded Corners 3">
+            <a:extLst>
+              <a:ext uri="{FF2B5EF4-FFF2-40B4-BE49-F238E27FC236}">
+                <a16:creationId xmlns:a16="http://schemas.microsoft.com/office/drawing/2014/main" id="{03A86C87-B9F7-9ABC-F77B-D76A8E2DA7D7}"/>
+              </a:ext>
+            </a:extLst>
+          </p:cNvPr>
+          <p:cNvSpPr/>
+          <p:nvPr/>
+        </p:nvSpPr>
+        <p:spPr>
+          <a:xfrm>
+            <a:off x="5231175" y="1685580"/>
+            <a:ext cx="1729649" cy="914400"/>
+          </a:xfrm>
+          <a:prstGeom prst="roundRect">
+            <a:avLst/>
+          </a:prstGeom>
+        </p:spPr>
+        <p:style>
+          <a:lnRef idx="2">
+            <a:schemeClr val="accent1">
+              <a:shade val="15000"/>
+            </a:schemeClr>
+          </a:lnRef>
+          <a:fillRef idx="1">
+            <a:schemeClr val="accent1"/>
+          </a:fillRef>
+          <a:effectRef idx="0">
+            <a:schemeClr val="accent1"/>
+          </a:effectRef>
+          <a:fontRef idx="minor">
+            <a:schemeClr val="lt1"/>
+          </a:fontRef>
+        </p:style>
+        <p:txBody>
+          <a:bodyPr rtlCol="0" anchor="ctr"/>
+          <a:lstStyle/>
+          <a:p>
+            <a:pPr algn="ctr"/>
+            <a:r>
+              <a:rPr lang="en-US"/>
+              <a:t>Low-quality data</a:t>
+            </a:r>
+          </a:p>
+        </p:txBody>
+      </p:sp>
+      <p:sp>
+        <p:nvSpPr>
+          <p:cNvPr id="6" name="Rectangle: Rounded Corners 5">
+            <a:extLst>
+              <a:ext uri="{FF2B5EF4-FFF2-40B4-BE49-F238E27FC236}">
+                <a16:creationId xmlns:a16="http://schemas.microsoft.com/office/drawing/2014/main" id="{0C59778E-295C-21E0-5D44-2084FB20B168}"/>
+              </a:ext>
+            </a:extLst>
+          </p:cNvPr>
+          <p:cNvSpPr/>
+          <p:nvPr/>
+        </p:nvSpPr>
+        <p:spPr>
+          <a:xfrm>
+            <a:off x="7884405" y="3177380"/>
+            <a:ext cx="1729649" cy="914400"/>
+          </a:xfrm>
+          <a:prstGeom prst="roundRect">
+            <a:avLst/>
+          </a:prstGeom>
+        </p:spPr>
+        <p:style>
+          <a:lnRef idx="2">
+            <a:schemeClr val="accent1">
+              <a:shade val="15000"/>
+            </a:schemeClr>
+          </a:lnRef>
+          <a:fillRef idx="1">
+            <a:schemeClr val="accent1"/>
+          </a:fillRef>
+          <a:effectRef idx="0">
+            <a:schemeClr val="accent1"/>
+          </a:effectRef>
+          <a:fontRef idx="minor">
+            <a:schemeClr val="lt1"/>
+          </a:fontRef>
+        </p:style>
+        <p:txBody>
+          <a:bodyPr rtlCol="0" anchor="ctr"/>
+          <a:lstStyle/>
+          <a:p>
+            <a:pPr algn="ctr"/>
+            <a:r>
+              <a:rPr lang="en-US"/>
+              <a:t>Low-quality analysis</a:t>
+            </a:r>
+          </a:p>
+        </p:txBody>
+      </p:sp>
+      <p:sp>
+        <p:nvSpPr>
+          <p:cNvPr id="8" name="Rectangle: Rounded Corners 7">
+            <a:extLst>
+              <a:ext uri="{FF2B5EF4-FFF2-40B4-BE49-F238E27FC236}">
+                <a16:creationId xmlns:a16="http://schemas.microsoft.com/office/drawing/2014/main" id="{8987573E-E4F5-DFC0-5CE8-33F7FD7727F1}"/>
+              </a:ext>
+            </a:extLst>
+          </p:cNvPr>
+          <p:cNvSpPr/>
+          <p:nvPr/>
+        </p:nvSpPr>
+        <p:spPr>
+          <a:xfrm>
+            <a:off x="6676785" y="5074539"/>
+            <a:ext cx="1729649" cy="914400"/>
+          </a:xfrm>
+          <a:prstGeom prst="roundRect">
+            <a:avLst/>
+          </a:prstGeom>
+        </p:spPr>
+        <p:style>
+          <a:lnRef idx="2">
+            <a:schemeClr val="accent1">
+              <a:shade val="15000"/>
+            </a:schemeClr>
+          </a:lnRef>
+          <a:fillRef idx="1">
+            <a:schemeClr val="accent1"/>
+          </a:fillRef>
+          <a:effectRef idx="0">
+            <a:schemeClr val="accent1"/>
+          </a:effectRef>
+          <a:fontRef idx="minor">
+            <a:schemeClr val="lt1"/>
+          </a:fontRef>
+        </p:style>
+        <p:txBody>
+          <a:bodyPr rtlCol="0" anchor="ctr"/>
+          <a:lstStyle/>
+          <a:p>
+            <a:pPr algn="ctr"/>
+            <a:r>
+              <a:rPr lang="en-US"/>
+              <a:t>Worse decisions</a:t>
+            </a:r>
+          </a:p>
+        </p:txBody>
+      </p:sp>
+      <p:sp>
+        <p:nvSpPr>
+          <p:cNvPr id="10" name="Rectangle: Rounded Corners 9">
+            <a:extLst>
+              <a:ext uri="{FF2B5EF4-FFF2-40B4-BE49-F238E27FC236}">
+                <a16:creationId xmlns:a16="http://schemas.microsoft.com/office/drawing/2014/main" id="{8DF57152-AC9D-84BA-8D7A-F10AE8B7CAA1}"/>
+              </a:ext>
+            </a:extLst>
+          </p:cNvPr>
+          <p:cNvSpPr/>
+          <p:nvPr/>
+        </p:nvSpPr>
+        <p:spPr>
+          <a:xfrm>
+            <a:off x="3660042" y="5061686"/>
+            <a:ext cx="1729649" cy="914400"/>
+          </a:xfrm>
+          <a:prstGeom prst="roundRect">
+            <a:avLst/>
+          </a:prstGeom>
+        </p:spPr>
+        <p:style>
+          <a:lnRef idx="2">
+            <a:schemeClr val="accent1">
+              <a:shade val="15000"/>
+            </a:schemeClr>
+          </a:lnRef>
+          <a:fillRef idx="1">
+            <a:schemeClr val="accent1"/>
+          </a:fillRef>
+          <a:effectRef idx="0">
+            <a:schemeClr val="accent1"/>
+          </a:effectRef>
+          <a:fontRef idx="minor">
+            <a:schemeClr val="lt1"/>
+          </a:fontRef>
+        </p:style>
+        <p:txBody>
+          <a:bodyPr rtlCol="0" anchor="ctr"/>
+          <a:lstStyle/>
+          <a:p>
+            <a:pPr algn="ctr"/>
+            <a:r>
+              <a:rPr lang="en-US"/>
+              <a:t>Athlete distrust</a:t>
+            </a:r>
+          </a:p>
+        </p:txBody>
+      </p:sp>
+      <p:sp>
+        <p:nvSpPr>
+          <p:cNvPr id="12" name="Rectangle: Rounded Corners 11">
+            <a:extLst>
+              <a:ext uri="{FF2B5EF4-FFF2-40B4-BE49-F238E27FC236}">
+                <a16:creationId xmlns:a16="http://schemas.microsoft.com/office/drawing/2014/main" id="{F290065A-B18B-A035-8FC0-ABAB6AE7C8C3}"/>
+              </a:ext>
+            </a:extLst>
+          </p:cNvPr>
+          <p:cNvSpPr/>
+          <p:nvPr/>
+        </p:nvSpPr>
+        <p:spPr>
+          <a:xfrm>
+            <a:off x="2297015" y="3251812"/>
+            <a:ext cx="1729649" cy="914400"/>
+          </a:xfrm>
+          <a:prstGeom prst="roundRect">
+            <a:avLst/>
+          </a:prstGeom>
+        </p:spPr>
+        <p:style>
+          <a:lnRef idx="2">
+            <a:schemeClr val="accent1">
+              <a:shade val="15000"/>
+            </a:schemeClr>
+          </a:lnRef>
+          <a:fillRef idx="1">
+            <a:schemeClr val="accent1"/>
+          </a:fillRef>
+          <a:effectRef idx="0">
+            <a:schemeClr val="accent1"/>
+          </a:effectRef>
+          <a:fontRef idx="minor">
+            <a:schemeClr val="lt1"/>
+          </a:fontRef>
+        </p:style>
+        <p:txBody>
+          <a:bodyPr rtlCol="0" anchor="ctr"/>
+          <a:lstStyle/>
+          <a:p>
+            <a:pPr algn="ctr"/>
+            <a:r>
+              <a:rPr lang="en-US"/>
+              <a:t>Less honest reporting</a:t>
+            </a:r>
+          </a:p>
+        </p:txBody>
+      </p:sp>
+      <p:sp>
+        <p:nvSpPr>
+          <p:cNvPr id="13" name="Arrow: Right 12">
+            <a:extLst>
+              <a:ext uri="{FF2B5EF4-FFF2-40B4-BE49-F238E27FC236}">
+                <a16:creationId xmlns:a16="http://schemas.microsoft.com/office/drawing/2014/main" id="{7ACB6CEC-1571-70EA-3699-F6717F108EF7}"/>
+              </a:ext>
+            </a:extLst>
+          </p:cNvPr>
+          <p:cNvSpPr/>
+          <p:nvPr/>
+        </p:nvSpPr>
+        <p:spPr>
+          <a:xfrm rot="2353011">
+            <a:off x="7148425" y="2402219"/>
+            <a:ext cx="978408" cy="484632"/>
+          </a:xfrm>
+          <a:prstGeom prst="rightArrow">
+            <a:avLst/>
+          </a:prstGeom>
+        </p:spPr>
+        <p:style>
+          <a:lnRef idx="2">
+            <a:schemeClr val="accent1">
+              <a:shade val="15000"/>
+            </a:schemeClr>
+          </a:lnRef>
+          <a:fillRef idx="1">
+            <a:schemeClr val="accent1"/>
+          </a:fillRef>
+          <a:effectRef idx="0">
+            <a:schemeClr val="accent1"/>
+          </a:effectRef>
+          <a:fontRef idx="minor">
+            <a:schemeClr val="lt1"/>
+          </a:fontRef>
+        </p:style>
+        <p:txBody>
+          <a:bodyPr rtlCol="0" anchor="ctr"/>
+          <a:lstStyle/>
+          <a:p>
+            <a:pPr algn="ctr"/>
+            <a:endParaRPr lang="en-US"/>
+          </a:p>
+        </p:txBody>
+      </p:sp>
+      <p:sp>
+        <p:nvSpPr>
+          <p:cNvPr id="15" name="Arrow: Right 14">
+            <a:extLst>
+              <a:ext uri="{FF2B5EF4-FFF2-40B4-BE49-F238E27FC236}">
+                <a16:creationId xmlns:a16="http://schemas.microsoft.com/office/drawing/2014/main" id="{ABCDA285-EEAA-ACDC-3420-DF09520C8437}"/>
+              </a:ext>
+            </a:extLst>
+          </p:cNvPr>
+          <p:cNvSpPr/>
+          <p:nvPr/>
+        </p:nvSpPr>
+        <p:spPr>
+          <a:xfrm rot="7834450">
+            <a:off x="8260026" y="4422125"/>
+            <a:ext cx="978408" cy="484632"/>
+          </a:xfrm>
+          <a:prstGeom prst="rightArrow">
+            <a:avLst/>
+          </a:prstGeom>
+        </p:spPr>
+        <p:style>
+          <a:lnRef idx="2">
+            <a:schemeClr val="accent1">
+              <a:shade val="15000"/>
+            </a:schemeClr>
+          </a:lnRef>
+          <a:fillRef idx="1">
+            <a:schemeClr val="accent1"/>
+          </a:fillRef>
+          <a:effectRef idx="0">
+            <a:schemeClr val="accent1"/>
+          </a:effectRef>
+          <a:fontRef idx="minor">
+            <a:schemeClr val="lt1"/>
+          </a:fontRef>
+        </p:style>
+        <p:txBody>
+          <a:bodyPr rtlCol="0" anchor="ctr"/>
+          <a:lstStyle/>
+          <a:p>
+            <a:pPr algn="ctr"/>
+            <a:endParaRPr lang="en-US"/>
+          </a:p>
+        </p:txBody>
+      </p:sp>
+      <p:sp>
+        <p:nvSpPr>
+          <p:cNvPr id="17" name="Arrow: Right 16">
+            <a:extLst>
+              <a:ext uri="{FF2B5EF4-FFF2-40B4-BE49-F238E27FC236}">
+                <a16:creationId xmlns:a16="http://schemas.microsoft.com/office/drawing/2014/main" id="{EFF4B582-3AA6-B55C-0EFF-0717B9E5535E}"/>
+              </a:ext>
+            </a:extLst>
+          </p:cNvPr>
+          <p:cNvSpPr/>
+          <p:nvPr/>
+        </p:nvSpPr>
+        <p:spPr>
+          <a:xfrm rot="13659880">
+            <a:off x="2764414" y="4502600"/>
+            <a:ext cx="978408" cy="484632"/>
+          </a:xfrm>
+          <a:prstGeom prst="rightArrow">
+            <a:avLst/>
+          </a:prstGeom>
+        </p:spPr>
+        <p:style>
+          <a:lnRef idx="2">
+            <a:schemeClr val="accent1">
+              <a:shade val="15000"/>
+            </a:schemeClr>
+          </a:lnRef>
+          <a:fillRef idx="1">
+            <a:schemeClr val="accent1"/>
+          </a:fillRef>
+          <a:effectRef idx="0">
+            <a:schemeClr val="accent1"/>
+          </a:effectRef>
+          <a:fontRef idx="minor">
+            <a:schemeClr val="lt1"/>
+          </a:fontRef>
+        </p:style>
+        <p:txBody>
+          <a:bodyPr rtlCol="0" anchor="ctr"/>
+          <a:lstStyle/>
+          <a:p>
+            <a:pPr algn="ctr"/>
+            <a:endParaRPr lang="en-US"/>
+          </a:p>
+        </p:txBody>
+      </p:sp>
+      <p:sp>
+        <p:nvSpPr>
+          <p:cNvPr id="19" name="Arrow: Right 18">
+            <a:extLst>
+              <a:ext uri="{FF2B5EF4-FFF2-40B4-BE49-F238E27FC236}">
+                <a16:creationId xmlns:a16="http://schemas.microsoft.com/office/drawing/2014/main" id="{D7510D14-CB83-4698-6F33-4D4E655A9592}"/>
+              </a:ext>
+            </a:extLst>
+          </p:cNvPr>
+          <p:cNvSpPr/>
+          <p:nvPr/>
+        </p:nvSpPr>
+        <p:spPr>
+          <a:xfrm rot="10800000">
+            <a:off x="5512041" y="5289423"/>
+            <a:ext cx="978408" cy="484632"/>
+          </a:xfrm>
+          <a:prstGeom prst="rightArrow">
+            <a:avLst/>
+          </a:prstGeom>
+        </p:spPr>
+        <p:style>
+          <a:lnRef idx="2">
+            <a:schemeClr val="accent1">
+              <a:shade val="15000"/>
+            </a:schemeClr>
+          </a:lnRef>
+          <a:fillRef idx="1">
+            <a:schemeClr val="accent1"/>
+          </a:fillRef>
+          <a:effectRef idx="0">
+            <a:schemeClr val="accent1"/>
+          </a:effectRef>
+          <a:fontRef idx="minor">
+            <a:schemeClr val="lt1"/>
+          </a:fontRef>
+        </p:style>
+        <p:txBody>
+          <a:bodyPr rtlCol="0" anchor="ctr"/>
+          <a:lstStyle/>
+          <a:p>
+            <a:pPr algn="ctr"/>
+            <a:endParaRPr lang="en-US"/>
+          </a:p>
+        </p:txBody>
+      </p:sp>
+      <p:sp>
+        <p:nvSpPr>
+          <p:cNvPr id="21" name="Arrow: Right 20">
+            <a:extLst>
+              <a:ext uri="{FF2B5EF4-FFF2-40B4-BE49-F238E27FC236}">
+                <a16:creationId xmlns:a16="http://schemas.microsoft.com/office/drawing/2014/main" id="{4CFF4EA4-08AD-35D3-5B48-E6052171065D}"/>
+              </a:ext>
+            </a:extLst>
+          </p:cNvPr>
+          <p:cNvSpPr/>
+          <p:nvPr/>
+        </p:nvSpPr>
+        <p:spPr>
+          <a:xfrm rot="19324540">
+            <a:off x="3961867" y="2422793"/>
+            <a:ext cx="978408" cy="484632"/>
+          </a:xfrm>
+          <a:prstGeom prst="rightArrow">
+            <a:avLst/>
+          </a:prstGeom>
+        </p:spPr>
+        <p:style>
+          <a:lnRef idx="2">
+            <a:schemeClr val="accent1">
+              <a:shade val="15000"/>
+            </a:schemeClr>
+          </a:lnRef>
+          <a:fillRef idx="1">
+            <a:schemeClr val="accent1"/>
+          </a:fillRef>
+          <a:effectRef idx="0">
+            <a:schemeClr val="accent1"/>
+          </a:effectRef>
+          <a:fontRef idx="minor">
+            <a:schemeClr val="lt1"/>
+          </a:fontRef>
+        </p:style>
+        <p:txBody>
+          <a:bodyPr rtlCol="0" anchor="ctr"/>
+          <a:lstStyle/>
+          <a:p>
+            <a:pPr algn="ctr"/>
+            <a:endParaRPr lang="en-US"/>
+          </a:p>
+        </p:txBody>
+      </p:sp>
+    </p:spTree>
+    <p:extLst>
+      <p:ext uri="{BB962C8B-B14F-4D97-AF65-F5344CB8AC3E}">
+        <p14:creationId xmlns:p14="http://schemas.microsoft.com/office/powerpoint/2010/main" val="806632781"/>
       </p:ext>
     </p:extLst>
   </p:cSld>
@@ -7679,7 +10371,7 @@
           <a:lstStyle/>
           <a:p>
             <a:r>
-              <a:rPr lang="en-US" dirty="0"/>
+              <a:rPr lang="en-US"/>
               <a:t>Messy data</a:t>
             </a:r>
           </a:p>
@@ -7709,71 +10401,71 @@
           <a:lstStyle/>
           <a:p>
             <a:r>
-              <a:rPr lang="en-US" dirty="0"/>
+              <a:rPr lang="en-US"/>
               <a:t>Sport data are affected by:</a:t>
             </a:r>
           </a:p>
           <a:p>
             <a:pPr lvl="1"/>
             <a:r>
-              <a:rPr lang="en-US" dirty="0"/>
+              <a:rPr lang="en-US"/>
               <a:t>Device limitations </a:t>
             </a:r>
           </a:p>
           <a:p>
             <a:pPr lvl="1"/>
             <a:r>
-              <a:rPr lang="en-US" dirty="0"/>
+              <a:rPr lang="en-US"/>
               <a:t>Inconsistent procedures </a:t>
             </a:r>
           </a:p>
           <a:p>
             <a:pPr lvl="1"/>
             <a:r>
-              <a:rPr lang="en-US" dirty="0"/>
+              <a:rPr lang="en-US"/>
               <a:t>Human error </a:t>
             </a:r>
           </a:p>
           <a:p>
             <a:pPr lvl="1"/>
             <a:r>
-              <a:rPr lang="en-US" dirty="0"/>
+              <a:rPr lang="en-US"/>
               <a:t>Athlete behavior </a:t>
             </a:r>
           </a:p>
           <a:p>
             <a:pPr lvl="1"/>
             <a:r>
-              <a:rPr lang="en-US" dirty="0"/>
+              <a:rPr lang="en-US"/>
               <a:t>Environmental conditions </a:t>
             </a:r>
           </a:p>
           <a:p>
             <a:pPr lvl="1"/>
             <a:r>
-              <a:rPr lang="en-US" dirty="0"/>
+              <a:rPr lang="en-US"/>
               <a:t>Missing observations </a:t>
             </a:r>
           </a:p>
           <a:p>
             <a:pPr lvl="1"/>
             <a:r>
-              <a:rPr lang="en-US" dirty="0"/>
+              <a:rPr lang="en-US"/>
               <a:t>Changing definitions or technologies </a:t>
             </a:r>
           </a:p>
           <a:p>
             <a:pPr lvl="1"/>
-            <a:endParaRPr lang="en-US" dirty="0"/>
-          </a:p>
-          <a:p>
-            <a:r>
-              <a:rPr lang="en-US" dirty="0"/>
+            <a:endParaRPr lang="en-US"/>
+          </a:p>
+          <a:p>
+            <a:r>
+              <a:rPr lang="en-US"/>
               <a:t>Before analyzing performance, we must understand how the data were produced.</a:t>
             </a:r>
           </a:p>
           <a:p>
-            <a:endParaRPr lang="en-US" dirty="0"/>
+            <a:endParaRPr lang="en-US"/>
           </a:p>
         </p:txBody>
       </p:sp>
@@ -7829,7 +10521,7 @@
           <a:lstStyle/>
           <a:p>
             <a:r>
-              <a:rPr lang="en-US" dirty="0"/>
+              <a:rPr lang="en-US"/>
               <a:t>Trust in the measurement</a:t>
             </a:r>
           </a:p>
@@ -8001,7 +10693,7 @@
                         <a:buNone/>
                       </a:pPr>
                       <a:r>
-                        <a:rPr lang="en-US" dirty="0"/>
+                        <a:rPr lang="en-US"/>
                         <a:t>Validity</a:t>
                       </a:r>
                     </a:p>
@@ -8017,7 +10709,7 @@
                         <a:buNone/>
                       </a:pPr>
                       <a:r>
-                        <a:rPr lang="en-US" dirty="0"/>
+                        <a:rPr lang="en-US"/>
                         <a:t>Does the measurement represent what we intend to measure?</a:t>
                       </a:r>
                     </a:p>
@@ -8088,7 +10780,7 @@
           <a:lstStyle/>
           <a:p>
             <a:r>
-              <a:rPr lang="en-US" dirty="0"/>
+              <a:rPr lang="en-US"/>
               <a:t>Can measurements be reproduced consistently?</a:t>
             </a:r>
           </a:p>
@@ -8121,52 +10813,52 @@
           <a:lstStyle/>
           <a:p>
             <a:r>
-              <a:rPr lang="en-US" dirty="0"/>
+              <a:rPr lang="en-US"/>
               <a:t>A reliable measurement produces similar results when the underlying performance has not meaningfully changed</a:t>
             </a:r>
           </a:p>
           <a:p>
             <a:pPr lvl="1"/>
-            <a:endParaRPr lang="en-US" dirty="0"/>
-          </a:p>
-          <a:p>
-            <a:r>
-              <a:rPr lang="en-US" dirty="0"/>
+            <a:endParaRPr lang="en-US"/>
+          </a:p>
+          <a:p>
+            <a:r>
+              <a:rPr lang="en-US"/>
               <a:t>Potential sources of inconsistency include:</a:t>
             </a:r>
           </a:p>
           <a:p>
             <a:pPr lvl="1"/>
             <a:r>
-              <a:rPr lang="en-US" dirty="0"/>
+              <a:rPr lang="en-US"/>
               <a:t>Device measurement error </a:t>
             </a:r>
           </a:p>
           <a:p>
             <a:pPr lvl="1"/>
             <a:r>
-              <a:rPr lang="en-US" dirty="0"/>
+              <a:rPr lang="en-US"/>
               <a:t>Device-to-device differences </a:t>
             </a:r>
           </a:p>
           <a:p>
             <a:pPr lvl="1"/>
             <a:r>
-              <a:rPr lang="en-US" dirty="0"/>
+              <a:rPr lang="en-US"/>
               <a:t>Rater or analyst differences </a:t>
             </a:r>
           </a:p>
           <a:p>
             <a:pPr lvl="1"/>
             <a:r>
-              <a:rPr lang="en-US" dirty="0"/>
+              <a:rPr lang="en-US"/>
               <a:t>Inconsistent testing procedures </a:t>
             </a:r>
           </a:p>
           <a:p>
             <a:pPr lvl="1"/>
             <a:r>
-              <a:rPr lang="en-US" dirty="0"/>
+              <a:rPr lang="en-US"/>
               <a:t>Normal biological variation</a:t>
             </a:r>
           </a:p>
@@ -8255,7 +10947,7 @@
           <a:lstStyle/>
           <a:p>
             <a:r>
-              <a:rPr lang="en-US" dirty="0"/>
+              <a:rPr lang="en-US"/>
               <a:t>Types of reliability</a:t>
             </a:r>
           </a:p>
@@ -8285,7 +10977,7 @@
           <a:lstStyle/>
           <a:p>
             <a:r>
-              <a:rPr lang="en-US" b="1" dirty="0"/>
+              <a:rPr lang="en-US" dirty="0"/>
               <a:t>Test–retest reliability</a:t>
             </a:r>
           </a:p>
@@ -8297,22 +10989,30 @@
             </a:r>
           </a:p>
           <a:p>
-            <a:r>
-              <a:rPr lang="en-US" b="1" dirty="0"/>
-              <a:t>Inter-device reliability</a:t>
-            </a:r>
-          </a:p>
-          <a:p>
             <a:pPr lvl="1"/>
+            <a:endParaRPr lang="en-US" dirty="0"/>
+          </a:p>
+          <a:p>
             <a:r>
               <a:rPr lang="en-US" dirty="0"/>
-              <a:t>Do two units of the same device produce similar measurements?</a:t>
-            </a:r>
-          </a:p>
-          <a:p>
-            <a:r>
-              <a:rPr lang="en-US" b="1" dirty="0"/>
-              <a:t>Interrater reliability</a:t>
+              <a:t>Intra-rater reliability</a:t>
+            </a:r>
+          </a:p>
+          <a:p>
+            <a:pPr lvl="1"/>
+            <a:r>
+              <a:rPr lang="en-US" dirty="0"/>
+              <a:t>Does the same observer produce similar measurements when repeating the process?</a:t>
+            </a:r>
+          </a:p>
+          <a:p>
+            <a:pPr lvl="1"/>
+            <a:endParaRPr lang="en-US" dirty="0"/>
+          </a:p>
+          <a:p>
+            <a:r>
+              <a:rPr lang="en-US" dirty="0"/>
+              <a:t>Inter-rater reliability</a:t>
             </a:r>
           </a:p>
           <a:p>
@@ -8320,23 +11020,6 @@
             <a:r>
               <a:rPr lang="en-US" dirty="0"/>
               <a:t>Do different observers produce similar measurements?</a:t>
-            </a:r>
-          </a:p>
-          <a:p>
-            <a:r>
-              <a:rPr lang="en-US" b="1" dirty="0" err="1"/>
-              <a:t>Intrarater</a:t>
-            </a:r>
-            <a:r>
-              <a:rPr lang="en-US" b="1" dirty="0"/>
-              <a:t> reliability</a:t>
-            </a:r>
-          </a:p>
-          <a:p>
-            <a:pPr lvl="1"/>
-            <a:r>
-              <a:rPr lang="en-US" dirty="0"/>
-              <a:t>Does the same observer produce similar measurements when repeating the process?</a:t>
             </a:r>
           </a:p>
           <a:p>
@@ -8397,7 +11080,7 @@
           <a:p>
             <a:r>
               <a:rPr lang="en-US" dirty="0"/>
-              <a:t>Example </a:t>
+              <a:t>Reliable… but valid? </a:t>
             </a:r>
           </a:p>
         </p:txBody>
@@ -8424,45 +11107,45 @@
           <a:lstStyle/>
           <a:p>
             <a:r>
-              <a:rPr lang="en-US" dirty="0"/>
+              <a:rPr lang="en-US"/>
               <a:t>An athlete completes the same jump test three times under similar conditions:</a:t>
             </a:r>
           </a:p>
           <a:p>
             <a:pPr lvl="1"/>
             <a:r>
-              <a:rPr lang="en-US" dirty="0"/>
+              <a:rPr lang="en-US"/>
               <a:t>Trial 1: 41.2 cm </a:t>
             </a:r>
           </a:p>
           <a:p>
             <a:pPr lvl="1"/>
             <a:r>
-              <a:rPr lang="en-US" dirty="0"/>
+              <a:rPr lang="en-US"/>
               <a:t>Trial 2: 41.0 cm </a:t>
             </a:r>
           </a:p>
           <a:p>
             <a:pPr lvl="1"/>
             <a:r>
-              <a:rPr lang="en-US" dirty="0"/>
+              <a:rPr lang="en-US"/>
               <a:t>Trial 3: 41.3 cm </a:t>
             </a:r>
           </a:p>
           <a:p>
             <a:r>
-              <a:rPr lang="en-US" dirty="0"/>
+              <a:rPr lang="en-US"/>
               <a:t>The results appear highly reliable.</a:t>
             </a:r>
           </a:p>
           <a:p>
             <a:r>
-              <a:rPr lang="en-US" dirty="0"/>
+              <a:rPr lang="en-US"/>
               <a:t>But that does not tell us whether the device is measuring jump height correctly.</a:t>
             </a:r>
           </a:p>
           <a:p>
-            <a:endParaRPr lang="en-US" dirty="0"/>
+            <a:endParaRPr lang="en-US"/>
           </a:p>
         </p:txBody>
       </p:sp>
@@ -8520,7 +11203,7 @@
           <a:lstStyle/>
           <a:p>
             <a:r>
-              <a:rPr lang="en-US" dirty="0"/>
+              <a:rPr lang="en-US"/>
               <a:t>Are we measuring what we intend to measure?</a:t>
             </a:r>
           </a:p>
@@ -8553,7 +11236,7 @@
           <a:lstStyle/>
           <a:p>
             <a:r>
-              <a:rPr lang="en-US" dirty="0"/>
+              <a:rPr lang="en-US"/>
               <a:t>A valid measurement accurately represents the concept or outcome we want to study.</a:t>
             </a:r>
           </a:p>
@@ -8783,37 +11466,37 @@
           </a:lstStyle>
           <a:p>
             <a:r>
-              <a:rPr lang="en-US" dirty="0"/>
+              <a:rPr lang="en-US"/>
               <a:t>Examples:</a:t>
             </a:r>
           </a:p>
           <a:p>
             <a:pPr lvl="1"/>
             <a:r>
-              <a:rPr lang="en-US" dirty="0"/>
+              <a:rPr lang="en-US"/>
               <a:t>Does the device accurately measure distance traveled? </a:t>
             </a:r>
           </a:p>
           <a:p>
             <a:pPr lvl="1"/>
             <a:r>
-              <a:rPr lang="en-US" dirty="0"/>
+              <a:rPr lang="en-US"/>
               <a:t>Does “player load” represent overall physical stress? </a:t>
             </a:r>
           </a:p>
           <a:p>
             <a:pPr lvl="1"/>
             <a:r>
-              <a:rPr lang="en-US" dirty="0"/>
+              <a:rPr lang="en-US"/>
               <a:t>Does AVG represent offensive contribution? </a:t>
             </a:r>
           </a:p>
           <a:p>
             <a:pPr lvl="1"/>
-            <a:endParaRPr lang="en-US" dirty="0"/>
-          </a:p>
-          <a:p>
-            <a:endParaRPr lang="en-US" dirty="0"/>
+            <a:endParaRPr lang="en-US"/>
+          </a:p>
+          <a:p>
+            <a:endParaRPr lang="en-US"/>
           </a:p>
         </p:txBody>
       </p:sp>
@@ -8846,7 +11529,7 @@
           <a:lstStyle/>
           <a:p>
             <a:r>
-              <a:rPr lang="en-US" sz="1800" dirty="0">
+              <a:rPr lang="en-US" sz="1800">
                 <a:solidFill>
                   <a:srgbClr val="FF0000"/>
                 </a:solidFill>

--- a/pptx/Lecture5.pptx
+++ b/pptx/Lecture5.pptx
@@ -142,6 +142,11 @@
       </a:defRPr>
     </a:lvl9pPr>
   </p:defaultTextStyle>
+  <p:extLst>
+    <p:ext uri="{EFAFB233-063F-42B5-8137-9DF3F51BA10A}">
+      <p15:sldGuideLst xmlns:p15="http://schemas.microsoft.com/office/powerpoint/2012/main"/>
+    </p:ext>
+  </p:extLst>
 </p:presentation>
 </file>
 
@@ -485,7 +490,7 @@
           <a:p>
             <a:fld id="{4995A223-E7C9-A243-9A70-FE01E1A1DD65}" type="datetimeFigureOut">
               <a:rPr lang="en-US" smtClean="0"/>
-              <a:t>9/15/2026</a:t>
+              <a:t>9/15/26</a:t>
             </a:fld>
             <a:endParaRPr lang="en-US"/>
           </a:p>
@@ -1558,7 +1563,7 @@
           <a:p>
             <a:fld id="{1BF61C71-767E-B84C-BFB3-7B18856D27F4}" type="datetimeFigureOut">
               <a:rPr lang="en-US" smtClean="0"/>
-              <a:t>9/15/2026</a:t>
+              <a:t>9/15/26</a:t>
             </a:fld>
             <a:endParaRPr lang="en-US"/>
           </a:p>
@@ -1766,7 +1771,7 @@
           <a:p>
             <a:fld id="{1BF61C71-767E-B84C-BFB3-7B18856D27F4}" type="datetimeFigureOut">
               <a:rPr lang="en-US" smtClean="0"/>
-              <a:t>9/15/2026</a:t>
+              <a:t>9/15/26</a:t>
             </a:fld>
             <a:endParaRPr lang="en-US"/>
           </a:p>
@@ -1984,7 +1989,7 @@
           <a:p>
             <a:fld id="{1BF61C71-767E-B84C-BFB3-7B18856D27F4}" type="datetimeFigureOut">
               <a:rPr lang="en-US" smtClean="0"/>
-              <a:t>9/15/2026</a:t>
+              <a:t>9/15/26</a:t>
             </a:fld>
             <a:endParaRPr lang="en-US"/>
           </a:p>
@@ -2192,7 +2197,7 @@
           <a:p>
             <a:fld id="{1BF61C71-767E-B84C-BFB3-7B18856D27F4}" type="datetimeFigureOut">
               <a:rPr lang="en-US" smtClean="0"/>
-              <a:t>9/15/2026</a:t>
+              <a:t>9/15/26</a:t>
             </a:fld>
             <a:endParaRPr lang="en-US"/>
           </a:p>
@@ -2476,7 +2481,7 @@
           <a:p>
             <a:fld id="{1BF61C71-767E-B84C-BFB3-7B18856D27F4}" type="datetimeFigureOut">
               <a:rPr lang="en-US" smtClean="0"/>
-              <a:t>9/15/2026</a:t>
+              <a:t>9/15/26</a:t>
             </a:fld>
             <a:endParaRPr lang="en-US"/>
           </a:p>
@@ -2752,7 +2757,7 @@
           <a:p>
             <a:fld id="{1BF61C71-767E-B84C-BFB3-7B18856D27F4}" type="datetimeFigureOut">
               <a:rPr lang="en-US" smtClean="0"/>
-              <a:t>9/15/2026</a:t>
+              <a:t>9/15/26</a:t>
             </a:fld>
             <a:endParaRPr lang="en-US"/>
           </a:p>
@@ -3175,7 +3180,7 @@
           <a:p>
             <a:fld id="{1BF61C71-767E-B84C-BFB3-7B18856D27F4}" type="datetimeFigureOut">
               <a:rPr lang="en-US" smtClean="0"/>
-              <a:t>9/15/2026</a:t>
+              <a:t>9/15/26</a:t>
             </a:fld>
             <a:endParaRPr lang="en-US"/>
           </a:p>
@@ -3325,7 +3330,7 @@
           <a:p>
             <a:fld id="{1BF61C71-767E-B84C-BFB3-7B18856D27F4}" type="datetimeFigureOut">
               <a:rPr lang="en-US" smtClean="0"/>
-              <a:t>9/15/2026</a:t>
+              <a:t>9/15/26</a:t>
             </a:fld>
             <a:endParaRPr lang="en-US"/>
           </a:p>
@@ -3446,7 +3451,7 @@
           <a:p>
             <a:fld id="{1BF61C71-767E-B84C-BFB3-7B18856D27F4}" type="datetimeFigureOut">
               <a:rPr lang="en-US" smtClean="0"/>
-              <a:t>9/15/2026</a:t>
+              <a:t>9/15/26</a:t>
             </a:fld>
             <a:endParaRPr lang="en-US"/>
           </a:p>
@@ -3767,7 +3772,7 @@
           <a:p>
             <a:fld id="{1BF61C71-767E-B84C-BFB3-7B18856D27F4}" type="datetimeFigureOut">
               <a:rPr lang="en-US" smtClean="0"/>
-              <a:t>9/15/2026</a:t>
+              <a:t>9/15/26</a:t>
             </a:fld>
             <a:endParaRPr lang="en-US"/>
           </a:p>
@@ -4064,7 +4069,7 @@
           <a:p>
             <a:fld id="{1BF61C71-767E-B84C-BFB3-7B18856D27F4}" type="datetimeFigureOut">
               <a:rPr lang="en-US" smtClean="0"/>
-              <a:t>9/15/2026</a:t>
+              <a:t>9/15/26</a:t>
             </a:fld>
             <a:endParaRPr lang="en-US"/>
           </a:p>
@@ -4318,7 +4323,7 @@
           <a:p>
             <a:fld id="{1BF61C71-767E-B84C-BFB3-7B18856D27F4}" type="datetimeFigureOut">
               <a:rPr lang="en-US" smtClean="0"/>
-              <a:t>9/15/2026</a:t>
+              <a:t>9/15/26</a:t>
             </a:fld>
             <a:endParaRPr lang="en-US"/>
           </a:p>
@@ -5370,8 +5375,8 @@
           </a:p>
         </p:txBody>
       </p:sp>
-      <mc:AlternateContent xmlns:mc="http://schemas.openxmlformats.org/markup-compatibility/2006">
-        <mc:Choice xmlns:a14="http://schemas.microsoft.com/office/drawing/2010/main" Requires="a14">
+      <mc:AlternateContent xmlns:mc="http://schemas.openxmlformats.org/markup-compatibility/2006" xmlns:a14="http://schemas.microsoft.com/office/drawing/2010/main">
+        <mc:Choice Requires="a14">
           <p:sp>
             <p:nvSpPr>
               <p:cNvPr id="3" name="Content Placeholder 2">
@@ -5515,7 +5520,7 @@
             </p:txBody>
           </p:sp>
         </mc:Choice>
-        <mc:Fallback>
+        <mc:Fallback xmlns="">
           <p:sp>
             <p:nvSpPr>
               <p:cNvPr id="3" name="Content Placeholder 2">
@@ -6287,7 +6292,7 @@
 </file>
 
 <file path=ppt/slides/slide19.xml><?xml version="1.0" encoding="utf-8"?>
-<p:sld xmlns:a="http://schemas.openxmlformats.org/drawingml/2006/main" xmlns:r="http://schemas.openxmlformats.org/officeDocument/2006/relationships" xmlns:p="http://schemas.openxmlformats.org/presentationml/2006/main">
+<p:sld xmlns:a="http://schemas.openxmlformats.org/drawingml/2006/main" xmlns:r="http://schemas.openxmlformats.org/officeDocument/2006/relationships" xmlns:p="http://schemas.openxmlformats.org/presentationml/2006/main" show="0">
   <p:cSld>
     <p:spTree>
       <p:nvGrpSpPr>
@@ -6355,69 +6360,69 @@
           <a:lstStyle/>
           <a:p>
             <a:r>
-              <a:rPr lang="en-US"/>
+              <a:rPr lang="en-US" dirty="0"/>
               <a:t>Athlete monitoring raises several questions:</a:t>
             </a:r>
           </a:p>
           <a:p>
             <a:pPr lvl="1"/>
             <a:r>
-              <a:rPr lang="en-US"/>
+              <a:rPr lang="en-US" dirty="0"/>
               <a:t>Do athletes understand what is being collected? </a:t>
             </a:r>
           </a:p>
           <a:p>
             <a:pPr lvl="1"/>
             <a:r>
-              <a:rPr lang="en-US"/>
+              <a:rPr lang="en-US" dirty="0"/>
               <a:t>Can they meaningfully refuse? </a:t>
             </a:r>
           </a:p>
           <a:p>
             <a:pPr lvl="1"/>
             <a:r>
-              <a:rPr lang="en-US"/>
+              <a:rPr lang="en-US" dirty="0"/>
               <a:t>Who owns the data? </a:t>
             </a:r>
           </a:p>
           <a:p>
             <a:pPr lvl="1"/>
             <a:r>
-              <a:rPr lang="en-US"/>
+              <a:rPr lang="en-US" dirty="0"/>
               <a:t>Who can access it? </a:t>
             </a:r>
           </a:p>
           <a:p>
             <a:pPr lvl="1"/>
             <a:r>
-              <a:rPr lang="en-US"/>
+              <a:rPr lang="en-US" dirty="0"/>
               <a:t>How long will it be stored? </a:t>
             </a:r>
           </a:p>
           <a:p>
             <a:pPr lvl="1"/>
             <a:r>
-              <a:rPr lang="en-US"/>
+              <a:rPr lang="en-US" dirty="0"/>
               <a:t>Can it be used for purposes beyond the original reason for collection? </a:t>
             </a:r>
           </a:p>
           <a:p>
             <a:pPr lvl="1"/>
             <a:r>
-              <a:rPr lang="en-US"/>
+              <a:rPr lang="en-US" dirty="0"/>
               <a:t>What happens when an athlete leaves the team?</a:t>
             </a:r>
           </a:p>
           <a:p>
             <a:pPr lvl="1"/>
-            <a:endParaRPr lang="en-US"/>
-          </a:p>
-          <a:p>
-            <a:r>
-              <a:rPr lang="en-US" b="1"/>
+            <a:endParaRPr lang="en-US" dirty="0"/>
+          </a:p>
+          <a:p>
+            <a:r>
+              <a:rPr lang="en-US" b="1" dirty="0"/>
               <a:t>Participation is not necessarily the same as informed consent.</a:t>
             </a:r>
-            <a:endParaRPr lang="en-US"/>
+            <a:endParaRPr lang="en-US" dirty="0"/>
           </a:p>
         </p:txBody>
       </p:sp>

--- a/pptx/Lecture5.pptx
+++ b/pptx/Lecture5.pptx
@@ -490,7 +490,7 @@
           <a:p>
             <a:fld id="{4995A223-E7C9-A243-9A70-FE01E1A1DD65}" type="datetimeFigureOut">
               <a:rPr lang="en-US" smtClean="0"/>
-              <a:t>9/15/2026</a:t>
+              <a:t>9/15/26</a:t>
             </a:fld>
             <a:endParaRPr lang="en-US"/>
           </a:p>
@@ -1382,6 +1382,93 @@
   <p:cSld>
     <p:spTree>
       <p:nvGrpSpPr>
+        <p:cNvPr id="1" name=""/>
+        <p:cNvGrpSpPr/>
+        <p:nvPr/>
+      </p:nvGrpSpPr>
+      <p:grpSpPr>
+        <a:xfrm>
+          <a:off x="0" y="0"/>
+          <a:ext cx="0" cy="0"/>
+          <a:chOff x="0" y="0"/>
+          <a:chExt cx="0" cy="0"/>
+        </a:xfrm>
+      </p:grpSpPr>
+      <p:sp>
+        <p:nvSpPr>
+          <p:cNvPr id="2" name="Slide Image Placeholder 1"/>
+          <p:cNvSpPr>
+            <a:spLocks noGrp="1" noRot="1" noChangeAspect="1"/>
+          </p:cNvSpPr>
+          <p:nvPr>
+            <p:ph type="sldImg"/>
+          </p:nvPr>
+        </p:nvSpPr>
+        <p:spPr/>
+      </p:sp>
+      <p:sp>
+        <p:nvSpPr>
+          <p:cNvPr id="3" name="Notes Placeholder 2"/>
+          <p:cNvSpPr>
+            <a:spLocks noGrp="1"/>
+          </p:cNvSpPr>
+          <p:nvPr>
+            <p:ph type="body" idx="1"/>
+          </p:nvPr>
+        </p:nvSpPr>
+        <p:spPr/>
+        <p:txBody>
+          <a:bodyPr/>
+          <a:lstStyle/>
+          <a:p>
+            <a:r>
+              <a:rPr lang="en-US" dirty="0"/>
+              <a:t>Or data source – non monitoring is fine too</a:t>
+            </a:r>
+          </a:p>
+        </p:txBody>
+      </p:sp>
+      <p:sp>
+        <p:nvSpPr>
+          <p:cNvPr id="4" name="Slide Number Placeholder 3"/>
+          <p:cNvSpPr>
+            <a:spLocks noGrp="1"/>
+          </p:cNvSpPr>
+          <p:nvPr>
+            <p:ph type="sldNum" sz="quarter" idx="5"/>
+          </p:nvPr>
+        </p:nvSpPr>
+        <p:spPr/>
+        <p:txBody>
+          <a:bodyPr/>
+          <a:lstStyle/>
+          <a:p>
+            <a:fld id="{117D17FD-8842-8E4F-8C3E-EC8B634B2D5A}" type="slidenum">
+              <a:rPr lang="en-US" smtClean="0"/>
+              <a:t>15</a:t>
+            </a:fld>
+            <a:endParaRPr lang="en-US"/>
+          </a:p>
+        </p:txBody>
+      </p:sp>
+    </p:spTree>
+    <p:extLst>
+      <p:ext uri="{BB962C8B-B14F-4D97-AF65-F5344CB8AC3E}">
+        <p14:creationId xmlns:p14="http://schemas.microsoft.com/office/powerpoint/2010/main" val="1627310033"/>
+      </p:ext>
+    </p:extLst>
+  </p:cSld>
+  <p:clrMapOvr>
+    <a:masterClrMapping/>
+  </p:clrMapOvr>
+</p:notes>
+</file>
+
+<file path=ppt/notesSlides/notesSlide7.xml><?xml version="1.0" encoding="utf-8"?>
+<p:notes xmlns:a="http://schemas.openxmlformats.org/drawingml/2006/main" xmlns:r="http://schemas.openxmlformats.org/officeDocument/2006/relationships" xmlns:p="http://schemas.openxmlformats.org/presentationml/2006/main">
+  <p:cSld>
+    <p:spTree>
+      <p:nvGrpSpPr>
         <p:cNvPr id="1" name="">
           <a:extLst>
             <a:ext uri="{FF2B5EF4-FFF2-40B4-BE49-F238E27FC236}">
@@ -1577,7 +1664,7 @@
 </p:notes>
 </file>
 
-<file path=ppt/notesSlides/notesSlide7.xml><?xml version="1.0" encoding="utf-8"?>
+<file path=ppt/notesSlides/notesSlide8.xml><?xml version="1.0" encoding="utf-8"?>
 <p:notes xmlns:a="http://schemas.openxmlformats.org/drawingml/2006/main" xmlns:r="http://schemas.openxmlformats.org/officeDocument/2006/relationships" xmlns:p="http://schemas.openxmlformats.org/presentationml/2006/main">
   <p:cSld>
     <p:spTree>
@@ -1661,7 +1748,7 @@
 </p:notes>
 </file>
 
-<file path=ppt/notesSlides/notesSlide8.xml><?xml version="1.0" encoding="utf-8"?>
+<file path=ppt/notesSlides/notesSlide9.xml><?xml version="1.0" encoding="utf-8"?>
 <p:notes xmlns:a="http://schemas.openxmlformats.org/drawingml/2006/main" xmlns:r="http://schemas.openxmlformats.org/officeDocument/2006/relationships" xmlns:p="http://schemas.openxmlformats.org/presentationml/2006/main">
   <p:cSld>
     <p:spTree>
@@ -1919,7 +2006,7 @@
           <a:p>
             <a:fld id="{1BF61C71-767E-B84C-BFB3-7B18856D27F4}" type="datetimeFigureOut">
               <a:rPr lang="en-US" smtClean="0"/>
-              <a:t>9/15/2026</a:t>
+              <a:t>9/15/26</a:t>
             </a:fld>
             <a:endParaRPr lang="en-US"/>
           </a:p>
@@ -2127,7 +2214,7 @@
           <a:p>
             <a:fld id="{1BF61C71-767E-B84C-BFB3-7B18856D27F4}" type="datetimeFigureOut">
               <a:rPr lang="en-US" smtClean="0"/>
-              <a:t>9/15/2026</a:t>
+              <a:t>9/15/26</a:t>
             </a:fld>
             <a:endParaRPr lang="en-US"/>
           </a:p>
@@ -2345,7 +2432,7 @@
           <a:p>
             <a:fld id="{1BF61C71-767E-B84C-BFB3-7B18856D27F4}" type="datetimeFigureOut">
               <a:rPr lang="en-US" smtClean="0"/>
-              <a:t>9/15/2026</a:t>
+              <a:t>9/15/26</a:t>
             </a:fld>
             <a:endParaRPr lang="en-US"/>
           </a:p>
@@ -2553,7 +2640,7 @@
           <a:p>
             <a:fld id="{1BF61C71-767E-B84C-BFB3-7B18856D27F4}" type="datetimeFigureOut">
               <a:rPr lang="en-US" smtClean="0"/>
-              <a:t>9/15/2026</a:t>
+              <a:t>9/15/26</a:t>
             </a:fld>
             <a:endParaRPr lang="en-US"/>
           </a:p>
@@ -2837,7 +2924,7 @@
           <a:p>
             <a:fld id="{1BF61C71-767E-B84C-BFB3-7B18856D27F4}" type="datetimeFigureOut">
               <a:rPr lang="en-US" smtClean="0"/>
-              <a:t>9/15/2026</a:t>
+              <a:t>9/15/26</a:t>
             </a:fld>
             <a:endParaRPr lang="en-US"/>
           </a:p>
@@ -3113,7 +3200,7 @@
           <a:p>
             <a:fld id="{1BF61C71-767E-B84C-BFB3-7B18856D27F4}" type="datetimeFigureOut">
               <a:rPr lang="en-US" smtClean="0"/>
-              <a:t>9/15/2026</a:t>
+              <a:t>9/15/26</a:t>
             </a:fld>
             <a:endParaRPr lang="en-US"/>
           </a:p>
@@ -3536,7 +3623,7 @@
           <a:p>
             <a:fld id="{1BF61C71-767E-B84C-BFB3-7B18856D27F4}" type="datetimeFigureOut">
               <a:rPr lang="en-US" smtClean="0"/>
-              <a:t>9/15/2026</a:t>
+              <a:t>9/15/26</a:t>
             </a:fld>
             <a:endParaRPr lang="en-US"/>
           </a:p>
@@ -3686,7 +3773,7 @@
           <a:p>
             <a:fld id="{1BF61C71-767E-B84C-BFB3-7B18856D27F4}" type="datetimeFigureOut">
               <a:rPr lang="en-US" smtClean="0"/>
-              <a:t>9/15/2026</a:t>
+              <a:t>9/15/26</a:t>
             </a:fld>
             <a:endParaRPr lang="en-US"/>
           </a:p>
@@ -3807,7 +3894,7 @@
           <a:p>
             <a:fld id="{1BF61C71-767E-B84C-BFB3-7B18856D27F4}" type="datetimeFigureOut">
               <a:rPr lang="en-US" smtClean="0"/>
-              <a:t>9/15/2026</a:t>
+              <a:t>9/15/26</a:t>
             </a:fld>
             <a:endParaRPr lang="en-US"/>
           </a:p>
@@ -4128,7 +4215,7 @@
           <a:p>
             <a:fld id="{1BF61C71-767E-B84C-BFB3-7B18856D27F4}" type="datetimeFigureOut">
               <a:rPr lang="en-US" smtClean="0"/>
-              <a:t>9/15/2026</a:t>
+              <a:t>9/15/26</a:t>
             </a:fld>
             <a:endParaRPr lang="en-US"/>
           </a:p>
@@ -4425,7 +4512,7 @@
           <a:p>
             <a:fld id="{1BF61C71-767E-B84C-BFB3-7B18856D27F4}" type="datetimeFigureOut">
               <a:rPr lang="en-US" smtClean="0"/>
-              <a:t>9/15/2026</a:t>
+              <a:t>9/15/26</a:t>
             </a:fld>
             <a:endParaRPr lang="en-US"/>
           </a:p>
@@ -4679,7 +4766,7 @@
           <a:p>
             <a:fld id="{1BF61C71-767E-B84C-BFB3-7B18856D27F4}" type="datetimeFigureOut">
               <a:rPr lang="en-US" smtClean="0"/>
-              <a:t>9/15/2026</a:t>
+              <a:t>9/15/26</a:t>
             </a:fld>
             <a:endParaRPr lang="en-US"/>
           </a:p>
@@ -6757,8 +6844,8 @@
           </a:p>
         </p:txBody>
       </p:sp>
-      <mc:AlternateContent xmlns:mc="http://schemas.openxmlformats.org/markup-compatibility/2006">
-        <mc:Choice xmlns:a14="http://schemas.microsoft.com/office/drawing/2010/main" Requires="a14">
+      <mc:AlternateContent xmlns:mc="http://schemas.openxmlformats.org/markup-compatibility/2006" xmlns:a14="http://schemas.microsoft.com/office/drawing/2010/main">
+        <mc:Choice Requires="a14">
           <p:sp>
             <p:nvSpPr>
               <p:cNvPr id="3" name="Content Placeholder 2">
@@ -6902,7 +6989,7 @@
             </p:txBody>
           </p:sp>
         </mc:Choice>
-        <mc:Fallback>
+        <mc:Fallback xmlns="">
           <p:sp>
             <p:nvSpPr>
               <p:cNvPr id="3" name="Content Placeholder 2">
@@ -8391,15 +8478,33 @@
                                   </p:childTnLst>
                                 </p:cTn>
                               </p:par>
+                            </p:childTnLst>
+                          </p:cTn>
+                        </p:par>
+                      </p:childTnLst>
+                    </p:cTn>
+                  </p:par>
+                  <p:par>
+                    <p:cTn id="7" fill="hold">
+                      <p:stCondLst>
+                        <p:cond delay="indefinite"/>
+                      </p:stCondLst>
+                      <p:childTnLst>
+                        <p:par>
+                          <p:cTn id="8" fill="hold">
+                            <p:stCondLst>
+                              <p:cond delay="0"/>
+                            </p:stCondLst>
+                            <p:childTnLst>
                               <p:par>
-                                <p:cTn id="7" presetID="1" presetClass="entr" presetSubtype="0" fill="hold" grpId="0" nodeType="withEffect">
+                                <p:cTn id="9" presetID="1" presetClass="entr" presetSubtype="0" fill="hold" grpId="0" nodeType="clickEffect">
                                   <p:stCondLst>
                                     <p:cond delay="0"/>
                                   </p:stCondLst>
                                   <p:childTnLst>
                                     <p:set>
                                       <p:cBhvr>
-                                        <p:cTn id="8" dur="1" fill="hold">
+                                        <p:cTn id="10" dur="1" fill="hold">
                                           <p:stCondLst>
                                             <p:cond delay="0"/>
                                           </p:stCondLst>
@@ -8422,15 +8527,33 @@
                                   </p:childTnLst>
                                 </p:cTn>
                               </p:par>
+                            </p:childTnLst>
+                          </p:cTn>
+                        </p:par>
+                      </p:childTnLst>
+                    </p:cTn>
+                  </p:par>
+                  <p:par>
+                    <p:cTn id="11" fill="hold">
+                      <p:stCondLst>
+                        <p:cond delay="indefinite"/>
+                      </p:stCondLst>
+                      <p:childTnLst>
+                        <p:par>
+                          <p:cTn id="12" fill="hold">
+                            <p:stCondLst>
+                              <p:cond delay="0"/>
+                            </p:stCondLst>
+                            <p:childTnLst>
                               <p:par>
-                                <p:cTn id="9" presetID="1" presetClass="entr" presetSubtype="0" fill="hold" grpId="0" nodeType="withEffect">
+                                <p:cTn id="13" presetID="1" presetClass="entr" presetSubtype="0" fill="hold" grpId="0" nodeType="clickEffect">
                                   <p:stCondLst>
                                     <p:cond delay="0"/>
                                   </p:stCondLst>
                                   <p:childTnLst>
                                     <p:set>
                                       <p:cBhvr>
-                                        <p:cTn id="10" dur="1" fill="hold">
+                                        <p:cTn id="14" dur="1" fill="hold">
                                           <p:stCondLst>
                                             <p:cond delay="0"/>
                                           </p:stCondLst>
@@ -8453,15 +8576,33 @@
                                   </p:childTnLst>
                                 </p:cTn>
                               </p:par>
+                            </p:childTnLst>
+                          </p:cTn>
+                        </p:par>
+                      </p:childTnLst>
+                    </p:cTn>
+                  </p:par>
+                  <p:par>
+                    <p:cTn id="15" fill="hold">
+                      <p:stCondLst>
+                        <p:cond delay="indefinite"/>
+                      </p:stCondLst>
+                      <p:childTnLst>
+                        <p:par>
+                          <p:cTn id="16" fill="hold">
+                            <p:stCondLst>
+                              <p:cond delay="0"/>
+                            </p:stCondLst>
+                            <p:childTnLst>
                               <p:par>
-                                <p:cTn id="11" presetID="1" presetClass="entr" presetSubtype="0" fill="hold" grpId="0" nodeType="withEffect">
+                                <p:cTn id="17" presetID="1" presetClass="entr" presetSubtype="0" fill="hold" grpId="0" nodeType="clickEffect">
                                   <p:stCondLst>
                                     <p:cond delay="0"/>
                                   </p:stCondLst>
                                   <p:childTnLst>
                                     <p:set>
                                       <p:cBhvr>
-                                        <p:cTn id="12" dur="1" fill="hold">
+                                        <p:cTn id="18" dur="1" fill="hold">
                                           <p:stCondLst>
                                             <p:cond delay="0"/>
                                           </p:stCondLst>
@@ -8484,15 +8625,33 @@
                                   </p:childTnLst>
                                 </p:cTn>
                               </p:par>
+                            </p:childTnLst>
+                          </p:cTn>
+                        </p:par>
+                      </p:childTnLst>
+                    </p:cTn>
+                  </p:par>
+                  <p:par>
+                    <p:cTn id="19" fill="hold">
+                      <p:stCondLst>
+                        <p:cond delay="indefinite"/>
+                      </p:stCondLst>
+                      <p:childTnLst>
+                        <p:par>
+                          <p:cTn id="20" fill="hold">
+                            <p:stCondLst>
+                              <p:cond delay="0"/>
+                            </p:stCondLst>
+                            <p:childTnLst>
                               <p:par>
-                                <p:cTn id="13" presetID="1" presetClass="entr" presetSubtype="0" fill="hold" grpId="0" nodeType="withEffect">
+                                <p:cTn id="21" presetID="1" presetClass="entr" presetSubtype="0" fill="hold" grpId="0" nodeType="clickEffect">
                                   <p:stCondLst>
                                     <p:cond delay="0"/>
                                   </p:stCondLst>
                                   <p:childTnLst>
                                     <p:set>
                                       <p:cBhvr>
-                                        <p:cTn id="14" dur="1" fill="hold">
+                                        <p:cTn id="22" dur="1" fill="hold">
                                           <p:stCondLst>
                                             <p:cond delay="0"/>
                                           </p:stCondLst>
@@ -8515,15 +8674,33 @@
                                   </p:childTnLst>
                                 </p:cTn>
                               </p:par>
+                            </p:childTnLst>
+                          </p:cTn>
+                        </p:par>
+                      </p:childTnLst>
+                    </p:cTn>
+                  </p:par>
+                  <p:par>
+                    <p:cTn id="23" fill="hold">
+                      <p:stCondLst>
+                        <p:cond delay="indefinite"/>
+                      </p:stCondLst>
+                      <p:childTnLst>
+                        <p:par>
+                          <p:cTn id="24" fill="hold">
+                            <p:stCondLst>
+                              <p:cond delay="0"/>
+                            </p:stCondLst>
+                            <p:childTnLst>
                               <p:par>
-                                <p:cTn id="15" presetID="1" presetClass="entr" presetSubtype="0" fill="hold" grpId="0" nodeType="withEffect">
+                                <p:cTn id="25" presetID="1" presetClass="entr" presetSubtype="0" fill="hold" grpId="0" nodeType="clickEffect">
                                   <p:stCondLst>
                                     <p:cond delay="0"/>
                                   </p:stCondLst>
                                   <p:childTnLst>
                                     <p:set>
                                       <p:cBhvr>
-                                        <p:cTn id="16" dur="1" fill="hold">
+                                        <p:cTn id="26" dur="1" fill="hold">
                                           <p:stCondLst>
                                             <p:cond delay="0"/>
                                           </p:stCondLst>
@@ -8546,15 +8723,33 @@
                                   </p:childTnLst>
                                 </p:cTn>
                               </p:par>
+                            </p:childTnLst>
+                          </p:cTn>
+                        </p:par>
+                      </p:childTnLst>
+                    </p:cTn>
+                  </p:par>
+                  <p:par>
+                    <p:cTn id="27" fill="hold">
+                      <p:stCondLst>
+                        <p:cond delay="indefinite"/>
+                      </p:stCondLst>
+                      <p:childTnLst>
+                        <p:par>
+                          <p:cTn id="28" fill="hold">
+                            <p:stCondLst>
+                              <p:cond delay="0"/>
+                            </p:stCondLst>
+                            <p:childTnLst>
                               <p:par>
-                                <p:cTn id="17" presetID="1" presetClass="entr" presetSubtype="0" fill="hold" grpId="0" nodeType="withEffect">
+                                <p:cTn id="29" presetID="1" presetClass="entr" presetSubtype="0" fill="hold" grpId="0" nodeType="clickEffect">
                                   <p:stCondLst>
                                     <p:cond delay="0"/>
                                   </p:stCondLst>
                                   <p:childTnLst>
                                     <p:set>
                                       <p:cBhvr>
-                                        <p:cTn id="18" dur="1" fill="hold">
+                                        <p:cTn id="30" dur="1" fill="hold">
                                           <p:stCondLst>
                                             <p:cond delay="0"/>
                                           </p:stCondLst>
@@ -8577,15 +8772,33 @@
                                   </p:childTnLst>
                                 </p:cTn>
                               </p:par>
+                            </p:childTnLst>
+                          </p:cTn>
+                        </p:par>
+                      </p:childTnLst>
+                    </p:cTn>
+                  </p:par>
+                  <p:par>
+                    <p:cTn id="31" fill="hold">
+                      <p:stCondLst>
+                        <p:cond delay="indefinite"/>
+                      </p:stCondLst>
+                      <p:childTnLst>
+                        <p:par>
+                          <p:cTn id="32" fill="hold">
+                            <p:stCondLst>
+                              <p:cond delay="0"/>
+                            </p:stCondLst>
+                            <p:childTnLst>
                               <p:par>
-                                <p:cTn id="19" presetID="1" presetClass="entr" presetSubtype="0" fill="hold" grpId="0" nodeType="withEffect">
+                                <p:cTn id="33" presetID="1" presetClass="entr" presetSubtype="0" fill="hold" grpId="0" nodeType="clickEffect">
                                   <p:stCondLst>
                                     <p:cond delay="0"/>
                                   </p:stCondLst>
                                   <p:childTnLst>
                                     <p:set>
                                       <p:cBhvr>
-                                        <p:cTn id="20" dur="1" fill="hold">
+                                        <p:cTn id="34" dur="1" fill="hold">
                                           <p:stCondLst>
                                             <p:cond delay="0"/>
                                           </p:stCondLst>
@@ -8608,15 +8821,33 @@
                                   </p:childTnLst>
                                 </p:cTn>
                               </p:par>
+                            </p:childTnLst>
+                          </p:cTn>
+                        </p:par>
+                      </p:childTnLst>
+                    </p:cTn>
+                  </p:par>
+                  <p:par>
+                    <p:cTn id="35" fill="hold">
+                      <p:stCondLst>
+                        <p:cond delay="indefinite"/>
+                      </p:stCondLst>
+                      <p:childTnLst>
+                        <p:par>
+                          <p:cTn id="36" fill="hold">
+                            <p:stCondLst>
+                              <p:cond delay="0"/>
+                            </p:stCondLst>
+                            <p:childTnLst>
                               <p:par>
-                                <p:cTn id="21" presetID="1" presetClass="entr" presetSubtype="0" fill="hold" grpId="0" nodeType="withEffect">
+                                <p:cTn id="37" presetID="1" presetClass="entr" presetSubtype="0" fill="hold" grpId="0" nodeType="clickEffect">
                                   <p:stCondLst>
                                     <p:cond delay="0"/>
                                   </p:stCondLst>
                                   <p:childTnLst>
                                     <p:set>
                                       <p:cBhvr>
-                                        <p:cTn id="22" dur="1" fill="hold">
+                                        <p:cTn id="38" dur="1" fill="hold">
                                           <p:stCondLst>
                                             <p:cond delay="0"/>
                                           </p:stCondLst>
@@ -8667,7 +8898,7 @@
       </p:par>
     </p:tnLst>
     <p:bldLst>
-      <p:bldP spid="3" grpId="0" build="p"/>
+      <p:bldP spid="3" grpId="0" uiExpand="1" build="p"/>
     </p:bldLst>
   </p:timing>
 </p:sld>
@@ -8748,13 +8979,13 @@
           <a:lstStyle/>
           <a:p>
             <a:r>
-              <a:rPr lang="en-US">
+              <a:rPr lang="en-US" dirty="0">
                 <a:ea typeface="+mn-lt"/>
                 <a:cs typeface="+mn-lt"/>
               </a:rPr>
               <a:t>Watch for:</a:t>
             </a:r>
-            <a:endParaRPr lang="en-US"/>
+            <a:endParaRPr lang="en-US" dirty="0"/>
           </a:p>
           <a:p>
             <a:pPr lvl="1">
@@ -8762,13 +8993,13 @@
               <a:buChar char="o"/>
             </a:pPr>
             <a:r>
-              <a:rPr lang="en-US">
+              <a:rPr lang="en-US" dirty="0">
                 <a:ea typeface="+mn-lt"/>
                 <a:cs typeface="+mn-lt"/>
               </a:rPr>
               <a:t>Impossible or implausible values </a:t>
             </a:r>
-            <a:endParaRPr lang="en-US"/>
+            <a:endParaRPr lang="en-US" dirty="0"/>
           </a:p>
           <a:p>
             <a:pPr lvl="1">
@@ -8776,13 +9007,13 @@
               <a:buChar char="o"/>
             </a:pPr>
             <a:r>
-              <a:rPr lang="en-US">
+              <a:rPr lang="en-US" dirty="0">
                 <a:ea typeface="+mn-lt"/>
                 <a:cs typeface="+mn-lt"/>
               </a:rPr>
               <a:t>Sudden changes in measurement scale </a:t>
             </a:r>
-            <a:endParaRPr lang="en-US"/>
+            <a:endParaRPr lang="en-US" dirty="0"/>
           </a:p>
           <a:p>
             <a:pPr lvl="1">
@@ -8790,13 +9021,13 @@
               <a:buChar char="o"/>
             </a:pPr>
             <a:r>
-              <a:rPr lang="en-US">
+              <a:rPr lang="en-US" dirty="0">
                 <a:ea typeface="+mn-lt"/>
                 <a:cs typeface="+mn-lt"/>
               </a:rPr>
               <a:t>Duplicate observations </a:t>
             </a:r>
-            <a:endParaRPr lang="en-US"/>
+            <a:endParaRPr lang="en-US" dirty="0"/>
           </a:p>
           <a:p>
             <a:pPr lvl="1">
@@ -8804,13 +9035,13 @@
               <a:buChar char="o"/>
             </a:pPr>
             <a:r>
-              <a:rPr lang="en-US">
+              <a:rPr lang="en-US" dirty="0">
                 <a:ea typeface="+mn-lt"/>
                 <a:cs typeface="+mn-lt"/>
               </a:rPr>
               <a:t>Unexplained missing data </a:t>
             </a:r>
-            <a:endParaRPr lang="en-US"/>
+            <a:endParaRPr lang="en-US" dirty="0"/>
           </a:p>
           <a:p>
             <a:pPr lvl="1">
@@ -8818,13 +9049,13 @@
               <a:buChar char="o"/>
             </a:pPr>
             <a:r>
-              <a:rPr lang="en-US">
+              <a:rPr lang="en-US" dirty="0">
                 <a:ea typeface="+mn-lt"/>
                 <a:cs typeface="+mn-lt"/>
               </a:rPr>
               <a:t>Changes in devices or software </a:t>
             </a:r>
-            <a:endParaRPr lang="en-US"/>
+            <a:endParaRPr lang="en-US" dirty="0"/>
           </a:p>
           <a:p>
             <a:pPr lvl="1">
@@ -8832,13 +9063,13 @@
               <a:buChar char="o"/>
             </a:pPr>
             <a:r>
-              <a:rPr lang="en-US">
+              <a:rPr lang="en-US" dirty="0">
                 <a:ea typeface="+mn-lt"/>
                 <a:cs typeface="+mn-lt"/>
               </a:rPr>
               <a:t>Inconsistent testing conditions </a:t>
             </a:r>
-            <a:endParaRPr lang="en-US"/>
+            <a:endParaRPr lang="en-US" dirty="0"/>
           </a:p>
           <a:p>
             <a:pPr lvl="1">
@@ -8846,13 +9077,13 @@
               <a:buChar char="o"/>
             </a:pPr>
             <a:r>
-              <a:rPr lang="en-US">
+              <a:rPr lang="en-US" dirty="0">
                 <a:ea typeface="+mn-lt"/>
                 <a:cs typeface="+mn-lt"/>
               </a:rPr>
               <a:t>Different definitions across seasons </a:t>
             </a:r>
-            <a:endParaRPr lang="en-US"/>
+            <a:endParaRPr lang="en-US" dirty="0"/>
           </a:p>
           <a:p>
             <a:pPr lvl="1">
@@ -8860,13 +9091,13 @@
               <a:buChar char="o"/>
             </a:pPr>
             <a:r>
-              <a:rPr lang="en-US">
+              <a:rPr lang="en-US" dirty="0">
                 <a:ea typeface="+mn-lt"/>
                 <a:cs typeface="+mn-lt"/>
               </a:rPr>
               <a:t>Metrics with unclear calculations </a:t>
             </a:r>
-            <a:endParaRPr lang="en-US"/>
+            <a:endParaRPr lang="en-US" dirty="0"/>
           </a:p>
           <a:p>
             <a:pPr lvl="1">
@@ -8874,30 +9105,16 @@
               <a:buChar char="o"/>
             </a:pPr>
             <a:r>
-              <a:rPr lang="en-US">
-                <a:ea typeface="+mn-lt"/>
-                <a:cs typeface="+mn-lt"/>
-              </a:rPr>
-              <a:t>Systematic differences between groups </a:t>
-            </a:r>
-            <a:endParaRPr lang="en-US"/>
-          </a:p>
-          <a:p>
-            <a:pPr lvl="1">
-              <a:buFont typeface="Courier New" panose="020B0604020202020204" pitchFamily="34" charset="0"/>
-              <a:buChar char="o"/>
-            </a:pPr>
-            <a:r>
-              <a:rPr lang="en-US">
+              <a:rPr lang="en-US" dirty="0">
                 <a:ea typeface="+mn-lt"/>
                 <a:cs typeface="+mn-lt"/>
               </a:rPr>
               <a:t>Values that are unusually perfect</a:t>
             </a:r>
-            <a:endParaRPr lang="en-US"/>
-          </a:p>
-          <a:p>
-            <a:endParaRPr lang="en-US"/>
+            <a:endParaRPr lang="en-US" dirty="0"/>
+          </a:p>
+          <a:p>
+            <a:endParaRPr lang="en-US" dirty="0"/>
           </a:p>
         </p:txBody>
       </p:sp>
@@ -9227,37 +9444,6 @@
                                           <p:spTgt spid="3">
                                             <p:txEl>
                                               <p:pRg st="9" end="9"/>
-                                            </p:txEl>
-                                          </p:spTgt>
-                                        </p:tgtEl>
-                                        <p:attrNameLst>
-                                          <p:attrName>style.visibility</p:attrName>
-                                        </p:attrNameLst>
-                                      </p:cBhvr>
-                                      <p:to>
-                                        <p:strVal val="visible"/>
-                                      </p:to>
-                                    </p:set>
-                                  </p:childTnLst>
-                                </p:cTn>
-                              </p:par>
-                              <p:par>
-                                <p:cTn id="25" presetID="1" presetClass="entr" presetSubtype="0" fill="hold" grpId="0" nodeType="withEffect">
-                                  <p:stCondLst>
-                                    <p:cond delay="0"/>
-                                  </p:stCondLst>
-                                  <p:childTnLst>
-                                    <p:set>
-                                      <p:cBhvr>
-                                        <p:cTn id="26" dur="1" fill="hold">
-                                          <p:stCondLst>
-                                            <p:cond delay="0"/>
-                                          </p:stCondLst>
-                                        </p:cTn>
-                                        <p:tgtEl>
-                                          <p:spTgt spid="3">
-                                            <p:txEl>
-                                              <p:pRg st="10" end="10"/>
                                             </p:txEl>
                                           </p:spTgt>
                                         </p:tgtEl>
@@ -12080,7 +12266,21 @@
                 <a:ea typeface="+mn-lt"/>
                 <a:cs typeface="+mn-lt"/>
               </a:rPr>
-              <a:t>No data does not mean no ability.</a:t>
+              <a:t>No data </a:t>
+            </a:r>
+            <a:r>
+              <a:rPr lang="en-US" b="1" u="sng" dirty="0">
+                <a:ea typeface="+mn-lt"/>
+                <a:cs typeface="+mn-lt"/>
+              </a:rPr>
+              <a:t>does not </a:t>
+            </a:r>
+            <a:r>
+              <a:rPr lang="en-US" dirty="0">
+                <a:ea typeface="+mn-lt"/>
+                <a:cs typeface="+mn-lt"/>
+              </a:rPr>
+              <a:t>mean no ability.</a:t>
             </a:r>
             <a:endParaRPr lang="en-US" dirty="0"/>
           </a:p>
@@ -12141,7 +12341,7 @@
                 </a:solidFill>
                 <a:latin typeface="+mn-lt"/>
               </a:rPr>
-              <a:t>If you can't afford the metrics, do you officially cease to exist to modern recruiters?</a:t>
+              <a:t>If you can't afford the metrics, do you cease to exist to modern recruiters?</a:t>
             </a:r>
             <a:endParaRPr lang="en-US" dirty="0">
               <a:solidFill>
